--- a/documents/Presentation.pptx
+++ b/documents/Presentation.pptx
@@ -16,8 +16,8 @@
     <p:sldId id="261" r:id="rId7"/>
     <p:sldId id="262" r:id="rId8"/>
   </p:sldIdLst>
-  <p:sldSz cx="9144000" cy="5143500" type="screen16x9"/>
-  <p:notesSz cx="5143500" cy="9144000"/>
+  <p:sldSz cx="12192000" cy="6858000"/>
+  <p:notesSz cx="6858000" cy="12192000"/>
   <p:defaultTextStyle>
     <a:lvl1pPr marL="0" algn="l" defTabSz="914400" rtl="0" eaLnBrk="1" latinLnBrk="0" hangingPunct="1">
       <a:defRPr sz="1800" kern="1200">
@@ -143,7 +143,7 @@
     </p:spTree>
     <p:extLst>
       <p:ext uri="{BB962C8B-B14F-4D97-AF65-F5344CB8AC3E}">
-        <p14:creationId xmlns:p14="http://schemas.microsoft.com/office/powerpoint/2010/main" val="3439590543"/>
+        <p14:creationId xmlns:p14="http://schemas.microsoft.com/office/powerpoint/2010/main" val="3476162427"/>
       </p:ext>
     </p:extLst>
   </p:cSld>
@@ -1149,7 +1149,7 @@
     <p:bg>
       <p:bgPr>
         <a:solidFill>
-          <a:srgbClr val="12324A"/>
+          <a:srgbClr val="10263B"/>
         </a:solidFill>
         <a:effectLst/>
       </p:bgPr>
@@ -1176,15 +1176,15 @@
         </p:nvSpPr>
         <p:spPr>
           <a:xfrm>
-            <a:off x="6309360" y="-1097280"/>
-            <a:ext cx="4206240" cy="4206240"/>
+            <a:off x="8778240" y="-1645920"/>
+            <a:ext cx="5120640" cy="5120640"/>
           </a:xfrm>
           <a:prstGeom prst="ellipse">
             <a:avLst/>
           </a:prstGeom>
           <a:solidFill>
             <a:srgbClr val="0F8B8D">
-              <a:alpha val="45000"/>
+              <a:alpha val="40000"/>
             </a:srgbClr>
           </a:solidFill>
           <a:ln w="12700">
@@ -1205,15 +1205,15 @@
         </p:nvSpPr>
         <p:spPr>
           <a:xfrm>
-            <a:off x="7132320" y="2926080"/>
-            <a:ext cx="2926080" cy="2926080"/>
+            <a:off x="10332720" y="4206240"/>
+            <a:ext cx="3291840" cy="3291840"/>
           </a:xfrm>
           <a:prstGeom prst="ellipse">
             <a:avLst/>
           </a:prstGeom>
           <a:solidFill>
             <a:srgbClr val="F2A541">
-              <a:alpha val="30000"/>
+              <a:alpha val="25000"/>
             </a:srgbClr>
           </a:solidFill>
           <a:ln w="12700">
@@ -1228,14 +1228,14 @@
       </p:sp>
       <p:sp>
         <p:nvSpPr>
-          <p:cNvPr id="4" name="Text 2"/>
+          <p:cNvPr id="5" name="Text 3"/>
           <p:cNvSpPr txBox="1"/>
           <p:nvPr/>
         </p:nvSpPr>
         <p:spPr>
           <a:xfrm>
-            <a:off x="548640" y="914400"/>
-            <a:ext cx="6400800" cy="1554480"/>
+            <a:off x="731520" y="1280160"/>
+            <a:ext cx="8412480" cy="1737360"/>
           </a:xfrm>
           <a:prstGeom prst="rect">
             <a:avLst/>
@@ -1244,14 +1244,14 @@
           <a:ln/>
         </p:spPr>
         <p:txBody>
-          <a:bodyPr wrap="square" lIns="0" tIns="0" rIns="0" bIns="0" rtlCol="0" anchor="ctr"/>
-          <a:lstStyle/>
-          <a:p>
-            <a:pPr marL="0" indent="0">
-              <a:buNone/>
-            </a:pPr>
-            <a:r>
-              <a:rPr lang="en-US" sz="4200" b="1" dirty="0">
+          <a:bodyPr wrap="square" lIns="0" tIns="0" rIns="0" bIns="0" rtlCol="0" anchor="t"/>
+          <a:lstStyle/>
+          <a:p>
+            <a:pPr marL="0" indent="0">
+              <a:buNone/>
+            </a:pPr>
+            <a:r>
+              <a:rPr lang="en-US" sz="4600" b="1" dirty="0">
                 <a:solidFill>
                   <a:srgbClr val="FFFFFF"/>
                 </a:solidFill>
@@ -1259,39 +1259,22 @@
                 <a:ea typeface="Cambria" pitchFamily="34" charset="-122"/>
                 <a:cs typeface="Cambria" pitchFamily="34" charset="-120"/>
               </a:rPr>
-              <a:t>Retail Inventory</a:t>
-            </a:r>
-            <a:endParaRPr lang="en-US" sz="4200" dirty="0"/>
-          </a:p>
-          <a:p>
-            <a:pPr marL="0" indent="0">
-              <a:buNone/>
-            </a:pPr>
-            <a:r>
-              <a:rPr lang="en-US" sz="4200" b="1" dirty="0">
-                <a:solidFill>
-                  <a:srgbClr val="FFFFFF"/>
-                </a:solidFill>
-                <a:latin typeface="Cambria" pitchFamily="34" charset="0"/>
-                <a:ea typeface="Cambria" pitchFamily="34" charset="-122"/>
-                <a:cs typeface="Cambria" pitchFamily="34" charset="-120"/>
-              </a:rPr>
-              <a:t>Management System</a:t>
-            </a:r>
-            <a:endParaRPr lang="en-US" sz="4200" dirty="0"/>
-          </a:p>
-        </p:txBody>
-      </p:sp>
-      <p:sp>
-        <p:nvSpPr>
-          <p:cNvPr id="5" name="Text 3"/>
+              <a:t>Retail Inventory Management System</a:t>
+            </a:r>
+            <a:endParaRPr lang="en-US" sz="4600" dirty="0"/>
+          </a:p>
+        </p:txBody>
+      </p:sp>
+      <p:sp>
+        <p:nvSpPr>
+          <p:cNvPr id="6" name="Text 4"/>
           <p:cNvSpPr txBox="1"/>
           <p:nvPr/>
         </p:nvSpPr>
         <p:spPr>
           <a:xfrm>
-            <a:off x="548640" y="2606040"/>
-            <a:ext cx="6400800" cy="365760"/>
+            <a:off x="731520" y="3108960"/>
+            <a:ext cx="8229600" cy="411480"/>
           </a:xfrm>
           <a:prstGeom prst="rect">
             <a:avLst/>
@@ -1315,7 +1298,7 @@
                 <a:ea typeface="Calibri" pitchFamily="34" charset="-122"/>
                 <a:cs typeface="Calibri" pitchFamily="34" charset="-120"/>
               </a:rPr>
-              <a:t>Full-stack web application: Angular 22 · Spring Boot · MySQL</a:t>
+              <a:t>Full-stack platform with stateless JWT security and multi-warehouse inventory</a:t>
             </a:r>
             <a:endParaRPr lang="en-US" sz="1800" dirty="0"/>
           </a:p>
@@ -1323,14 +1306,371 @@
       </p:sp>
       <p:sp>
         <p:nvSpPr>
-          <p:cNvPr id="6" name="Text 4"/>
+          <p:cNvPr id="7" name="Shape 5"/>
+          <p:cNvSpPr/>
+          <p:nvPr/>
+        </p:nvSpPr>
+        <p:spPr>
+          <a:xfrm>
+            <a:off x="731520" y="3794760"/>
+            <a:ext cx="1965960" cy="411480"/>
+          </a:xfrm>
+          <a:prstGeom prst="roundRect">
+            <a:avLst>
+              <a:gd name="adj" fmla="val 44444"/>
+            </a:avLst>
+          </a:prstGeom>
+          <a:solidFill>
+            <a:srgbClr val="1C4463"/>
+          </a:solidFill>
+          <a:ln w="12700">
+            <a:solidFill>
+              <a:srgbClr val="2F6A8E"/>
+            </a:solidFill>
+            <a:prstDash val="solid"/>
+          </a:ln>
+        </p:spPr>
+      </p:sp>
+      <p:sp>
+        <p:nvSpPr>
+          <p:cNvPr id="8" name="Text 6"/>
           <p:cNvSpPr txBox="1"/>
           <p:nvPr/>
         </p:nvSpPr>
         <p:spPr>
           <a:xfrm>
-            <a:off x="548640" y="3520440"/>
-            <a:ext cx="6400800" cy="1097280"/>
+            <a:off x="731520" y="3794760"/>
+            <a:ext cx="1965960" cy="411480"/>
+          </a:xfrm>
+          <a:prstGeom prst="rect">
+            <a:avLst/>
+          </a:prstGeom>
+          <a:noFill/>
+          <a:ln/>
+        </p:spPr>
+        <p:txBody>
+          <a:bodyPr wrap="square" lIns="0" tIns="0" rIns="0" bIns="0" rtlCol="0" anchor="ctr"/>
+          <a:lstStyle/>
+          <a:p>
+            <a:pPr marL="0" indent="0" algn="ctr">
+              <a:buNone/>
+            </a:pPr>
+            <a:r>
+              <a:rPr lang="en-US" sz="1300" b="1" dirty="0">
+                <a:solidFill>
+                  <a:srgbClr val="FFFFFF"/>
+                </a:solidFill>
+                <a:latin typeface="Calibri" pitchFamily="34" charset="0"/>
+                <a:ea typeface="Calibri" pitchFamily="34" charset="-122"/>
+                <a:cs typeface="Calibri" pitchFamily="34" charset="-120"/>
+              </a:rPr>
+              <a:t>Java 17 · Spring Boot</a:t>
+            </a:r>
+            <a:endParaRPr lang="en-US" sz="1300" dirty="0"/>
+          </a:p>
+        </p:txBody>
+      </p:sp>
+      <p:sp>
+        <p:nvSpPr>
+          <p:cNvPr id="9" name="Shape 7"/>
+          <p:cNvSpPr/>
+          <p:nvPr/>
+        </p:nvSpPr>
+        <p:spPr>
+          <a:xfrm>
+            <a:off x="2834640" y="3794760"/>
+            <a:ext cx="1965960" cy="411480"/>
+          </a:xfrm>
+          <a:prstGeom prst="roundRect">
+            <a:avLst>
+              <a:gd name="adj" fmla="val 44444"/>
+            </a:avLst>
+          </a:prstGeom>
+          <a:solidFill>
+            <a:srgbClr val="1C4463"/>
+          </a:solidFill>
+          <a:ln w="12700">
+            <a:solidFill>
+              <a:srgbClr val="2F6A8E"/>
+            </a:solidFill>
+            <a:prstDash val="solid"/>
+          </a:ln>
+        </p:spPr>
+      </p:sp>
+      <p:sp>
+        <p:nvSpPr>
+          <p:cNvPr id="10" name="Text 8"/>
+          <p:cNvSpPr txBox="1"/>
+          <p:nvPr/>
+        </p:nvSpPr>
+        <p:spPr>
+          <a:xfrm>
+            <a:off x="2834640" y="3794760"/>
+            <a:ext cx="1965960" cy="411480"/>
+          </a:xfrm>
+          <a:prstGeom prst="rect">
+            <a:avLst/>
+          </a:prstGeom>
+          <a:noFill/>
+          <a:ln/>
+        </p:spPr>
+        <p:txBody>
+          <a:bodyPr wrap="square" lIns="0" tIns="0" rIns="0" bIns="0" rtlCol="0" anchor="ctr"/>
+          <a:lstStyle/>
+          <a:p>
+            <a:pPr marL="0" indent="0" algn="ctr">
+              <a:buNone/>
+            </a:pPr>
+            <a:r>
+              <a:rPr lang="en-US" sz="1300" b="1" dirty="0">
+                <a:solidFill>
+                  <a:srgbClr val="FFFFFF"/>
+                </a:solidFill>
+                <a:latin typeface="Calibri" pitchFamily="34" charset="0"/>
+                <a:ea typeface="Calibri" pitchFamily="34" charset="-122"/>
+                <a:cs typeface="Calibri" pitchFamily="34" charset="-120"/>
+              </a:rPr>
+              <a:t>Angular 22</a:t>
+            </a:r>
+            <a:endParaRPr lang="en-US" sz="1300" dirty="0"/>
+          </a:p>
+        </p:txBody>
+      </p:sp>
+      <p:sp>
+        <p:nvSpPr>
+          <p:cNvPr id="11" name="Shape 9"/>
+          <p:cNvSpPr/>
+          <p:nvPr/>
+        </p:nvSpPr>
+        <p:spPr>
+          <a:xfrm>
+            <a:off x="4937760" y="3794760"/>
+            <a:ext cx="1965960" cy="411480"/>
+          </a:xfrm>
+          <a:prstGeom prst="roundRect">
+            <a:avLst>
+              <a:gd name="adj" fmla="val 44444"/>
+            </a:avLst>
+          </a:prstGeom>
+          <a:solidFill>
+            <a:srgbClr val="1C4463"/>
+          </a:solidFill>
+          <a:ln w="12700">
+            <a:solidFill>
+              <a:srgbClr val="2F6A8E"/>
+            </a:solidFill>
+            <a:prstDash val="solid"/>
+          </a:ln>
+        </p:spPr>
+      </p:sp>
+      <p:sp>
+        <p:nvSpPr>
+          <p:cNvPr id="12" name="Text 10"/>
+          <p:cNvSpPr txBox="1"/>
+          <p:nvPr/>
+        </p:nvSpPr>
+        <p:spPr>
+          <a:xfrm>
+            <a:off x="4937760" y="3794760"/>
+            <a:ext cx="1965960" cy="411480"/>
+          </a:xfrm>
+          <a:prstGeom prst="rect">
+            <a:avLst/>
+          </a:prstGeom>
+          <a:noFill/>
+          <a:ln/>
+        </p:spPr>
+        <p:txBody>
+          <a:bodyPr wrap="square" lIns="0" tIns="0" rIns="0" bIns="0" rtlCol="0" anchor="ctr"/>
+          <a:lstStyle/>
+          <a:p>
+            <a:pPr marL="0" indent="0" algn="ctr">
+              <a:buNone/>
+            </a:pPr>
+            <a:r>
+              <a:rPr lang="en-US" sz="1300" b="1" dirty="0">
+                <a:solidFill>
+                  <a:srgbClr val="FFFFFF"/>
+                </a:solidFill>
+                <a:latin typeface="Calibri" pitchFamily="34" charset="0"/>
+                <a:ea typeface="Calibri" pitchFamily="34" charset="-122"/>
+                <a:cs typeface="Calibri" pitchFamily="34" charset="-120"/>
+              </a:rPr>
+              <a:t>JWT · RBAC</a:t>
+            </a:r>
+            <a:endParaRPr lang="en-US" sz="1300" dirty="0"/>
+          </a:p>
+        </p:txBody>
+      </p:sp>
+      <p:sp>
+        <p:nvSpPr>
+          <p:cNvPr id="13" name="Shape 11"/>
+          <p:cNvSpPr/>
+          <p:nvPr/>
+        </p:nvSpPr>
+        <p:spPr>
+          <a:xfrm>
+            <a:off x="7040880" y="3794760"/>
+            <a:ext cx="1965960" cy="411480"/>
+          </a:xfrm>
+          <a:prstGeom prst="roundRect">
+            <a:avLst>
+              <a:gd name="adj" fmla="val 44444"/>
+            </a:avLst>
+          </a:prstGeom>
+          <a:solidFill>
+            <a:srgbClr val="1C4463"/>
+          </a:solidFill>
+          <a:ln w="12700">
+            <a:solidFill>
+              <a:srgbClr val="2F6A8E"/>
+            </a:solidFill>
+            <a:prstDash val="solid"/>
+          </a:ln>
+        </p:spPr>
+      </p:sp>
+      <p:sp>
+        <p:nvSpPr>
+          <p:cNvPr id="14" name="Text 12"/>
+          <p:cNvSpPr txBox="1"/>
+          <p:nvPr/>
+        </p:nvSpPr>
+        <p:spPr>
+          <a:xfrm>
+            <a:off x="7040880" y="3794760"/>
+            <a:ext cx="1965960" cy="411480"/>
+          </a:xfrm>
+          <a:prstGeom prst="rect">
+            <a:avLst/>
+          </a:prstGeom>
+          <a:noFill/>
+          <a:ln/>
+        </p:spPr>
+        <p:txBody>
+          <a:bodyPr wrap="square" lIns="0" tIns="0" rIns="0" bIns="0" rtlCol="0" anchor="ctr"/>
+          <a:lstStyle/>
+          <a:p>
+            <a:pPr marL="0" indent="0" algn="ctr">
+              <a:buNone/>
+            </a:pPr>
+            <a:r>
+              <a:rPr lang="en-US" sz="1300" b="1" dirty="0">
+                <a:solidFill>
+                  <a:srgbClr val="FFFFFF"/>
+                </a:solidFill>
+                <a:latin typeface="Calibri" pitchFamily="34" charset="0"/>
+                <a:ea typeface="Calibri" pitchFamily="34" charset="-122"/>
+                <a:cs typeface="Calibri" pitchFamily="34" charset="-120"/>
+              </a:rPr>
+              <a:t>MySQL 8</a:t>
+            </a:r>
+            <a:endParaRPr lang="en-US" sz="1300" dirty="0"/>
+          </a:p>
+        </p:txBody>
+      </p:sp>
+      <p:sp>
+        <p:nvSpPr>
+          <p:cNvPr id="15" name="Shape 13"/>
+          <p:cNvSpPr/>
+          <p:nvPr/>
+        </p:nvSpPr>
+        <p:spPr>
+          <a:xfrm>
+            <a:off x="9144000" y="3794760"/>
+            <a:ext cx="1965960" cy="411480"/>
+          </a:xfrm>
+          <a:prstGeom prst="roundRect">
+            <a:avLst>
+              <a:gd name="adj" fmla="val 44444"/>
+            </a:avLst>
+          </a:prstGeom>
+          <a:solidFill>
+            <a:srgbClr val="1C4463"/>
+          </a:solidFill>
+          <a:ln w="12700">
+            <a:solidFill>
+              <a:srgbClr val="2F6A8E"/>
+            </a:solidFill>
+            <a:prstDash val="solid"/>
+          </a:ln>
+        </p:spPr>
+      </p:sp>
+      <p:sp>
+        <p:nvSpPr>
+          <p:cNvPr id="16" name="Text 14"/>
+          <p:cNvSpPr txBox="1"/>
+          <p:nvPr/>
+        </p:nvSpPr>
+        <p:spPr>
+          <a:xfrm>
+            <a:off x="9144000" y="3794760"/>
+            <a:ext cx="1965960" cy="411480"/>
+          </a:xfrm>
+          <a:prstGeom prst="rect">
+            <a:avLst/>
+          </a:prstGeom>
+          <a:noFill/>
+          <a:ln/>
+        </p:spPr>
+        <p:txBody>
+          <a:bodyPr wrap="square" lIns="0" tIns="0" rIns="0" bIns="0" rtlCol="0" anchor="ctr"/>
+          <a:lstStyle/>
+          <a:p>
+            <a:pPr marL="0" indent="0" algn="ctr">
+              <a:buNone/>
+            </a:pPr>
+            <a:r>
+              <a:rPr lang="en-US" sz="1300" b="1" dirty="0">
+                <a:solidFill>
+                  <a:srgbClr val="FFFFFF"/>
+                </a:solidFill>
+                <a:latin typeface="Calibri" pitchFamily="34" charset="0"/>
+                <a:ea typeface="Calibri" pitchFamily="34" charset="-122"/>
+                <a:cs typeface="Calibri" pitchFamily="34" charset="-120"/>
+              </a:rPr>
+              <a:t>Tailwind CSS v4</a:t>
+            </a:r>
+            <a:endParaRPr lang="en-US" sz="1300" dirty="0"/>
+          </a:p>
+        </p:txBody>
+      </p:sp>
+      <p:sp>
+        <p:nvSpPr>
+          <p:cNvPr id="17" name="Shape 15"/>
+          <p:cNvSpPr/>
+          <p:nvPr/>
+        </p:nvSpPr>
+        <p:spPr>
+          <a:xfrm>
+            <a:off x="731520" y="4754880"/>
+            <a:ext cx="4846320" cy="1371600"/>
+          </a:xfrm>
+          <a:prstGeom prst="roundRect">
+            <a:avLst>
+              <a:gd name="adj" fmla="val 8000"/>
+            </a:avLst>
+          </a:prstGeom>
+          <a:solidFill>
+            <a:srgbClr val="1C4463"/>
+          </a:solidFill>
+          <a:ln w="12700">
+            <a:solidFill>
+              <a:srgbClr val="1C4463"/>
+            </a:solidFill>
+            <a:prstDash val="solid"/>
+          </a:ln>
+        </p:spPr>
+      </p:sp>
+      <p:sp>
+        <p:nvSpPr>
+          <p:cNvPr id="18" name="Text 16"/>
+          <p:cNvSpPr txBox="1"/>
+          <p:nvPr/>
+        </p:nvSpPr>
+        <p:spPr>
+          <a:xfrm>
+            <a:off x="1005840" y="4846320"/>
+            <a:ext cx="4297680" cy="1188720"/>
           </a:xfrm>
           <a:prstGeom prst="rect">
             <a:avLst/>
@@ -1349,17 +1689,17 @@
               <a:buNone/>
             </a:pPr>
             <a:r>
-              <a:rPr lang="en-US" sz="1400" b="1" dirty="0">
-                <a:solidFill>
-                  <a:srgbClr val="FFFFFF"/>
-                </a:solidFill>
-                <a:latin typeface="Calibri" pitchFamily="34" charset="0"/>
-                <a:ea typeface="Calibri" pitchFamily="34" charset="-122"/>
-                <a:cs typeface="Calibri" pitchFamily="34" charset="-120"/>
-              </a:rPr>
-              <a:t>Ajit Kumar Saini</a:t>
-            </a:r>
-            <a:endParaRPr lang="en-US" sz="1400" dirty="0"/>
+              <a:rPr lang="en-US" sz="1100" b="1" kern="0" spc="200" dirty="0">
+                <a:solidFill>
+                  <a:srgbClr val="F2A541"/>
+                </a:solidFill>
+                <a:latin typeface="Calibri" pitchFamily="34" charset="0"/>
+                <a:ea typeface="Calibri" pitchFamily="34" charset="-122"/>
+                <a:cs typeface="Calibri" pitchFamily="34" charset="-120"/>
+              </a:rPr>
+              <a:t>DEVELOPER</a:t>
+            </a:r>
+            <a:endParaRPr lang="en-US" sz="1100" dirty="0"/>
           </a:p>
           <a:p>
             <a:pPr marL="0" indent="0">
@@ -1369,7 +1709,7 @@
               <a:buNone/>
             </a:pPr>
             <a:r>
-              <a:rPr lang="en-US" sz="1400" dirty="0">
+              <a:rPr lang="en-US" sz="2000" b="1" dirty="0">
                 <a:solidFill>
                   <a:srgbClr val="FFFFFF"/>
                 </a:solidFill>
@@ -1377,8 +1717,9 @@
                 <a:ea typeface="Calibri" pitchFamily="34" charset="-122"/>
                 <a:cs typeface="Calibri" pitchFamily="34" charset="-120"/>
               </a:rPr>
-              <a:t>Roll No: 2400320100114  |  B.Tech CSE, 3rd Year</a:t>
-            </a:r>
+              <a:t>Ajit Kumar Saini | 2400320100114</a:t>
+            </a:r>
+            <a:endParaRPr lang="en-US" sz="1100" dirty="0"/>
           </a:p>
           <a:p>
             <a:pPr marL="0" indent="0">
@@ -1388,40 +1729,67 @@
               <a:buNone/>
             </a:pPr>
             <a:r>
-              <a:rPr lang="en-US" sz="1400" dirty="0">
-                <a:solidFill>
-                  <a:srgbClr val="FFFFFF"/>
-                </a:solidFill>
-                <a:latin typeface="Calibri" pitchFamily="34" charset="0"/>
-                <a:ea typeface="Calibri" pitchFamily="34" charset="-122"/>
-                <a:cs typeface="Calibri" pitchFamily="34" charset="-120"/>
-              </a:rPr>
-              <a:t>Project Mentor : Ms. Sakshi </a:t>
-            </a:r>
-            <a:r>
-              <a:rPr lang="en-US" sz="1400" dirty="0" err="1">
-                <a:solidFill>
-                  <a:srgbClr val="FFFFFF"/>
-                </a:solidFill>
-                <a:latin typeface="Calibri" pitchFamily="34" charset="0"/>
-                <a:ea typeface="Calibri" pitchFamily="34" charset="-122"/>
-                <a:cs typeface="Calibri" pitchFamily="34" charset="-120"/>
-              </a:rPr>
-              <a:t>Mohinia</a:t>
-            </a:r>
-            <a:r>
-              <a:rPr lang="en-US" sz="1400" dirty="0">
-                <a:solidFill>
-                  <a:srgbClr val="FFFFFF"/>
-                </a:solidFill>
-                <a:latin typeface="Calibri" pitchFamily="34" charset="0"/>
-                <a:ea typeface="Calibri" pitchFamily="34" charset="-122"/>
-                <a:cs typeface="Calibri" pitchFamily="34" charset="-120"/>
-              </a:rPr>
-              <a:t> </a:t>
-            </a:r>
-            <a:endParaRPr lang="en-US" sz="1400" dirty="0"/>
-          </a:p>
+              <a:rPr lang="en-US" sz="1300" dirty="0">
+                <a:solidFill>
+                  <a:srgbClr val="CADCFC"/>
+                </a:solidFill>
+                <a:latin typeface="Calibri" pitchFamily="34" charset="0"/>
+                <a:ea typeface="Calibri" pitchFamily="34" charset="-122"/>
+                <a:cs typeface="Calibri" pitchFamily="34" charset="-120"/>
+              </a:rPr>
+              <a:t>B.Tech CSE, 3rd Year · ABES Engineering College, Ghaziabad</a:t>
+            </a:r>
+            <a:endParaRPr lang="en-US" sz="1100" dirty="0"/>
+          </a:p>
+        </p:txBody>
+      </p:sp>
+      <p:sp>
+        <p:nvSpPr>
+          <p:cNvPr id="19" name="Shape 17"/>
+          <p:cNvSpPr/>
+          <p:nvPr/>
+        </p:nvSpPr>
+        <p:spPr>
+          <a:xfrm>
+            <a:off x="5852160" y="4754880"/>
+            <a:ext cx="4846320" cy="1371600"/>
+          </a:xfrm>
+          <a:prstGeom prst="roundRect">
+            <a:avLst>
+              <a:gd name="adj" fmla="val 8000"/>
+            </a:avLst>
+          </a:prstGeom>
+          <a:solidFill>
+            <a:srgbClr val="1C4463"/>
+          </a:solidFill>
+          <a:ln w="12700">
+            <a:solidFill>
+              <a:srgbClr val="1C4463"/>
+            </a:solidFill>
+            <a:prstDash val="solid"/>
+          </a:ln>
+        </p:spPr>
+      </p:sp>
+      <p:sp>
+        <p:nvSpPr>
+          <p:cNvPr id="20" name="Text 18"/>
+          <p:cNvSpPr txBox="1"/>
+          <p:nvPr/>
+        </p:nvSpPr>
+        <p:spPr>
+          <a:xfrm>
+            <a:off x="6126480" y="4846320"/>
+            <a:ext cx="4297680" cy="1188720"/>
+          </a:xfrm>
+          <a:prstGeom prst="rect">
+            <a:avLst/>
+          </a:prstGeom>
+          <a:noFill/>
+          <a:ln/>
+        </p:spPr>
+        <p:txBody>
+          <a:bodyPr wrap="square" lIns="0" tIns="0" rIns="0" bIns="0" rtlCol="0" anchor="ctr"/>
+          <a:lstStyle/>
           <a:p>
             <a:pPr marL="0" indent="0">
               <a:spcAft>
@@ -1430,7 +1798,27 @@
               <a:buNone/>
             </a:pPr>
             <a:r>
-              <a:rPr lang="en-US" sz="1400" dirty="0">
+              <a:rPr lang="en-US" sz="1100" b="1" kern="0" spc="200" dirty="0">
+                <a:solidFill>
+                  <a:srgbClr val="F2A541"/>
+                </a:solidFill>
+                <a:latin typeface="Calibri" pitchFamily="34" charset="0"/>
+                <a:ea typeface="Calibri" pitchFamily="34" charset="-122"/>
+                <a:cs typeface="Calibri" pitchFamily="34" charset="-120"/>
+              </a:rPr>
+              <a:t>MENTOR</a:t>
+            </a:r>
+            <a:endParaRPr lang="en-US" sz="1100" dirty="0"/>
+          </a:p>
+          <a:p>
+            <a:pPr marL="0" indent="0">
+              <a:spcAft>
+                <a:spcPts val="300"/>
+              </a:spcAft>
+              <a:buNone/>
+            </a:pPr>
+            <a:r>
+              <a:rPr lang="en-US" sz="2000" b="1" dirty="0">
                 <a:solidFill>
                   <a:srgbClr val="FFFFFF"/>
                 </a:solidFill>
@@ -1438,9 +1826,29 @@
                 <a:ea typeface="Calibri" pitchFamily="34" charset="-122"/>
                 <a:cs typeface="Calibri" pitchFamily="34" charset="-120"/>
               </a:rPr>
-              <a:t>ABES Engineering College, Ghaziabad</a:t>
-            </a:r>
-            <a:endParaRPr lang="en-US" sz="1400" dirty="0"/>
+              <a:t>Ms. Sakshi Mohinia</a:t>
+            </a:r>
+            <a:endParaRPr lang="en-US" sz="1100" dirty="0"/>
+          </a:p>
+          <a:p>
+            <a:pPr marL="0" indent="0">
+              <a:spcAft>
+                <a:spcPts val="300"/>
+              </a:spcAft>
+              <a:buNone/>
+            </a:pPr>
+            <a:r>
+              <a:rPr lang="en-US" sz="1300" dirty="0">
+                <a:solidFill>
+                  <a:srgbClr val="CADCFC"/>
+                </a:solidFill>
+                <a:latin typeface="Calibri" pitchFamily="34" charset="0"/>
+                <a:ea typeface="Calibri" pitchFamily="34" charset="-122"/>
+                <a:cs typeface="Calibri" pitchFamily="34" charset="-120"/>
+              </a:rPr>
+              <a:t>Faculty Guide </a:t>
+            </a:r>
+            <a:endParaRPr lang="en-US" sz="1100" dirty="0"/>
           </a:p>
         </p:txBody>
       </p:sp>
@@ -1458,7 +1866,7 @@
     <p:bg>
       <p:bgPr>
         <a:solidFill>
-          <a:srgbClr val="FFFFFF"/>
+          <a:srgbClr val="F6F8FA"/>
         </a:solidFill>
         <a:effectLst/>
       </p:bgPr>
@@ -1485,8 +1893,8 @@
         </p:nvSpPr>
         <p:spPr>
           <a:xfrm>
-            <a:off x="548640" y="320040"/>
-            <a:ext cx="8046720" cy="640080"/>
+            <a:off x="640080" y="365760"/>
+            <a:ext cx="8229600" cy="274320"/>
           </a:xfrm>
           <a:prstGeom prst="rect">
             <a:avLst/>
@@ -1502,30 +1910,69 @@
               <a:buNone/>
             </a:pPr>
             <a:r>
-              <a:rPr lang="en-US" sz="3200" b="1" dirty="0">
-                <a:solidFill>
-                  <a:srgbClr val="12324A"/>
+              <a:rPr lang="en-US" sz="1200" b="1" kern="0" spc="200" dirty="0">
+                <a:solidFill>
+                  <a:srgbClr val="0F8B8D"/>
+                </a:solidFill>
+                <a:latin typeface="Calibri" pitchFamily="34" charset="0"/>
+                <a:ea typeface="Calibri" pitchFamily="34" charset="-122"/>
+                <a:cs typeface="Calibri" pitchFamily="34" charset="-120"/>
+              </a:rPr>
+              <a:t>01 | MOTIVATION</a:t>
+            </a:r>
+            <a:endParaRPr lang="en-US" sz="1200" dirty="0"/>
+          </a:p>
+        </p:txBody>
+      </p:sp>
+      <p:sp>
+        <p:nvSpPr>
+          <p:cNvPr id="3" name="Text 1"/>
+          <p:cNvSpPr txBox="1"/>
+          <p:nvPr/>
+        </p:nvSpPr>
+        <p:spPr>
+          <a:xfrm>
+            <a:off x="640080" y="658368"/>
+            <a:ext cx="10881360" cy="594360"/>
+          </a:xfrm>
+          <a:prstGeom prst="rect">
+            <a:avLst/>
+          </a:prstGeom>
+          <a:noFill/>
+          <a:ln/>
+        </p:spPr>
+        <p:txBody>
+          <a:bodyPr wrap="square" lIns="0" tIns="0" rIns="0" bIns="0" rtlCol="0" anchor="ctr"/>
+          <a:lstStyle/>
+          <a:p>
+            <a:pPr marL="0" indent="0">
+              <a:buNone/>
+            </a:pPr>
+            <a:r>
+              <a:rPr lang="en-US" sz="3000" b="1" dirty="0">
+                <a:solidFill>
+                  <a:srgbClr val="10263B"/>
                 </a:solidFill>
                 <a:latin typeface="Cambria" pitchFamily="34" charset="0"/>
                 <a:ea typeface="Cambria" pitchFamily="34" charset="-122"/>
                 <a:cs typeface="Cambria" pitchFamily="34" charset="-120"/>
               </a:rPr>
-              <a:t>Problem &amp; Objectives</a:t>
-            </a:r>
-            <a:endParaRPr lang="en-US" sz="3200" dirty="0"/>
-          </a:p>
-        </p:txBody>
-      </p:sp>
-      <p:sp>
-        <p:nvSpPr>
-          <p:cNvPr id="3" name="Text 1"/>
+              <a:t>Problem Statement &amp; Objectives</a:t>
+            </a:r>
+            <a:endParaRPr lang="en-US" sz="3000" dirty="0"/>
+          </a:p>
+        </p:txBody>
+      </p:sp>
+      <p:sp>
+        <p:nvSpPr>
+          <p:cNvPr id="4" name="Text 2"/>
           <p:cNvSpPr txBox="1"/>
           <p:nvPr/>
         </p:nvSpPr>
         <p:spPr>
           <a:xfrm>
-            <a:off x="548640" y="914400"/>
-            <a:ext cx="8046720" cy="365760"/>
+            <a:off x="640080" y="1261872"/>
+            <a:ext cx="10881360" cy="320040"/>
           </a:xfrm>
           <a:prstGeom prst="rect">
             <a:avLst/>
@@ -1549,7 +1996,7 @@
                 <a:ea typeface="Calibri" pitchFamily="34" charset="-122"/>
                 <a:cs typeface="Calibri" pitchFamily="34" charset="-120"/>
               </a:rPr>
-              <a:t>Manual stock records cause errors, delays and no single view of inventory</a:t>
+              <a:t>Replacing error-prone manual records with one integrated inventory system</a:t>
             </a:r>
             <a:endParaRPr lang="en-US" sz="1500" dirty="0"/>
           </a:p>
@@ -1557,41 +2004,48 @@
       </p:sp>
       <p:sp>
         <p:nvSpPr>
-          <p:cNvPr id="4" name="Shape 2"/>
+          <p:cNvPr id="5" name="Shape 3"/>
           <p:cNvSpPr/>
           <p:nvPr/>
         </p:nvSpPr>
         <p:spPr>
           <a:xfrm>
-            <a:off x="548640" y="1463040"/>
-            <a:ext cx="3566160" cy="3017520"/>
+            <a:off x="640080" y="1783080"/>
+            <a:ext cx="5394960" cy="4480560"/>
           </a:xfrm>
           <a:prstGeom prst="roundRect">
             <a:avLst>
-              <a:gd name="adj" fmla="val 3636"/>
+              <a:gd name="adj" fmla="val 2449"/>
             </a:avLst>
           </a:prstGeom>
           <a:solidFill>
-            <a:srgbClr val="E3F2F1"/>
+            <a:srgbClr val="FFFFFF"/>
           </a:solidFill>
           <a:ln w="12700">
             <a:solidFill>
-              <a:srgbClr val="E3F2F1"/>
+              <a:srgbClr val="FFFFFF"/>
             </a:solidFill>
             <a:prstDash val="solid"/>
           </a:ln>
-        </p:spPr>
-      </p:sp>
-      <p:sp>
-        <p:nvSpPr>
-          <p:cNvPr id="5" name="Text 3"/>
+          <a:effectLst>
+            <a:outerShdw blurRad="101600" dist="25400" dir="5400000" algn="bl" rotWithShape="0">
+              <a:srgbClr val="000000">
+                <a:alpha val="12000"/>
+              </a:srgbClr>
+            </a:outerShdw>
+          </a:effectLst>
+        </p:spPr>
+      </p:sp>
+      <p:sp>
+        <p:nvSpPr>
+          <p:cNvPr id="6" name="Text 4"/>
           <p:cNvSpPr txBox="1"/>
           <p:nvPr/>
         </p:nvSpPr>
         <p:spPr>
           <a:xfrm>
-            <a:off x="777240" y="1600200"/>
-            <a:ext cx="3108960" cy="365760"/>
+            <a:off x="914400" y="1920240"/>
+            <a:ext cx="4572000" cy="320040"/>
           </a:xfrm>
           <a:prstGeom prst="rect">
             <a:avLst/>
@@ -1607,30 +2061,30 @@
               <a:buNone/>
             </a:pPr>
             <a:r>
-              <a:rPr lang="en-US" sz="2000" b="1" dirty="0">
-                <a:solidFill>
-                  <a:srgbClr val="12324A"/>
-                </a:solidFill>
-                <a:latin typeface="Cambria" pitchFamily="34" charset="0"/>
-                <a:ea typeface="Cambria" pitchFamily="34" charset="-122"/>
-                <a:cs typeface="Cambria" pitchFamily="34" charset="-120"/>
-              </a:rPr>
-              <a:t>The problem</a:t>
-            </a:r>
-            <a:endParaRPr lang="en-US" sz="2000" dirty="0"/>
-          </a:p>
-        </p:txBody>
-      </p:sp>
-      <p:sp>
-        <p:nvSpPr>
-          <p:cNvPr id="6" name="Text 4"/>
+              <a:rPr lang="en-US" sz="1300" b="1" kern="0" spc="200" dirty="0">
+                <a:solidFill>
+                  <a:srgbClr val="B83255"/>
+                </a:solidFill>
+                <a:latin typeface="Calibri" pitchFamily="34" charset="0"/>
+                <a:ea typeface="Calibri" pitchFamily="34" charset="-122"/>
+                <a:cs typeface="Calibri" pitchFamily="34" charset="-120"/>
+              </a:rPr>
+              <a:t>THE PROBLEM</a:t>
+            </a:r>
+            <a:endParaRPr lang="en-US" sz="1300" dirty="0"/>
+          </a:p>
+        </p:txBody>
+      </p:sp>
+      <p:sp>
+        <p:nvSpPr>
+          <p:cNvPr id="7" name="Text 5"/>
           <p:cNvSpPr txBox="1"/>
           <p:nvPr/>
         </p:nvSpPr>
         <p:spPr>
           <a:xfrm>
-            <a:off x="777240" y="2057400"/>
-            <a:ext cx="3108960" cy="2286000"/>
+            <a:off x="914400" y="2331720"/>
+            <a:ext cx="4846320" cy="886968"/>
           </a:xfrm>
           <a:prstGeom prst="rect">
             <a:avLst/>
@@ -1642,15 +2096,22 @@
           <a:bodyPr wrap="square" lIns="0" tIns="0" rIns="0" bIns="0" rtlCol="0" anchor="t"/>
           <a:lstStyle/>
           <a:p>
-            <a:pPr marL="342900" indent="-342900">
-              <a:spcAft>
-                <a:spcPts val="800"/>
-              </a:spcAft>
-              <a:buSzPct val="100000"/>
-              <a:buChar char="•"/>
-            </a:pPr>
-            <a:r>
-              <a:rPr lang="en-US" sz="1500" dirty="0">
+            <a:pPr marL="0" indent="0">
+              <a:buNone/>
+            </a:pPr>
+            <a:r>
+              <a:rPr lang="en-US" sz="1350" b="1" dirty="0">
+                <a:solidFill>
+                  <a:srgbClr val="B83255"/>
+                </a:solidFill>
+                <a:latin typeface="Calibri" pitchFamily="34" charset="0"/>
+                <a:ea typeface="Calibri" pitchFamily="34" charset="-122"/>
+                <a:cs typeface="Calibri" pitchFamily="34" charset="-120"/>
+              </a:rPr>
+              <a:t>Fragmented records: </a:t>
+            </a:r>
+            <a:r>
+              <a:rPr lang="en-US" sz="1350" dirty="0">
                 <a:solidFill>
                   <a:srgbClr val="1F2933"/>
                 </a:solidFill>
@@ -1658,20 +2119,49 @@
                 <a:ea typeface="Calibri" pitchFamily="34" charset="-122"/>
                 <a:cs typeface="Calibri" pitchFamily="34" charset="-120"/>
               </a:rPr>
-              <a:t>Paper/spreadsheet records go out of date</a:t>
-            </a:r>
-            <a:endParaRPr lang="en-US" sz="1500" dirty="0"/>
-          </a:p>
-          <a:p>
-            <a:pPr marL="342900" indent="-342900">
-              <a:spcAft>
-                <a:spcPts val="800"/>
-              </a:spcAft>
-              <a:buSzPct val="100000"/>
-              <a:buChar char="•"/>
-            </a:pPr>
-            <a:r>
-              <a:rPr lang="en-US" sz="1500" dirty="0">
+              <a:t>Spreadsheets and paper cause duplication and discrepancies.</a:t>
+            </a:r>
+            <a:endParaRPr lang="en-US" sz="1350" dirty="0"/>
+          </a:p>
+        </p:txBody>
+      </p:sp>
+      <p:sp>
+        <p:nvSpPr>
+          <p:cNvPr id="8" name="Text 6"/>
+          <p:cNvSpPr txBox="1"/>
+          <p:nvPr/>
+        </p:nvSpPr>
+        <p:spPr>
+          <a:xfrm>
+            <a:off x="914400" y="3310128"/>
+            <a:ext cx="4846320" cy="886968"/>
+          </a:xfrm>
+          <a:prstGeom prst="rect">
+            <a:avLst/>
+          </a:prstGeom>
+          <a:noFill/>
+          <a:ln/>
+        </p:spPr>
+        <p:txBody>
+          <a:bodyPr wrap="square" lIns="0" tIns="0" rIns="0" bIns="0" rtlCol="0" anchor="t"/>
+          <a:lstStyle/>
+          <a:p>
+            <a:pPr marL="0" indent="0">
+              <a:buNone/>
+            </a:pPr>
+            <a:r>
+              <a:rPr lang="en-US" sz="1350" b="1" dirty="0">
+                <a:solidFill>
+                  <a:srgbClr val="B83255"/>
+                </a:solidFill>
+                <a:latin typeface="Calibri" pitchFamily="34" charset="0"/>
+                <a:ea typeface="Calibri" pitchFamily="34" charset="-122"/>
+                <a:cs typeface="Calibri" pitchFamily="34" charset="-120"/>
+              </a:rPr>
+              <a:t>Stockouts &amp; holding costs: </a:t>
+            </a:r>
+            <a:r>
+              <a:rPr lang="en-US" sz="1350" dirty="0">
                 <a:solidFill>
                   <a:srgbClr val="1F2933"/>
                 </a:solidFill>
@@ -1679,20 +2169,49 @@
                 <a:ea typeface="Calibri" pitchFamily="34" charset="-122"/>
                 <a:cs typeface="Calibri" pitchFamily="34" charset="-120"/>
               </a:rPr>
-              <a:t>Stock across warehouses is hard to track</a:t>
-            </a:r>
-            <a:endParaRPr lang="en-US" sz="1500" dirty="0"/>
-          </a:p>
-          <a:p>
-            <a:pPr marL="342900" indent="-342900">
-              <a:spcAft>
-                <a:spcPts val="800"/>
-              </a:spcAft>
-              <a:buSzPct val="100000"/>
-              <a:buChar char="•"/>
-            </a:pPr>
-            <a:r>
-              <a:rPr lang="en-US" sz="1500" dirty="0">
+              <a:t>No low-stock warnings leads to shortages or overstock.</a:t>
+            </a:r>
+            <a:endParaRPr lang="en-US" sz="1350" dirty="0"/>
+          </a:p>
+        </p:txBody>
+      </p:sp>
+      <p:sp>
+        <p:nvSpPr>
+          <p:cNvPr id="9" name="Text 7"/>
+          <p:cNvSpPr txBox="1"/>
+          <p:nvPr/>
+        </p:nvSpPr>
+        <p:spPr>
+          <a:xfrm>
+            <a:off x="914400" y="4288536"/>
+            <a:ext cx="4846320" cy="886968"/>
+          </a:xfrm>
+          <a:prstGeom prst="rect">
+            <a:avLst/>
+          </a:prstGeom>
+          <a:noFill/>
+          <a:ln/>
+        </p:spPr>
+        <p:txBody>
+          <a:bodyPr wrap="square" lIns="0" tIns="0" rIns="0" bIns="0" rtlCol="0" anchor="t"/>
+          <a:lstStyle/>
+          <a:p>
+            <a:pPr marL="0" indent="0">
+              <a:buNone/>
+            </a:pPr>
+            <a:r>
+              <a:rPr lang="en-US" sz="1350" b="1" dirty="0">
+                <a:solidFill>
+                  <a:srgbClr val="B83255"/>
+                </a:solidFill>
+                <a:latin typeface="Calibri" pitchFamily="34" charset="0"/>
+                <a:ea typeface="Calibri" pitchFamily="34" charset="-122"/>
+                <a:cs typeface="Calibri" pitchFamily="34" charset="-120"/>
+              </a:rPr>
+              <a:t>Warehouse blindspots: </a:t>
+            </a:r>
+            <a:r>
+              <a:rPr lang="en-US" sz="1350" dirty="0">
                 <a:solidFill>
                   <a:srgbClr val="1F2933"/>
                 </a:solidFill>
@@ -1700,20 +2219,49 @@
                 <a:ea typeface="Calibri" pitchFamily="34" charset="-122"/>
                 <a:cs typeface="Calibri" pitchFamily="34" charset="-120"/>
               </a:rPr>
-              <a:t>Orders and purchase orders handled separately</a:t>
-            </a:r>
-            <a:endParaRPr lang="en-US" sz="1500" dirty="0"/>
-          </a:p>
-          <a:p>
-            <a:pPr marL="342900" indent="-342900">
-              <a:spcAft>
-                <a:spcPts val="800"/>
-              </a:spcAft>
-              <a:buSzPct val="100000"/>
-              <a:buChar char="•"/>
-            </a:pPr>
-            <a:r>
-              <a:rPr lang="en-US" sz="1500" dirty="0">
+              <a:t>No consolidated on-hand vs reserved view per hub.</a:t>
+            </a:r>
+            <a:endParaRPr lang="en-US" sz="1350" dirty="0"/>
+          </a:p>
+        </p:txBody>
+      </p:sp>
+      <p:sp>
+        <p:nvSpPr>
+          <p:cNvPr id="10" name="Text 8"/>
+          <p:cNvSpPr txBox="1"/>
+          <p:nvPr/>
+        </p:nvSpPr>
+        <p:spPr>
+          <a:xfrm>
+            <a:off x="914400" y="5266944"/>
+            <a:ext cx="4846320" cy="886968"/>
+          </a:xfrm>
+          <a:prstGeom prst="rect">
+            <a:avLst/>
+          </a:prstGeom>
+          <a:noFill/>
+          <a:ln/>
+        </p:spPr>
+        <p:txBody>
+          <a:bodyPr wrap="square" lIns="0" tIns="0" rIns="0" bIns="0" rtlCol="0" anchor="t"/>
+          <a:lstStyle/>
+          <a:p>
+            <a:pPr marL="0" indent="0">
+              <a:buNone/>
+            </a:pPr>
+            <a:r>
+              <a:rPr lang="en-US" sz="1350" b="1" dirty="0">
+                <a:solidFill>
+                  <a:srgbClr val="B83255"/>
+                </a:solidFill>
+                <a:latin typeface="Calibri" pitchFamily="34" charset="0"/>
+                <a:ea typeface="Calibri" pitchFamily="34" charset="-122"/>
+                <a:cs typeface="Calibri" pitchFamily="34" charset="-120"/>
+              </a:rPr>
+              <a:t>Unregulated access: </a:t>
+            </a:r>
+            <a:r>
+              <a:rPr lang="en-US" sz="1350" dirty="0">
                 <a:solidFill>
                   <a:srgbClr val="1F2933"/>
                 </a:solidFill>
@@ -1721,22 +2269,95 @@
                 <a:ea typeface="Calibri" pitchFamily="34" charset="-122"/>
                 <a:cs typeface="Calibri" pitchFamily="34" charset="-120"/>
               </a:rPr>
-              <a:t>No role-based control over who can change data</a:t>
-            </a:r>
-            <a:endParaRPr lang="en-US" sz="1500" dirty="0"/>
-          </a:p>
-        </p:txBody>
-      </p:sp>
-      <p:sp>
-        <p:nvSpPr>
-          <p:cNvPr id="7" name="Shape 5"/>
+              <a:t>No role boundary between operators and administrators.</a:t>
+            </a:r>
+            <a:endParaRPr lang="en-US" sz="1350" dirty="0"/>
+          </a:p>
+        </p:txBody>
+      </p:sp>
+      <p:sp>
+        <p:nvSpPr>
+          <p:cNvPr id="11" name="Shape 9"/>
           <p:cNvSpPr/>
           <p:nvPr/>
         </p:nvSpPr>
         <p:spPr>
           <a:xfrm>
-            <a:off x="4572000" y="1554480"/>
-            <a:ext cx="411480" cy="411480"/>
+            <a:off x="6263640" y="1783080"/>
+            <a:ext cx="5303520" cy="4480560"/>
+          </a:xfrm>
+          <a:prstGeom prst="roundRect">
+            <a:avLst>
+              <a:gd name="adj" fmla="val 2449"/>
+            </a:avLst>
+          </a:prstGeom>
+          <a:solidFill>
+            <a:srgbClr val="FFFFFF"/>
+          </a:solidFill>
+          <a:ln w="12700">
+            <a:solidFill>
+              <a:srgbClr val="FFFFFF"/>
+            </a:solidFill>
+            <a:prstDash val="solid"/>
+          </a:ln>
+          <a:effectLst>
+            <a:outerShdw blurRad="101600" dist="25400" dir="5400000" algn="bl" rotWithShape="0">
+              <a:srgbClr val="000000">
+                <a:alpha val="12000"/>
+              </a:srgbClr>
+            </a:outerShdw>
+          </a:effectLst>
+        </p:spPr>
+      </p:sp>
+      <p:sp>
+        <p:nvSpPr>
+          <p:cNvPr id="12" name="Text 10"/>
+          <p:cNvSpPr txBox="1"/>
+          <p:nvPr/>
+        </p:nvSpPr>
+        <p:spPr>
+          <a:xfrm>
+            <a:off x="6537960" y="1920240"/>
+            <a:ext cx="4572000" cy="320040"/>
+          </a:xfrm>
+          <a:prstGeom prst="rect">
+            <a:avLst/>
+          </a:prstGeom>
+          <a:noFill/>
+          <a:ln/>
+        </p:spPr>
+        <p:txBody>
+          <a:bodyPr wrap="square" lIns="0" tIns="0" rIns="0" bIns="0" rtlCol="0" anchor="ctr"/>
+          <a:lstStyle/>
+          <a:p>
+            <a:pPr marL="0" indent="0">
+              <a:buNone/>
+            </a:pPr>
+            <a:r>
+              <a:rPr lang="en-US" sz="1300" b="1" kern="0" spc="200" dirty="0">
+                <a:solidFill>
+                  <a:srgbClr val="0F8B8D"/>
+                </a:solidFill>
+                <a:latin typeface="Calibri" pitchFamily="34" charset="0"/>
+                <a:ea typeface="Calibri" pitchFamily="34" charset="-122"/>
+                <a:cs typeface="Calibri" pitchFamily="34" charset="-120"/>
+              </a:rPr>
+              <a:t>OBJECTIVES</a:t>
+            </a:r>
+            <a:endParaRPr lang="en-US" sz="1300" dirty="0"/>
+          </a:p>
+        </p:txBody>
+      </p:sp>
+      <p:sp>
+        <p:nvSpPr>
+          <p:cNvPr id="13" name="Shape 11"/>
+          <p:cNvSpPr/>
+          <p:nvPr/>
+        </p:nvSpPr>
+        <p:spPr>
+          <a:xfrm>
+            <a:off x="6537960" y="2423160"/>
+            <a:ext cx="457200" cy="457200"/>
           </a:xfrm>
           <a:prstGeom prst="ellipse">
             <a:avLst/>
@@ -1754,14 +2375,14 @@
       </p:sp>
       <p:sp>
         <p:nvSpPr>
-          <p:cNvPr id="8" name="Text 6"/>
+          <p:cNvPr id="14" name="Text 12"/>
           <p:cNvSpPr txBox="1"/>
           <p:nvPr/>
         </p:nvSpPr>
         <p:spPr>
           <a:xfrm>
-            <a:off x="4572000" y="1554480"/>
-            <a:ext cx="411480" cy="411480"/>
+            <a:off x="6537960" y="2423160"/>
+            <a:ext cx="457200" cy="457200"/>
           </a:xfrm>
           <a:prstGeom prst="rect">
             <a:avLst/>
@@ -1777,7 +2398,7 @@
               <a:buNone/>
             </a:pPr>
             <a:r>
-              <a:rPr lang="en-US" sz="1500" b="1" dirty="0">
+              <a:rPr lang="en-US" sz="1600" b="1" dirty="0">
                 <a:solidFill>
                   <a:srgbClr val="FFFFFF"/>
                 </a:solidFill>
@@ -1787,20 +2408,20 @@
               </a:rPr>
               <a:t>1</a:t>
             </a:r>
-            <a:endParaRPr lang="en-US" sz="1500" dirty="0"/>
-          </a:p>
-        </p:txBody>
-      </p:sp>
-      <p:sp>
-        <p:nvSpPr>
-          <p:cNvPr id="9" name="Text 7"/>
+            <a:endParaRPr lang="en-US" sz="1600" dirty="0"/>
+          </a:p>
+        </p:txBody>
+      </p:sp>
+      <p:sp>
+        <p:nvSpPr>
+          <p:cNvPr id="15" name="Text 13"/>
           <p:cNvSpPr txBox="1"/>
           <p:nvPr/>
         </p:nvSpPr>
         <p:spPr>
           <a:xfrm>
-            <a:off x="5166360" y="1463040"/>
-            <a:ext cx="3429000" cy="594360"/>
+            <a:off x="7178040" y="2377440"/>
+            <a:ext cx="4206240" cy="868680"/>
           </a:xfrm>
           <a:prstGeom prst="rect">
             <a:avLst/>
@@ -1809,14 +2430,31 @@
           <a:ln/>
         </p:spPr>
         <p:txBody>
-          <a:bodyPr wrap="square" lIns="0" tIns="0" rIns="0" bIns="0" rtlCol="0" anchor="ctr"/>
-          <a:lstStyle/>
-          <a:p>
-            <a:pPr marL="0" indent="0">
-              <a:buNone/>
-            </a:pPr>
-            <a:r>
-              <a:rPr lang="en-US" sz="1600" dirty="0">
+          <a:bodyPr wrap="square" lIns="0" tIns="0" rIns="0" bIns="0" rtlCol="0" anchor="t"/>
+          <a:lstStyle/>
+          <a:p>
+            <a:pPr marL="0" indent="0">
+              <a:buNone/>
+            </a:pPr>
+            <a:r>
+              <a:rPr lang="en-US" sz="1500" b="1" dirty="0">
+                <a:solidFill>
+                  <a:srgbClr val="10263B"/>
+                </a:solidFill>
+                <a:latin typeface="Calibri" pitchFamily="34" charset="0"/>
+                <a:ea typeface="Calibri" pitchFamily="34" charset="-122"/>
+                <a:cs typeface="Calibri" pitchFamily="34" charset="-120"/>
+              </a:rPr>
+              <a:t>Centralized inventory</a:t>
+            </a:r>
+            <a:endParaRPr lang="en-US" sz="1500" dirty="0"/>
+          </a:p>
+          <a:p>
+            <a:pPr marL="0" indent="0">
+              <a:buNone/>
+            </a:pPr>
+            <a:r>
+              <a:rPr lang="en-US" sz="1300" dirty="0">
                 <a:solidFill>
                   <a:srgbClr val="1F2933"/>
                 </a:solidFill>
@@ -1824,22 +2462,22 @@
                 <a:ea typeface="Calibri" pitchFamily="34" charset="-122"/>
                 <a:cs typeface="Calibri" pitchFamily="34" charset="-120"/>
               </a:rPr>
-              <a:t>Centralize products, warehouses and stock</a:t>
-            </a:r>
-            <a:endParaRPr lang="en-US" sz="1600" dirty="0"/>
-          </a:p>
-        </p:txBody>
-      </p:sp>
-      <p:sp>
-        <p:nvSpPr>
-          <p:cNvPr id="10" name="Shape 8"/>
+              <a:t>Catalog, warehouses and stock in one relational store.</a:t>
+            </a:r>
+            <a:endParaRPr lang="en-US" sz="1500" dirty="0"/>
+          </a:p>
+        </p:txBody>
+      </p:sp>
+      <p:sp>
+        <p:nvSpPr>
+          <p:cNvPr id="16" name="Shape 14"/>
           <p:cNvSpPr/>
           <p:nvPr/>
         </p:nvSpPr>
         <p:spPr>
           <a:xfrm>
-            <a:off x="4572000" y="2331720"/>
-            <a:ext cx="411480" cy="411480"/>
+            <a:off x="6537960" y="3383280"/>
+            <a:ext cx="457200" cy="457200"/>
           </a:xfrm>
           <a:prstGeom prst="ellipse">
             <a:avLst/>
@@ -1857,14 +2495,14 @@
       </p:sp>
       <p:sp>
         <p:nvSpPr>
-          <p:cNvPr id="11" name="Text 9"/>
+          <p:cNvPr id="17" name="Text 15"/>
           <p:cNvSpPr txBox="1"/>
           <p:nvPr/>
         </p:nvSpPr>
         <p:spPr>
           <a:xfrm>
-            <a:off x="4572000" y="2331720"/>
-            <a:ext cx="411480" cy="411480"/>
+            <a:off x="6537960" y="3383280"/>
+            <a:ext cx="457200" cy="457200"/>
           </a:xfrm>
           <a:prstGeom prst="rect">
             <a:avLst/>
@@ -1880,7 +2518,7 @@
               <a:buNone/>
             </a:pPr>
             <a:r>
-              <a:rPr lang="en-US" sz="1500" b="1" dirty="0">
+              <a:rPr lang="en-US" sz="1600" b="1" dirty="0">
                 <a:solidFill>
                   <a:srgbClr val="FFFFFF"/>
                 </a:solidFill>
@@ -1890,20 +2528,20 @@
               </a:rPr>
               <a:t>2</a:t>
             </a:r>
-            <a:endParaRPr lang="en-US" sz="1500" dirty="0"/>
-          </a:p>
-        </p:txBody>
-      </p:sp>
-      <p:sp>
-        <p:nvSpPr>
-          <p:cNvPr id="12" name="Text 10"/>
+            <a:endParaRPr lang="en-US" sz="1600" dirty="0"/>
+          </a:p>
+        </p:txBody>
+      </p:sp>
+      <p:sp>
+        <p:nvSpPr>
+          <p:cNvPr id="18" name="Text 16"/>
           <p:cNvSpPr txBox="1"/>
           <p:nvPr/>
         </p:nvSpPr>
         <p:spPr>
           <a:xfrm>
-            <a:off x="5166360" y="2240280"/>
-            <a:ext cx="3429000" cy="594360"/>
+            <a:off x="7178040" y="3337560"/>
+            <a:ext cx="4206240" cy="868680"/>
           </a:xfrm>
           <a:prstGeom prst="rect">
             <a:avLst/>
@@ -1912,14 +2550,31 @@
           <a:ln/>
         </p:spPr>
         <p:txBody>
-          <a:bodyPr wrap="square" lIns="0" tIns="0" rIns="0" bIns="0" rtlCol="0" anchor="ctr"/>
-          <a:lstStyle/>
-          <a:p>
-            <a:pPr marL="0" indent="0">
-              <a:buNone/>
-            </a:pPr>
-            <a:r>
-              <a:rPr lang="en-US" sz="1600" dirty="0">
+          <a:bodyPr wrap="square" lIns="0" tIns="0" rIns="0" bIns="0" rtlCol="0" anchor="t"/>
+          <a:lstStyle/>
+          <a:p>
+            <a:pPr marL="0" indent="0">
+              <a:buNone/>
+            </a:pPr>
+            <a:r>
+              <a:rPr lang="en-US" sz="1500" b="1" dirty="0">
+                <a:solidFill>
+                  <a:srgbClr val="10263B"/>
+                </a:solidFill>
+                <a:latin typeface="Calibri" pitchFamily="34" charset="0"/>
+                <a:ea typeface="Calibri" pitchFamily="34" charset="-122"/>
+                <a:cs typeface="Calibri" pitchFamily="34" charset="-120"/>
+              </a:rPr>
+              <a:t>Dual order pipelines</a:t>
+            </a:r>
+            <a:endParaRPr lang="en-US" sz="1500" dirty="0"/>
+          </a:p>
+          <a:p>
+            <a:pPr marL="0" indent="0">
+              <a:buNone/>
+            </a:pPr>
+            <a:r>
+              <a:rPr lang="en-US" sz="1300" dirty="0">
                 <a:solidFill>
                   <a:srgbClr val="1F2933"/>
                 </a:solidFill>
@@ -1927,22 +2582,22 @@
                 <a:ea typeface="Calibri" pitchFamily="34" charset="-122"/>
                 <a:cs typeface="Calibri" pitchFamily="34" charset="-120"/>
               </a:rPr>
-              <a:t>Process customer orders and supplier purchase orders</a:t>
-            </a:r>
-            <a:endParaRPr lang="en-US" sz="1600" dirty="0"/>
-          </a:p>
-        </p:txBody>
-      </p:sp>
-      <p:sp>
-        <p:nvSpPr>
-          <p:cNvPr id="13" name="Shape 11"/>
+              <a:t>Sales orders (6 stages) and purchase orders (5 stages).</a:t>
+            </a:r>
+            <a:endParaRPr lang="en-US" sz="1500" dirty="0"/>
+          </a:p>
+        </p:txBody>
+      </p:sp>
+      <p:sp>
+        <p:nvSpPr>
+          <p:cNvPr id="19" name="Shape 17"/>
           <p:cNvSpPr/>
           <p:nvPr/>
         </p:nvSpPr>
         <p:spPr>
           <a:xfrm>
-            <a:off x="4572000" y="3108960"/>
-            <a:ext cx="411480" cy="411480"/>
+            <a:off x="6537960" y="4343400"/>
+            <a:ext cx="457200" cy="457200"/>
           </a:xfrm>
           <a:prstGeom prst="ellipse">
             <a:avLst/>
@@ -1960,14 +2615,14 @@
       </p:sp>
       <p:sp>
         <p:nvSpPr>
-          <p:cNvPr id="14" name="Text 12"/>
+          <p:cNvPr id="20" name="Text 18"/>
           <p:cNvSpPr txBox="1"/>
           <p:nvPr/>
         </p:nvSpPr>
         <p:spPr>
           <a:xfrm>
-            <a:off x="4572000" y="3108960"/>
-            <a:ext cx="411480" cy="411480"/>
+            <a:off x="6537960" y="4343400"/>
+            <a:ext cx="457200" cy="457200"/>
           </a:xfrm>
           <a:prstGeom prst="rect">
             <a:avLst/>
@@ -1983,7 +2638,7 @@
               <a:buNone/>
             </a:pPr>
             <a:r>
-              <a:rPr lang="en-US" sz="1500" b="1" dirty="0">
+              <a:rPr lang="en-US" sz="1600" b="1" dirty="0">
                 <a:solidFill>
                   <a:srgbClr val="FFFFFF"/>
                 </a:solidFill>
@@ -1993,20 +2648,20 @@
               </a:rPr>
               <a:t>3</a:t>
             </a:r>
-            <a:endParaRPr lang="en-US" sz="1500" dirty="0"/>
-          </a:p>
-        </p:txBody>
-      </p:sp>
-      <p:sp>
-        <p:nvSpPr>
-          <p:cNvPr id="15" name="Text 13"/>
+            <a:endParaRPr lang="en-US" sz="1600" dirty="0"/>
+          </a:p>
+        </p:txBody>
+      </p:sp>
+      <p:sp>
+        <p:nvSpPr>
+          <p:cNvPr id="21" name="Text 19"/>
           <p:cNvSpPr txBox="1"/>
           <p:nvPr/>
         </p:nvSpPr>
         <p:spPr>
           <a:xfrm>
-            <a:off x="5166360" y="3017520"/>
-            <a:ext cx="3429000" cy="594360"/>
+            <a:off x="7178040" y="4297680"/>
+            <a:ext cx="4206240" cy="868680"/>
           </a:xfrm>
           <a:prstGeom prst="rect">
             <a:avLst/>
@@ -2015,14 +2670,31 @@
           <a:ln/>
         </p:spPr>
         <p:txBody>
-          <a:bodyPr wrap="square" lIns="0" tIns="0" rIns="0" bIns="0" rtlCol="0" anchor="ctr"/>
-          <a:lstStyle/>
-          <a:p>
-            <a:pPr marL="0" indent="0">
-              <a:buNone/>
-            </a:pPr>
-            <a:r>
-              <a:rPr lang="en-US" sz="1600" dirty="0">
+          <a:bodyPr wrap="square" lIns="0" tIns="0" rIns="0" bIns="0" rtlCol="0" anchor="t"/>
+          <a:lstStyle/>
+          <a:p>
+            <a:pPr marL="0" indent="0">
+              <a:buNone/>
+            </a:pPr>
+            <a:r>
+              <a:rPr lang="en-US" sz="1500" b="1" dirty="0">
+                <a:solidFill>
+                  <a:srgbClr val="10263B"/>
+                </a:solidFill>
+                <a:latin typeface="Calibri" pitchFamily="34" charset="0"/>
+                <a:ea typeface="Calibri" pitchFamily="34" charset="-122"/>
+                <a:cs typeface="Calibri" pitchFamily="34" charset="-120"/>
+              </a:rPr>
+              <a:t>Stateless RBAC</a:t>
+            </a:r>
+            <a:endParaRPr lang="en-US" sz="1500" dirty="0"/>
+          </a:p>
+          <a:p>
+            <a:pPr marL="0" indent="0">
+              <a:buNone/>
+            </a:pPr>
+            <a:r>
+              <a:rPr lang="en-US" sz="1300" dirty="0">
                 <a:solidFill>
                   <a:srgbClr val="1F2933"/>
                 </a:solidFill>
@@ -2030,22 +2702,22 @@
                 <a:ea typeface="Calibri" pitchFamily="34" charset="-122"/>
                 <a:cs typeface="Calibri" pitchFamily="34" charset="-120"/>
               </a:rPr>
-              <a:t>Secure access with JWT and ADMIN / USER roles</a:t>
-            </a:r>
-            <a:endParaRPr lang="en-US" sz="1600" dirty="0"/>
-          </a:p>
-        </p:txBody>
-      </p:sp>
-      <p:sp>
-        <p:nvSpPr>
-          <p:cNvPr id="16" name="Shape 14"/>
+              <a:t>Spring Security with JWT; ADMIN and USER roles.</a:t>
+            </a:r>
+            <a:endParaRPr lang="en-US" sz="1500" dirty="0"/>
+          </a:p>
+        </p:txBody>
+      </p:sp>
+      <p:sp>
+        <p:nvSpPr>
+          <p:cNvPr id="22" name="Shape 20"/>
           <p:cNvSpPr/>
           <p:nvPr/>
         </p:nvSpPr>
         <p:spPr>
           <a:xfrm>
-            <a:off x="4572000" y="3886200"/>
-            <a:ext cx="411480" cy="411480"/>
+            <a:off x="6537960" y="5303520"/>
+            <a:ext cx="457200" cy="457200"/>
           </a:xfrm>
           <a:prstGeom prst="ellipse">
             <a:avLst/>
@@ -2063,14 +2735,14 @@
       </p:sp>
       <p:sp>
         <p:nvSpPr>
-          <p:cNvPr id="17" name="Text 15"/>
+          <p:cNvPr id="23" name="Text 21"/>
           <p:cNvSpPr txBox="1"/>
           <p:nvPr/>
         </p:nvSpPr>
         <p:spPr>
           <a:xfrm>
-            <a:off x="4572000" y="3886200"/>
-            <a:ext cx="411480" cy="411480"/>
+            <a:off x="6537960" y="5303520"/>
+            <a:ext cx="457200" cy="457200"/>
           </a:xfrm>
           <a:prstGeom prst="rect">
             <a:avLst/>
@@ -2086,7 +2758,7 @@
               <a:buNone/>
             </a:pPr>
             <a:r>
-              <a:rPr lang="en-US" sz="1500" b="1" dirty="0">
+              <a:rPr lang="en-US" sz="1600" b="1" dirty="0">
                 <a:solidFill>
                   <a:srgbClr val="FFFFFF"/>
                 </a:solidFill>
@@ -2096,20 +2768,20 @@
               </a:rPr>
               <a:t>4</a:t>
             </a:r>
-            <a:endParaRPr lang="en-US" sz="1500" dirty="0"/>
-          </a:p>
-        </p:txBody>
-      </p:sp>
-      <p:sp>
-        <p:nvSpPr>
-          <p:cNvPr id="18" name="Text 16"/>
+            <a:endParaRPr lang="en-US" sz="1600" dirty="0"/>
+          </a:p>
+        </p:txBody>
+      </p:sp>
+      <p:sp>
+        <p:nvSpPr>
+          <p:cNvPr id="24" name="Text 22"/>
           <p:cNvSpPr txBox="1"/>
           <p:nvPr/>
         </p:nvSpPr>
         <p:spPr>
           <a:xfrm>
-            <a:off x="5166360" y="3794760"/>
-            <a:ext cx="3429000" cy="594360"/>
+            <a:off x="7178040" y="5257800"/>
+            <a:ext cx="4206240" cy="868680"/>
           </a:xfrm>
           <a:prstGeom prst="rect">
             <a:avLst/>
@@ -2118,14 +2790,31 @@
           <a:ln/>
         </p:spPr>
         <p:txBody>
-          <a:bodyPr wrap="square" lIns="0" tIns="0" rIns="0" bIns="0" rtlCol="0" anchor="ctr"/>
-          <a:lstStyle/>
-          <a:p>
-            <a:pPr marL="0" indent="0">
-              <a:buNone/>
-            </a:pPr>
-            <a:r>
-              <a:rPr lang="en-US" sz="1600" dirty="0">
+          <a:bodyPr wrap="square" lIns="0" tIns="0" rIns="0" bIns="0" rtlCol="0" anchor="t"/>
+          <a:lstStyle/>
+          <a:p>
+            <a:pPr marL="0" indent="0">
+              <a:buNone/>
+            </a:pPr>
+            <a:r>
+              <a:rPr lang="en-US" sz="1500" b="1" dirty="0">
+                <a:solidFill>
+                  <a:srgbClr val="10263B"/>
+                </a:solidFill>
+                <a:latin typeface="Calibri" pitchFamily="34" charset="0"/>
+                <a:ea typeface="Calibri" pitchFamily="34" charset="-122"/>
+                <a:cs typeface="Calibri" pitchFamily="34" charset="-120"/>
+              </a:rPr>
+              <a:t>Modern web interface</a:t>
+            </a:r>
+            <a:endParaRPr lang="en-US" sz="1500" dirty="0"/>
+          </a:p>
+          <a:p>
+            <a:pPr marL="0" indent="0">
+              <a:buNone/>
+            </a:pPr>
+            <a:r>
+              <a:rPr lang="en-US" sz="1300" dirty="0">
                 <a:solidFill>
                   <a:srgbClr val="1F2933"/>
                 </a:solidFill>
@@ -2133,9 +2822,9 @@
                 <a:ea typeface="Calibri" pitchFamily="34" charset="-122"/>
                 <a:cs typeface="Calibri" pitchFamily="34" charset="-120"/>
               </a:rPr>
-              <a:t>Expose clean REST APIs with validation</a:t>
-            </a:r>
-            <a:endParaRPr lang="en-US" sz="1600" dirty="0"/>
+              <a:t>Angular 22 SPA with REST APIs and Tailwind UI.</a:t>
+            </a:r>
+            <a:endParaRPr lang="en-US" sz="1500" dirty="0"/>
           </a:p>
         </p:txBody>
       </p:sp>
@@ -2153,7 +2842,7 @@
     <p:bg>
       <p:bgPr>
         <a:solidFill>
-          <a:srgbClr val="FFFFFF"/>
+          <a:srgbClr val="F6F8FA"/>
         </a:solidFill>
         <a:effectLst/>
       </p:bgPr>
@@ -2180,8 +2869,8 @@
         </p:nvSpPr>
         <p:spPr>
           <a:xfrm>
-            <a:off x="548640" y="320040"/>
-            <a:ext cx="8046720" cy="640080"/>
+            <a:off x="640080" y="365760"/>
+            <a:ext cx="8229600" cy="274320"/>
           </a:xfrm>
           <a:prstGeom prst="rect">
             <a:avLst/>
@@ -2197,9 +2886,48 @@
               <a:buNone/>
             </a:pPr>
             <a:r>
-              <a:rPr lang="en-US" sz="3200" b="1" dirty="0">
-                <a:solidFill>
-                  <a:srgbClr val="12324A"/>
+              <a:rPr lang="en-US" sz="1200" b="1" kern="0" spc="200" dirty="0">
+                <a:solidFill>
+                  <a:srgbClr val="0F8B8D"/>
+                </a:solidFill>
+                <a:latin typeface="Calibri" pitchFamily="34" charset="0"/>
+                <a:ea typeface="Calibri" pitchFamily="34" charset="-122"/>
+                <a:cs typeface="Calibri" pitchFamily="34" charset="-120"/>
+              </a:rPr>
+              <a:t>02 | TECHNICAL FOUNDATION</a:t>
+            </a:r>
+            <a:endParaRPr lang="en-US" sz="1200" dirty="0"/>
+          </a:p>
+        </p:txBody>
+      </p:sp>
+      <p:sp>
+        <p:nvSpPr>
+          <p:cNvPr id="3" name="Text 1"/>
+          <p:cNvSpPr txBox="1"/>
+          <p:nvPr/>
+        </p:nvSpPr>
+        <p:spPr>
+          <a:xfrm>
+            <a:off x="640080" y="658368"/>
+            <a:ext cx="10881360" cy="594360"/>
+          </a:xfrm>
+          <a:prstGeom prst="rect">
+            <a:avLst/>
+          </a:prstGeom>
+          <a:noFill/>
+          <a:ln/>
+        </p:spPr>
+        <p:txBody>
+          <a:bodyPr wrap="square" lIns="0" tIns="0" rIns="0" bIns="0" rtlCol="0" anchor="ctr"/>
+          <a:lstStyle/>
+          <a:p>
+            <a:pPr marL="0" indent="0">
+              <a:buNone/>
+            </a:pPr>
+            <a:r>
+              <a:rPr lang="en-US" sz="3000" b="1" dirty="0">
+                <a:solidFill>
+                  <a:srgbClr val="10263B"/>
                 </a:solidFill>
                 <a:latin typeface="Cambria" pitchFamily="34" charset="0"/>
                 <a:ea typeface="Cambria" pitchFamily="34" charset="-122"/>
@@ -2207,20 +2935,20 @@
               </a:rPr>
               <a:t>Technology Stack</a:t>
             </a:r>
-            <a:endParaRPr lang="en-US" sz="3200" dirty="0"/>
-          </a:p>
-        </p:txBody>
-      </p:sp>
-      <p:sp>
-        <p:nvSpPr>
-          <p:cNvPr id="3" name="Text 1"/>
+            <a:endParaRPr lang="en-US" sz="3000" dirty="0"/>
+          </a:p>
+        </p:txBody>
+      </p:sp>
+      <p:sp>
+        <p:nvSpPr>
+          <p:cNvPr id="4" name="Text 2"/>
           <p:cNvSpPr txBox="1"/>
           <p:nvPr/>
         </p:nvSpPr>
         <p:spPr>
           <a:xfrm>
-            <a:off x="548640" y="914400"/>
-            <a:ext cx="8046720" cy="365760"/>
+            <a:off x="640080" y="1261872"/>
+            <a:ext cx="10881360" cy="320040"/>
           </a:xfrm>
           <a:prstGeom prst="rect">
             <a:avLst/>
@@ -2244,7 +2972,7 @@
                 <a:ea typeface="Calibri" pitchFamily="34" charset="-122"/>
                 <a:cs typeface="Calibri" pitchFamily="34" charset="-120"/>
               </a:rPr>
-              <a:t>Three tiers, each with a clear responsibility</a:t>
+              <a:t>Decoupled three-tier architecture built on industry-standard frameworks</a:t>
             </a:r>
             <a:endParaRPr lang="en-US" sz="1500" dirty="0"/>
           </a:p>
@@ -2252,18 +2980,18 @@
       </p:sp>
       <p:sp>
         <p:nvSpPr>
-          <p:cNvPr id="4" name="Shape 2"/>
+          <p:cNvPr id="5" name="Shape 3"/>
           <p:cNvSpPr/>
           <p:nvPr/>
         </p:nvSpPr>
         <p:spPr>
           <a:xfrm>
-            <a:off x="548640" y="1463040"/>
-            <a:ext cx="2560320" cy="3017520"/>
+            <a:off x="640080" y="1783080"/>
+            <a:ext cx="3566160" cy="4480560"/>
           </a:xfrm>
           <a:prstGeom prst="roundRect">
             <a:avLst>
-              <a:gd name="adj" fmla="val 4286"/>
+              <a:gd name="adj" fmla="val 3077"/>
             </a:avLst>
           </a:prstGeom>
           <a:solidFill>
@@ -2271,14 +2999,14 @@
           </a:solidFill>
           <a:ln w="12700">
             <a:solidFill>
-              <a:srgbClr val="D5DDE3"/>
+              <a:srgbClr val="FFFFFF"/>
             </a:solidFill>
             <a:prstDash val="solid"/>
           </a:ln>
           <a:effectLst>
-            <a:outerShdw blurRad="76200" dist="25400" dir="5400000" algn="bl" rotWithShape="0">
+            <a:outerShdw blurRad="101600" dist="25400" dir="5400000" algn="bl" rotWithShape="0">
               <a:srgbClr val="000000">
-                <a:alpha val="15000"/>
+                <a:alpha val="12000"/>
               </a:srgbClr>
             </a:outerShdw>
           </a:effectLst>
@@ -2286,18 +3014,18 @@
       </p:sp>
       <p:sp>
         <p:nvSpPr>
-          <p:cNvPr id="5" name="Shape 3"/>
+          <p:cNvPr id="6" name="Shape 4"/>
           <p:cNvSpPr/>
           <p:nvPr/>
         </p:nvSpPr>
         <p:spPr>
           <a:xfrm>
-            <a:off x="731520" y="1645920"/>
-            <a:ext cx="2194560" cy="457200"/>
+            <a:off x="868680" y="2011680"/>
+            <a:ext cx="3108960" cy="411480"/>
           </a:xfrm>
           <a:prstGeom prst="roundRect">
             <a:avLst>
-              <a:gd name="adj" fmla="val 20000"/>
+              <a:gd name="adj" fmla="val 22222"/>
             </a:avLst>
           </a:prstGeom>
           <a:solidFill>
@@ -2313,14 +3041,14 @@
       </p:sp>
       <p:sp>
         <p:nvSpPr>
-          <p:cNvPr id="6" name="Text 4"/>
+          <p:cNvPr id="7" name="Text 5"/>
           <p:cNvSpPr txBox="1"/>
           <p:nvPr/>
         </p:nvSpPr>
         <p:spPr>
           <a:xfrm>
-            <a:off x="731520" y="1645920"/>
-            <a:ext cx="2194560" cy="457200"/>
+            <a:off x="868680" y="2011680"/>
+            <a:ext cx="3108960" cy="411480"/>
           </a:xfrm>
           <a:prstGeom prst="rect">
             <a:avLst/>
@@ -2336,30 +3064,69 @@
               <a:buNone/>
             </a:pPr>
             <a:r>
-              <a:rPr lang="en-US" sz="1800" b="1" dirty="0">
+              <a:rPr lang="en-US" sz="1200" b="1" kern="0" spc="200" dirty="0">
                 <a:solidFill>
                   <a:srgbClr val="FFFFFF"/>
+                </a:solidFill>
+                <a:latin typeface="Calibri" pitchFamily="34" charset="0"/>
+                <a:ea typeface="Calibri" pitchFamily="34" charset="-122"/>
+                <a:cs typeface="Calibri" pitchFamily="34" charset="-120"/>
+              </a:rPr>
+              <a:t>PRESENTATION</a:t>
+            </a:r>
+            <a:endParaRPr lang="en-US" sz="1200" dirty="0"/>
+          </a:p>
+        </p:txBody>
+      </p:sp>
+      <p:sp>
+        <p:nvSpPr>
+          <p:cNvPr id="8" name="Text 6"/>
+          <p:cNvSpPr txBox="1"/>
+          <p:nvPr/>
+        </p:nvSpPr>
+        <p:spPr>
+          <a:xfrm>
+            <a:off x="868680" y="2606040"/>
+            <a:ext cx="3108960" cy="457200"/>
+          </a:xfrm>
+          <a:prstGeom prst="rect">
+            <a:avLst/>
+          </a:prstGeom>
+          <a:noFill/>
+          <a:ln/>
+        </p:spPr>
+        <p:txBody>
+          <a:bodyPr wrap="square" lIns="0" tIns="0" rIns="0" bIns="0" rtlCol="0" anchor="ctr"/>
+          <a:lstStyle/>
+          <a:p>
+            <a:pPr marL="0" indent="0">
+              <a:buNone/>
+            </a:pPr>
+            <a:r>
+              <a:rPr lang="en-US" sz="1900" b="1" dirty="0">
+                <a:solidFill>
+                  <a:srgbClr val="10263B"/>
                 </a:solidFill>
                 <a:latin typeface="Cambria" pitchFamily="34" charset="0"/>
                 <a:ea typeface="Cambria" pitchFamily="34" charset="-122"/>
                 <a:cs typeface="Cambria" pitchFamily="34" charset="-120"/>
               </a:rPr>
-              <a:t>Frontend</a:t>
-            </a:r>
-            <a:endParaRPr lang="en-US" sz="1800" dirty="0"/>
-          </a:p>
-        </p:txBody>
-      </p:sp>
-      <p:sp>
-        <p:nvSpPr>
-          <p:cNvPr id="7" name="Text 5"/>
+              <a:t>Angular 22 &amp; Tailwind v4</a:t>
+            </a:r>
+            <a:endParaRPr lang="en-US" sz="1900" dirty="0"/>
+          </a:p>
+        </p:txBody>
+      </p:sp>
+      <p:sp>
+        <p:nvSpPr>
+          <p:cNvPr id="9" name="Text 7"/>
           <p:cNvSpPr txBox="1"/>
           <p:nvPr/>
         </p:nvSpPr>
         <p:spPr>
           <a:xfrm>
-            <a:off x="777240" y="2286000"/>
-            <a:ext cx="2148840" cy="2103120"/>
+            <a:off x="868680" y="3200400"/>
+            <a:ext cx="3108960" cy="2834640"/>
           </a:xfrm>
           <a:prstGeom prst="rect">
             <a:avLst/>
@@ -2373,7 +3140,7 @@
           <a:p>
             <a:pPr marL="342900" indent="-342900">
               <a:spcAft>
-                <a:spcPts val="600"/>
+                <a:spcPts val="900"/>
               </a:spcAft>
               <a:buSzPct val="100000"/>
               <a:buChar char="•"/>
@@ -2387,14 +3154,14 @@
                 <a:ea typeface="Calibri" pitchFamily="34" charset="-122"/>
                 <a:cs typeface="Calibri" pitchFamily="34" charset="-120"/>
               </a:rPr>
-              <a:t>Angular 22 (standalone)</a:t>
+              <a:t>Standalone components, Router</a:t>
             </a:r>
             <a:endParaRPr lang="en-US" sz="1400" dirty="0"/>
           </a:p>
           <a:p>
             <a:pPr marL="342900" indent="-342900">
               <a:spcAft>
-                <a:spcPts val="600"/>
+                <a:spcPts val="900"/>
               </a:spcAft>
               <a:buSzPct val="100000"/>
               <a:buChar char="•"/>
@@ -2408,14 +3175,14 @@
                 <a:ea typeface="Calibri" pitchFamily="34" charset="-122"/>
                 <a:cs typeface="Calibri" pitchFamily="34" charset="-120"/>
               </a:rPr>
-              <a:t>TypeScript</a:t>
+              <a:t>TypeScript with Signals</a:t>
             </a:r>
             <a:endParaRPr lang="en-US" sz="1400" dirty="0"/>
           </a:p>
           <a:p>
             <a:pPr marL="342900" indent="-342900">
               <a:spcAft>
-                <a:spcPts val="600"/>
+                <a:spcPts val="900"/>
               </a:spcAft>
               <a:buSzPct val="100000"/>
               <a:buChar char="•"/>
@@ -2429,14 +3196,14 @@
                 <a:ea typeface="Calibri" pitchFamily="34" charset="-122"/>
                 <a:cs typeface="Calibri" pitchFamily="34" charset="-120"/>
               </a:rPr>
-              <a:t>Tailwind CSS v4</a:t>
+              <a:t>Route guards for protected pages</a:t>
             </a:r>
             <a:endParaRPr lang="en-US" sz="1400" dirty="0"/>
           </a:p>
           <a:p>
             <a:pPr marL="342900" indent="-342900">
               <a:spcAft>
-                <a:spcPts val="600"/>
+                <a:spcPts val="900"/>
               </a:spcAft>
               <a:buSzPct val="100000"/>
               <a:buChar char="•"/>
@@ -2450,14 +3217,14 @@
                 <a:ea typeface="Calibri" pitchFamily="34" charset="-122"/>
                 <a:cs typeface="Calibri" pitchFamily="34" charset="-120"/>
               </a:rPr>
-              <a:t>Angular Router</a:t>
+              <a:t>HttpClient with JWT interceptor</a:t>
             </a:r>
             <a:endParaRPr lang="en-US" sz="1400" dirty="0"/>
           </a:p>
           <a:p>
             <a:pPr marL="342900" indent="-342900">
               <a:spcAft>
-                <a:spcPts val="600"/>
+                <a:spcPts val="900"/>
               </a:spcAft>
               <a:buSzPct val="100000"/>
               <a:buChar char="•"/>
@@ -2471,7 +3238,7 @@
                 <a:ea typeface="Calibri" pitchFamily="34" charset="-122"/>
                 <a:cs typeface="Calibri" pitchFamily="34" charset="-120"/>
               </a:rPr>
-              <a:t>HttpClient + JWT interceptor</a:t>
+              <a:t>Tailwind CSS v4 dual theme</a:t>
             </a:r>
             <a:endParaRPr lang="en-US" sz="1400" dirty="0"/>
           </a:p>
@@ -2479,18 +3246,18 @@
       </p:sp>
       <p:sp>
         <p:nvSpPr>
-          <p:cNvPr id="8" name="Shape 6"/>
+          <p:cNvPr id="10" name="Shape 8"/>
           <p:cNvSpPr/>
           <p:nvPr/>
         </p:nvSpPr>
         <p:spPr>
           <a:xfrm>
-            <a:off x="3291840" y="1463040"/>
-            <a:ext cx="2560320" cy="3017520"/>
+            <a:off x="4389120" y="1783080"/>
+            <a:ext cx="3566160" cy="4480560"/>
           </a:xfrm>
           <a:prstGeom prst="roundRect">
             <a:avLst>
-              <a:gd name="adj" fmla="val 4286"/>
+              <a:gd name="adj" fmla="val 3077"/>
             </a:avLst>
           </a:prstGeom>
           <a:solidFill>
@@ -2498,14 +3265,14 @@
           </a:solidFill>
           <a:ln w="12700">
             <a:solidFill>
-              <a:srgbClr val="D5DDE3"/>
+              <a:srgbClr val="FFFFFF"/>
             </a:solidFill>
             <a:prstDash val="solid"/>
           </a:ln>
           <a:effectLst>
-            <a:outerShdw blurRad="76200" dist="25400" dir="5400000" algn="bl" rotWithShape="0">
+            <a:outerShdw blurRad="101600" dist="25400" dir="5400000" algn="bl" rotWithShape="0">
               <a:srgbClr val="000000">
-                <a:alpha val="15000"/>
+                <a:alpha val="12000"/>
               </a:srgbClr>
             </a:outerShdw>
           </a:effectLst>
@@ -2513,26 +3280,26 @@
       </p:sp>
       <p:sp>
         <p:nvSpPr>
-          <p:cNvPr id="9" name="Shape 7"/>
+          <p:cNvPr id="11" name="Shape 9"/>
           <p:cNvSpPr/>
           <p:nvPr/>
         </p:nvSpPr>
         <p:spPr>
           <a:xfrm>
-            <a:off x="3474720" y="1645920"/>
-            <a:ext cx="2194560" cy="457200"/>
+            <a:off x="4617720" y="2011680"/>
+            <a:ext cx="3108960" cy="411480"/>
           </a:xfrm>
           <a:prstGeom prst="roundRect">
             <a:avLst>
-              <a:gd name="adj" fmla="val 20000"/>
+              <a:gd name="adj" fmla="val 22222"/>
             </a:avLst>
           </a:prstGeom>
           <a:solidFill>
-            <a:srgbClr val="12324A"/>
+            <a:srgbClr val="10263B"/>
           </a:solidFill>
           <a:ln w="12700">
             <a:solidFill>
-              <a:srgbClr val="12324A"/>
+              <a:srgbClr val="10263B"/>
             </a:solidFill>
             <a:prstDash val="solid"/>
           </a:ln>
@@ -2540,14 +3307,14 @@
       </p:sp>
       <p:sp>
         <p:nvSpPr>
-          <p:cNvPr id="10" name="Text 8"/>
+          <p:cNvPr id="12" name="Text 10"/>
           <p:cNvSpPr txBox="1"/>
           <p:nvPr/>
         </p:nvSpPr>
         <p:spPr>
           <a:xfrm>
-            <a:off x="3474720" y="1645920"/>
-            <a:ext cx="2194560" cy="457200"/>
+            <a:off x="4617720" y="2011680"/>
+            <a:ext cx="3108960" cy="411480"/>
           </a:xfrm>
           <a:prstGeom prst="rect">
             <a:avLst/>
@@ -2563,30 +3330,69 @@
               <a:buNone/>
             </a:pPr>
             <a:r>
-              <a:rPr lang="en-US" sz="1800" b="1" dirty="0">
+              <a:rPr lang="en-US" sz="1200" b="1" kern="0" spc="200" dirty="0">
                 <a:solidFill>
                   <a:srgbClr val="FFFFFF"/>
+                </a:solidFill>
+                <a:latin typeface="Calibri" pitchFamily="34" charset="0"/>
+                <a:ea typeface="Calibri" pitchFamily="34" charset="-122"/>
+                <a:cs typeface="Calibri" pitchFamily="34" charset="-120"/>
+              </a:rPr>
+              <a:t>APPLICATION</a:t>
+            </a:r>
+            <a:endParaRPr lang="en-US" sz="1200" dirty="0"/>
+          </a:p>
+        </p:txBody>
+      </p:sp>
+      <p:sp>
+        <p:nvSpPr>
+          <p:cNvPr id="13" name="Text 11"/>
+          <p:cNvSpPr txBox="1"/>
+          <p:nvPr/>
+        </p:nvSpPr>
+        <p:spPr>
+          <a:xfrm>
+            <a:off x="4617720" y="2606040"/>
+            <a:ext cx="3108960" cy="457200"/>
+          </a:xfrm>
+          <a:prstGeom prst="rect">
+            <a:avLst/>
+          </a:prstGeom>
+          <a:noFill/>
+          <a:ln/>
+        </p:spPr>
+        <p:txBody>
+          <a:bodyPr wrap="square" lIns="0" tIns="0" rIns="0" bIns="0" rtlCol="0" anchor="ctr"/>
+          <a:lstStyle/>
+          <a:p>
+            <a:pPr marL="0" indent="0">
+              <a:buNone/>
+            </a:pPr>
+            <a:r>
+              <a:rPr lang="en-US" sz="1900" b="1" dirty="0">
+                <a:solidFill>
+                  <a:srgbClr val="10263B"/>
                 </a:solidFill>
                 <a:latin typeface="Cambria" pitchFamily="34" charset="0"/>
                 <a:ea typeface="Cambria" pitchFamily="34" charset="-122"/>
                 <a:cs typeface="Cambria" pitchFamily="34" charset="-120"/>
               </a:rPr>
-              <a:t>Backend</a:t>
-            </a:r>
-            <a:endParaRPr lang="en-US" sz="1800" dirty="0"/>
-          </a:p>
-        </p:txBody>
-      </p:sp>
-      <p:sp>
-        <p:nvSpPr>
-          <p:cNvPr id="11" name="Text 9"/>
+              <a:t>Spring Boot &amp; Security</a:t>
+            </a:r>
+            <a:endParaRPr lang="en-US" sz="1900" dirty="0"/>
+          </a:p>
+        </p:txBody>
+      </p:sp>
+      <p:sp>
+        <p:nvSpPr>
+          <p:cNvPr id="14" name="Text 12"/>
           <p:cNvSpPr txBox="1"/>
           <p:nvPr/>
         </p:nvSpPr>
         <p:spPr>
           <a:xfrm>
-            <a:off x="3520440" y="2286000"/>
-            <a:ext cx="2148840" cy="2103120"/>
+            <a:off x="4617720" y="3200400"/>
+            <a:ext cx="3108960" cy="2834640"/>
           </a:xfrm>
           <a:prstGeom prst="rect">
             <a:avLst/>
@@ -2600,7 +3406,7 @@
           <a:p>
             <a:pPr marL="342900" indent="-342900">
               <a:spcAft>
-                <a:spcPts val="600"/>
+                <a:spcPts val="900"/>
               </a:spcAft>
               <a:buSzPct val="100000"/>
               <a:buChar char="•"/>
@@ -2614,14 +3420,14 @@
                 <a:ea typeface="Calibri" pitchFamily="34" charset="-122"/>
                 <a:cs typeface="Calibri" pitchFamily="34" charset="-120"/>
               </a:rPr>
-              <a:t>Java 17</a:t>
+              <a:t>Java 17 LTS</a:t>
             </a:r>
             <a:endParaRPr lang="en-US" sz="1400" dirty="0"/>
           </a:p>
           <a:p>
             <a:pPr marL="342900" indent="-342900">
               <a:spcAft>
-                <a:spcPts val="600"/>
+                <a:spcPts val="900"/>
               </a:spcAft>
               <a:buSzPct val="100000"/>
               <a:buChar char="•"/>
@@ -2635,14 +3441,14 @@
                 <a:ea typeface="Calibri" pitchFamily="34" charset="-122"/>
                 <a:cs typeface="Calibri" pitchFamily="34" charset="-120"/>
               </a:rPr>
-              <a:t>Spring Boot</a:t>
+              <a:t>Spring Data JPA / Hibernate</a:t>
             </a:r>
             <a:endParaRPr lang="en-US" sz="1400" dirty="0"/>
           </a:p>
           <a:p>
             <a:pPr marL="342900" indent="-342900">
               <a:spcAft>
-                <a:spcPts val="600"/>
+                <a:spcPts val="900"/>
               </a:spcAft>
               <a:buSzPct val="100000"/>
               <a:buChar char="•"/>
@@ -2656,14 +3462,14 @@
                 <a:ea typeface="Calibri" pitchFamily="34" charset="-122"/>
                 <a:cs typeface="Calibri" pitchFamily="34" charset="-120"/>
               </a:rPr>
-              <a:t>Spring Data JPA</a:t>
+              <a:t>Spring Security + JWT filter</a:t>
             </a:r>
             <a:endParaRPr lang="en-US" sz="1400" dirty="0"/>
           </a:p>
           <a:p>
             <a:pPr marL="342900" indent="-342900">
               <a:spcAft>
-                <a:spcPts val="600"/>
+                <a:spcPts val="900"/>
               </a:spcAft>
               <a:buSzPct val="100000"/>
               <a:buChar char="•"/>
@@ -2677,14 +3483,14 @@
                 <a:ea typeface="Calibri" pitchFamily="34" charset="-122"/>
                 <a:cs typeface="Calibri" pitchFamily="34" charset="-120"/>
               </a:rPr>
-              <a:t>Spring Security + JWT</a:t>
+              <a:t>Bean Validation (@NotNull, @Min)</a:t>
             </a:r>
             <a:endParaRPr lang="en-US" sz="1400" dirty="0"/>
           </a:p>
           <a:p>
             <a:pPr marL="342900" indent="-342900">
               <a:spcAft>
-                <a:spcPts val="600"/>
+                <a:spcPts val="900"/>
               </a:spcAft>
               <a:buSzPct val="100000"/>
               <a:buChar char="•"/>
@@ -2698,7 +3504,7 @@
                 <a:ea typeface="Calibri" pitchFamily="34" charset="-122"/>
                 <a:cs typeface="Calibri" pitchFamily="34" charset="-120"/>
               </a:rPr>
-              <a:t>Maven</a:t>
+              <a:t>Maven build</a:t>
             </a:r>
             <a:endParaRPr lang="en-US" sz="1400" dirty="0"/>
           </a:p>
@@ -2706,18 +3512,18 @@
       </p:sp>
       <p:sp>
         <p:nvSpPr>
-          <p:cNvPr id="12" name="Shape 10"/>
+          <p:cNvPr id="15" name="Shape 13"/>
           <p:cNvSpPr/>
           <p:nvPr/>
         </p:nvSpPr>
         <p:spPr>
           <a:xfrm>
-            <a:off x="6035040" y="1463040"/>
-            <a:ext cx="2560320" cy="3017520"/>
+            <a:off x="8138160" y="1783080"/>
+            <a:ext cx="3566160" cy="4480560"/>
           </a:xfrm>
           <a:prstGeom prst="roundRect">
             <a:avLst>
-              <a:gd name="adj" fmla="val 4286"/>
+              <a:gd name="adj" fmla="val 3077"/>
             </a:avLst>
           </a:prstGeom>
           <a:solidFill>
@@ -2725,14 +3531,14 @@
           </a:solidFill>
           <a:ln w="12700">
             <a:solidFill>
-              <a:srgbClr val="D5DDE3"/>
+              <a:srgbClr val="FFFFFF"/>
             </a:solidFill>
             <a:prstDash val="solid"/>
           </a:ln>
           <a:effectLst>
-            <a:outerShdw blurRad="76200" dist="25400" dir="5400000" algn="bl" rotWithShape="0">
+            <a:outerShdw blurRad="101600" dist="25400" dir="5400000" algn="bl" rotWithShape="0">
               <a:srgbClr val="000000">
-                <a:alpha val="15000"/>
+                <a:alpha val="12000"/>
               </a:srgbClr>
             </a:outerShdw>
           </a:effectLst>
@@ -2740,18 +3546,18 @@
       </p:sp>
       <p:sp>
         <p:nvSpPr>
-          <p:cNvPr id="13" name="Shape 11"/>
+          <p:cNvPr id="16" name="Shape 14"/>
           <p:cNvSpPr/>
           <p:nvPr/>
         </p:nvSpPr>
         <p:spPr>
           <a:xfrm>
-            <a:off x="6217920" y="1645920"/>
-            <a:ext cx="2194560" cy="457200"/>
+            <a:off x="8366760" y="2011680"/>
+            <a:ext cx="3108960" cy="411480"/>
           </a:xfrm>
           <a:prstGeom prst="roundRect">
             <a:avLst>
-              <a:gd name="adj" fmla="val 20000"/>
+              <a:gd name="adj" fmla="val 22222"/>
             </a:avLst>
           </a:prstGeom>
           <a:solidFill>
@@ -2767,14 +3573,14 @@
       </p:sp>
       <p:sp>
         <p:nvSpPr>
-          <p:cNvPr id="14" name="Text 12"/>
+          <p:cNvPr id="17" name="Text 15"/>
           <p:cNvSpPr txBox="1"/>
           <p:nvPr/>
         </p:nvSpPr>
         <p:spPr>
           <a:xfrm>
-            <a:off x="6217920" y="1645920"/>
-            <a:ext cx="2194560" cy="457200"/>
+            <a:off x="8366760" y="2011680"/>
+            <a:ext cx="3108960" cy="411480"/>
           </a:xfrm>
           <a:prstGeom prst="rect">
             <a:avLst/>
@@ -2790,30 +3596,69 @@
               <a:buNone/>
             </a:pPr>
             <a:r>
-              <a:rPr lang="en-US" sz="1800" b="1" dirty="0">
+              <a:rPr lang="en-US" sz="1200" b="1" kern="0" spc="200" dirty="0">
                 <a:solidFill>
                   <a:srgbClr val="FFFFFF"/>
+                </a:solidFill>
+                <a:latin typeface="Calibri" pitchFamily="34" charset="0"/>
+                <a:ea typeface="Calibri" pitchFamily="34" charset="-122"/>
+                <a:cs typeface="Calibri" pitchFamily="34" charset="-120"/>
+              </a:rPr>
+              <a:t>PERSISTENCE &amp; TOOLS</a:t>
+            </a:r>
+            <a:endParaRPr lang="en-US" sz="1200" dirty="0"/>
+          </a:p>
+        </p:txBody>
+      </p:sp>
+      <p:sp>
+        <p:nvSpPr>
+          <p:cNvPr id="18" name="Text 16"/>
+          <p:cNvSpPr txBox="1"/>
+          <p:nvPr/>
+        </p:nvSpPr>
+        <p:spPr>
+          <a:xfrm>
+            <a:off x="8366760" y="2606040"/>
+            <a:ext cx="3108960" cy="457200"/>
+          </a:xfrm>
+          <a:prstGeom prst="rect">
+            <a:avLst/>
+          </a:prstGeom>
+          <a:noFill/>
+          <a:ln/>
+        </p:spPr>
+        <p:txBody>
+          <a:bodyPr wrap="square" lIns="0" tIns="0" rIns="0" bIns="0" rtlCol="0" anchor="ctr"/>
+          <a:lstStyle/>
+          <a:p>
+            <a:pPr marL="0" indent="0">
+              <a:buNone/>
+            </a:pPr>
+            <a:r>
+              <a:rPr lang="en-US" sz="1900" b="1" dirty="0">
+                <a:solidFill>
+                  <a:srgbClr val="10263B"/>
                 </a:solidFill>
                 <a:latin typeface="Cambria" pitchFamily="34" charset="0"/>
                 <a:ea typeface="Cambria" pitchFamily="34" charset="-122"/>
                 <a:cs typeface="Cambria" pitchFamily="34" charset="-120"/>
               </a:rPr>
-              <a:t>Data &amp; Tools</a:t>
-            </a:r>
-            <a:endParaRPr lang="en-US" sz="1800" dirty="0"/>
-          </a:p>
-        </p:txBody>
-      </p:sp>
-      <p:sp>
-        <p:nvSpPr>
-          <p:cNvPr id="15" name="Text 13"/>
+              <a:t>MySQL 8 &amp; Tooling</a:t>
+            </a:r>
+            <a:endParaRPr lang="en-US" sz="1900" dirty="0"/>
+          </a:p>
+        </p:txBody>
+      </p:sp>
+      <p:sp>
+        <p:nvSpPr>
+          <p:cNvPr id="19" name="Text 17"/>
           <p:cNvSpPr txBox="1"/>
           <p:nvPr/>
         </p:nvSpPr>
         <p:spPr>
           <a:xfrm>
-            <a:off x="6263640" y="2286000"/>
-            <a:ext cx="2148840" cy="2103120"/>
+            <a:off x="8366760" y="3200400"/>
+            <a:ext cx="3108960" cy="2834640"/>
           </a:xfrm>
           <a:prstGeom prst="rect">
             <a:avLst/>
@@ -2827,7 +3672,7 @@
           <a:p>
             <a:pPr marL="342900" indent="-342900">
               <a:spcAft>
-                <a:spcPts val="600"/>
+                <a:spcPts val="900"/>
               </a:spcAft>
               <a:buSzPct val="100000"/>
               <a:buChar char="•"/>
@@ -2841,14 +3686,14 @@
                 <a:ea typeface="Calibri" pitchFamily="34" charset="-122"/>
                 <a:cs typeface="Calibri" pitchFamily="34" charset="-120"/>
               </a:rPr>
-              <a:t>MySQL 8 (retail_inventory)</a:t>
+              <a:t>10 normalized tables (3NF)</a:t>
             </a:r>
             <a:endParaRPr lang="en-US" sz="1400" dirty="0"/>
           </a:p>
           <a:p>
             <a:pPr marL="342900" indent="-342900">
               <a:spcAft>
-                <a:spcPts val="600"/>
+                <a:spcPts val="900"/>
               </a:spcAft>
               <a:buSzPct val="100000"/>
               <a:buChar char="•"/>
@@ -2862,14 +3707,14 @@
                 <a:ea typeface="Calibri" pitchFamily="34" charset="-122"/>
                 <a:cs typeface="Calibri" pitchFamily="34" charset="-120"/>
               </a:rPr>
-              <a:t>Node.js / npm</a:t>
+              <a:t>Foreign keys, unique SKU</a:t>
             </a:r>
             <a:endParaRPr lang="en-US" sz="1400" dirty="0"/>
           </a:p>
           <a:p>
             <a:pPr marL="342900" indent="-342900">
               <a:spcAft>
-                <a:spcPts val="600"/>
+                <a:spcPts val="900"/>
               </a:spcAft>
               <a:buSzPct val="100000"/>
               <a:buChar char="•"/>
@@ -2883,14 +3728,14 @@
                 <a:ea typeface="Calibri" pitchFamily="34" charset="-122"/>
                 <a:cs typeface="Calibri" pitchFamily="34" charset="-120"/>
               </a:rPr>
-              <a:t>Git / GitHub</a:t>
+              <a:t>Postman / Thunder Client</a:t>
             </a:r>
             <a:endParaRPr lang="en-US" sz="1400" dirty="0"/>
           </a:p>
           <a:p>
             <a:pPr marL="342900" indent="-342900">
               <a:spcAft>
-                <a:spcPts val="600"/>
+                <a:spcPts val="900"/>
               </a:spcAft>
               <a:buSzPct val="100000"/>
               <a:buChar char="•"/>
@@ -2904,7 +3749,28 @@
                 <a:ea typeface="Calibri" pitchFamily="34" charset="-122"/>
                 <a:cs typeface="Calibri" pitchFamily="34" charset="-120"/>
               </a:rPr>
-              <a:t>Postman / Thunder Client</a:t>
+              <a:t>Git / GitHub</a:t>
+            </a:r>
+            <a:endParaRPr lang="en-US" sz="1400" dirty="0"/>
+          </a:p>
+          <a:p>
+            <a:pPr marL="342900" indent="-342900">
+              <a:spcAft>
+                <a:spcPts val="900"/>
+              </a:spcAft>
+              <a:buSzPct val="100000"/>
+              <a:buChar char="•"/>
+            </a:pPr>
+            <a:r>
+              <a:rPr lang="en-US" sz="1400" dirty="0">
+                <a:solidFill>
+                  <a:srgbClr val="1F2933"/>
+                </a:solidFill>
+                <a:latin typeface="Calibri" pitchFamily="34" charset="0"/>
+                <a:ea typeface="Calibri" pitchFamily="34" charset="-122"/>
+                <a:cs typeface="Calibri" pitchFamily="34" charset="-120"/>
+              </a:rPr>
+              <a:t>Node.js / npm</a:t>
             </a:r>
             <a:endParaRPr lang="en-US" sz="1400" dirty="0"/>
           </a:p>
@@ -2924,7 +3790,7 @@
     <p:bg>
       <p:bgPr>
         <a:solidFill>
-          <a:srgbClr val="FFFFFF"/>
+          <a:srgbClr val="F6F8FA"/>
         </a:solidFill>
         <a:effectLst/>
       </p:bgPr>
@@ -2951,8 +3817,8 @@
         </p:nvSpPr>
         <p:spPr>
           <a:xfrm>
-            <a:off x="548640" y="320040"/>
-            <a:ext cx="8046720" cy="640080"/>
+            <a:off x="640080" y="365760"/>
+            <a:ext cx="8229600" cy="274320"/>
           </a:xfrm>
           <a:prstGeom prst="rect">
             <a:avLst/>
@@ -2968,23 +3834,135 @@
               <a:buNone/>
             </a:pPr>
             <a:r>
-              <a:rPr lang="en-US" sz="3200" b="1" dirty="0">
-                <a:solidFill>
-                  <a:srgbClr val="12324A"/>
+              <a:rPr lang="en-US" sz="1200" b="1" kern="0" spc="200" dirty="0">
+                <a:solidFill>
+                  <a:srgbClr val="0F8B8D"/>
+                </a:solidFill>
+                <a:latin typeface="Calibri" pitchFamily="34" charset="0"/>
+                <a:ea typeface="Calibri" pitchFamily="34" charset="-122"/>
+                <a:cs typeface="Calibri" pitchFamily="34" charset="-120"/>
+              </a:rPr>
+              <a:t>03 | ARCHITECTURE</a:t>
+            </a:r>
+            <a:endParaRPr lang="en-US" sz="1200" dirty="0"/>
+          </a:p>
+        </p:txBody>
+      </p:sp>
+      <p:sp>
+        <p:nvSpPr>
+          <p:cNvPr id="3" name="Text 1"/>
+          <p:cNvSpPr txBox="1"/>
+          <p:nvPr/>
+        </p:nvSpPr>
+        <p:spPr>
+          <a:xfrm>
+            <a:off x="640080" y="658368"/>
+            <a:ext cx="10881360" cy="594360"/>
+          </a:xfrm>
+          <a:prstGeom prst="rect">
+            <a:avLst/>
+          </a:prstGeom>
+          <a:noFill/>
+          <a:ln/>
+        </p:spPr>
+        <p:txBody>
+          <a:bodyPr wrap="square" lIns="0" tIns="0" rIns="0" bIns="0" rtlCol="0" anchor="ctr"/>
+          <a:lstStyle/>
+          <a:p>
+            <a:pPr marL="0" indent="0">
+              <a:buNone/>
+            </a:pPr>
+            <a:r>
+              <a:rPr lang="en-US" sz="3000" b="1" dirty="0">
+                <a:solidFill>
+                  <a:srgbClr val="10263B"/>
                 </a:solidFill>
                 <a:latin typeface="Cambria" pitchFamily="34" charset="0"/>
                 <a:ea typeface="Cambria" pitchFamily="34" charset="-122"/>
                 <a:cs typeface="Cambria" pitchFamily="34" charset="-120"/>
               </a:rPr>
-              <a:t>System Architecture</a:t>
-            </a:r>
-            <a:endParaRPr lang="en-US" sz="3200" dirty="0"/>
-          </a:p>
-        </p:txBody>
+              <a:t>3-Tier Architecture &amp; Request Flow</a:t>
+            </a:r>
+            <a:endParaRPr lang="en-US" sz="3000" dirty="0"/>
+          </a:p>
+        </p:txBody>
+      </p:sp>
+      <p:sp>
+        <p:nvSpPr>
+          <p:cNvPr id="4" name="Text 2"/>
+          <p:cNvSpPr txBox="1"/>
+          <p:nvPr/>
+        </p:nvSpPr>
+        <p:spPr>
+          <a:xfrm>
+            <a:off x="640080" y="1261872"/>
+            <a:ext cx="10881360" cy="320040"/>
+          </a:xfrm>
+          <a:prstGeom prst="rect">
+            <a:avLst/>
+          </a:prstGeom>
+          <a:noFill/>
+          <a:ln/>
+        </p:spPr>
+        <p:txBody>
+          <a:bodyPr wrap="square" lIns="0" tIns="0" rIns="0" bIns="0" rtlCol="0" anchor="ctr"/>
+          <a:lstStyle/>
+          <a:p>
+            <a:pPr marL="0" indent="0">
+              <a:buNone/>
+            </a:pPr>
+            <a:r>
+              <a:rPr lang="en-US" sz="1500" i="1" dirty="0">
+                <a:solidFill>
+                  <a:srgbClr val="5B6770"/>
+                </a:solidFill>
+                <a:latin typeface="Calibri" pitchFamily="34" charset="0"/>
+                <a:ea typeface="Calibri" pitchFamily="34" charset="-122"/>
+                <a:cs typeface="Calibri" pitchFamily="34" charset="-120"/>
+              </a:rPr>
+              <a:t>Stateless REST communication with JWT filter gatekeeping</a:t>
+            </a:r>
+            <a:endParaRPr lang="en-US" sz="1500" dirty="0"/>
+          </a:p>
+        </p:txBody>
+      </p:sp>
+      <p:sp>
+        <p:nvSpPr>
+          <p:cNvPr id="5" name="Shape 3"/>
+          <p:cNvSpPr/>
+          <p:nvPr/>
+        </p:nvSpPr>
+        <p:spPr>
+          <a:xfrm>
+            <a:off x="640080" y="1783080"/>
+            <a:ext cx="7406640" cy="4480560"/>
+          </a:xfrm>
+          <a:prstGeom prst="roundRect">
+            <a:avLst>
+              <a:gd name="adj" fmla="val 2449"/>
+            </a:avLst>
+          </a:prstGeom>
+          <a:solidFill>
+            <a:srgbClr val="FFFFFF"/>
+          </a:solidFill>
+          <a:ln w="12700">
+            <a:solidFill>
+              <a:srgbClr val="FFFFFF"/>
+            </a:solidFill>
+            <a:prstDash val="solid"/>
+          </a:ln>
+          <a:effectLst>
+            <a:outerShdw blurRad="101600" dist="25400" dir="5400000" algn="bl" rotWithShape="0">
+              <a:srgbClr val="000000">
+                <a:alpha val="12000"/>
+              </a:srgbClr>
+            </a:outerShdw>
+          </a:effectLst>
+        </p:spPr>
       </p:sp>
       <p:pic>
         <p:nvPicPr>
-          <p:cNvPr id="3" name="Image 0" descr="image4_new.png"/>
+          <p:cNvPr id="6" name="Image 0" descr="image4_new.png"/>
           <p:cNvPicPr>
             <a:picLocks noChangeAspect="1"/>
           </p:cNvPicPr>
@@ -2998,14 +3976,528 @@
         </p:blipFill>
         <p:spPr>
           <a:xfrm>
-            <a:off x="914400" y="1051560"/>
-            <a:ext cx="7315200" cy="3657600"/>
+            <a:off x="777240" y="2148840"/>
+            <a:ext cx="7132320" cy="3566160"/>
           </a:xfrm>
           <a:prstGeom prst="rect">
             <a:avLst/>
           </a:prstGeom>
         </p:spPr>
       </p:pic>
+      <p:sp>
+        <p:nvSpPr>
+          <p:cNvPr id="7" name="Shape 4"/>
+          <p:cNvSpPr/>
+          <p:nvPr/>
+        </p:nvSpPr>
+        <p:spPr>
+          <a:xfrm>
+            <a:off x="8275320" y="1783080"/>
+            <a:ext cx="3291840" cy="4480560"/>
+          </a:xfrm>
+          <a:prstGeom prst="roundRect">
+            <a:avLst>
+              <a:gd name="adj" fmla="val 3333"/>
+            </a:avLst>
+          </a:prstGeom>
+          <a:solidFill>
+            <a:srgbClr val="FFFFFF"/>
+          </a:solidFill>
+          <a:ln w="12700">
+            <a:solidFill>
+              <a:srgbClr val="FFFFFF"/>
+            </a:solidFill>
+            <a:prstDash val="solid"/>
+          </a:ln>
+          <a:effectLst>
+            <a:outerShdw blurRad="101600" dist="25400" dir="5400000" algn="bl" rotWithShape="0">
+              <a:srgbClr val="000000">
+                <a:alpha val="12000"/>
+              </a:srgbClr>
+            </a:outerShdw>
+          </a:effectLst>
+        </p:spPr>
+      </p:sp>
+      <p:sp>
+        <p:nvSpPr>
+          <p:cNvPr id="8" name="Shape 5"/>
+          <p:cNvSpPr/>
+          <p:nvPr/>
+        </p:nvSpPr>
+        <p:spPr>
+          <a:xfrm>
+            <a:off x="8458200" y="1965960"/>
+            <a:ext cx="457200" cy="457200"/>
+          </a:xfrm>
+          <a:prstGeom prst="ellipse">
+            <a:avLst/>
+          </a:prstGeom>
+          <a:solidFill>
+            <a:srgbClr val="0F8B8D"/>
+          </a:solidFill>
+          <a:ln w="12700">
+            <a:solidFill>
+              <a:srgbClr val="0F8B8D"/>
+            </a:solidFill>
+            <a:prstDash val="solid"/>
+          </a:ln>
+        </p:spPr>
+      </p:sp>
+      <p:sp>
+        <p:nvSpPr>
+          <p:cNvPr id="9" name="Text 6"/>
+          <p:cNvSpPr txBox="1"/>
+          <p:nvPr/>
+        </p:nvSpPr>
+        <p:spPr>
+          <a:xfrm>
+            <a:off x="8458200" y="1965960"/>
+            <a:ext cx="457200" cy="457200"/>
+          </a:xfrm>
+          <a:prstGeom prst="rect">
+            <a:avLst/>
+          </a:prstGeom>
+          <a:noFill/>
+          <a:ln/>
+        </p:spPr>
+        <p:txBody>
+          <a:bodyPr wrap="square" lIns="0" tIns="0" rIns="0" bIns="0" rtlCol="0" anchor="ctr"/>
+          <a:lstStyle/>
+          <a:p>
+            <a:pPr marL="0" indent="0" algn="ctr">
+              <a:buNone/>
+            </a:pPr>
+            <a:r>
+              <a:rPr lang="en-US" sz="1600" b="1" dirty="0">
+                <a:solidFill>
+                  <a:srgbClr val="FFFFFF"/>
+                </a:solidFill>
+                <a:latin typeface="Calibri" pitchFamily="34" charset="0"/>
+                <a:ea typeface="Calibri" pitchFamily="34" charset="-122"/>
+                <a:cs typeface="Calibri" pitchFamily="34" charset="-120"/>
+              </a:rPr>
+              <a:t>1</a:t>
+            </a:r>
+            <a:endParaRPr lang="en-US" sz="1600" dirty="0"/>
+          </a:p>
+        </p:txBody>
+      </p:sp>
+      <p:sp>
+        <p:nvSpPr>
+          <p:cNvPr id="10" name="Text 7"/>
+          <p:cNvSpPr txBox="1"/>
+          <p:nvPr/>
+        </p:nvSpPr>
+        <p:spPr>
+          <a:xfrm>
+            <a:off x="9052560" y="1920240"/>
+            <a:ext cx="2377440" cy="960120"/>
+          </a:xfrm>
+          <a:prstGeom prst="rect">
+            <a:avLst/>
+          </a:prstGeom>
+          <a:noFill/>
+          <a:ln/>
+        </p:spPr>
+        <p:txBody>
+          <a:bodyPr wrap="square" lIns="0" tIns="0" rIns="0" bIns="0" rtlCol="0" anchor="t"/>
+          <a:lstStyle/>
+          <a:p>
+            <a:pPr marL="0" indent="0">
+              <a:buNone/>
+            </a:pPr>
+            <a:r>
+              <a:rPr lang="en-US" sz="1400" b="1" dirty="0">
+                <a:solidFill>
+                  <a:srgbClr val="10263B"/>
+                </a:solidFill>
+                <a:latin typeface="Calibri" pitchFamily="34" charset="0"/>
+                <a:ea typeface="Calibri" pitchFamily="34" charset="-122"/>
+                <a:cs typeface="Calibri" pitchFamily="34" charset="-120"/>
+              </a:rPr>
+              <a:t>Presentation</a:t>
+            </a:r>
+            <a:endParaRPr lang="en-US" sz="1400" dirty="0"/>
+          </a:p>
+          <a:p>
+            <a:pPr marL="0" indent="0">
+              <a:buNone/>
+            </a:pPr>
+            <a:r>
+              <a:rPr lang="en-US" sz="1200" dirty="0">
+                <a:solidFill>
+                  <a:srgbClr val="1F2933"/>
+                </a:solidFill>
+                <a:latin typeface="Calibri" pitchFamily="34" charset="0"/>
+                <a:ea typeface="Calibri" pitchFamily="34" charset="-122"/>
+                <a:cs typeface="Calibri" pitchFamily="34" charset="-120"/>
+              </a:rPr>
+              <a:t>Angular sends JSON requests with an Authorization: Bearer header.</a:t>
+            </a:r>
+            <a:endParaRPr lang="en-US" sz="1400" dirty="0"/>
+          </a:p>
+        </p:txBody>
+      </p:sp>
+      <p:sp>
+        <p:nvSpPr>
+          <p:cNvPr id="11" name="Shape 8"/>
+          <p:cNvSpPr/>
+          <p:nvPr/>
+        </p:nvSpPr>
+        <p:spPr>
+          <a:xfrm>
+            <a:off x="8458200" y="3017520"/>
+            <a:ext cx="457200" cy="457200"/>
+          </a:xfrm>
+          <a:prstGeom prst="ellipse">
+            <a:avLst/>
+          </a:prstGeom>
+          <a:solidFill>
+            <a:srgbClr val="0F8B8D"/>
+          </a:solidFill>
+          <a:ln w="12700">
+            <a:solidFill>
+              <a:srgbClr val="0F8B8D"/>
+            </a:solidFill>
+            <a:prstDash val="solid"/>
+          </a:ln>
+        </p:spPr>
+      </p:sp>
+      <p:sp>
+        <p:nvSpPr>
+          <p:cNvPr id="12" name="Text 9"/>
+          <p:cNvSpPr txBox="1"/>
+          <p:nvPr/>
+        </p:nvSpPr>
+        <p:spPr>
+          <a:xfrm>
+            <a:off x="8458200" y="3017520"/>
+            <a:ext cx="457200" cy="457200"/>
+          </a:xfrm>
+          <a:prstGeom prst="rect">
+            <a:avLst/>
+          </a:prstGeom>
+          <a:noFill/>
+          <a:ln/>
+        </p:spPr>
+        <p:txBody>
+          <a:bodyPr wrap="square" lIns="0" tIns="0" rIns="0" bIns="0" rtlCol="0" anchor="ctr"/>
+          <a:lstStyle/>
+          <a:p>
+            <a:pPr marL="0" indent="0" algn="ctr">
+              <a:buNone/>
+            </a:pPr>
+            <a:r>
+              <a:rPr lang="en-US" sz="1600" b="1" dirty="0">
+                <a:solidFill>
+                  <a:srgbClr val="FFFFFF"/>
+                </a:solidFill>
+                <a:latin typeface="Calibri" pitchFamily="34" charset="0"/>
+                <a:ea typeface="Calibri" pitchFamily="34" charset="-122"/>
+                <a:cs typeface="Calibri" pitchFamily="34" charset="-120"/>
+              </a:rPr>
+              <a:t>2</a:t>
+            </a:r>
+            <a:endParaRPr lang="en-US" sz="1600" dirty="0"/>
+          </a:p>
+        </p:txBody>
+      </p:sp>
+      <p:sp>
+        <p:nvSpPr>
+          <p:cNvPr id="13" name="Text 10"/>
+          <p:cNvSpPr txBox="1"/>
+          <p:nvPr/>
+        </p:nvSpPr>
+        <p:spPr>
+          <a:xfrm>
+            <a:off x="9052560" y="2971800"/>
+            <a:ext cx="2377440" cy="960120"/>
+          </a:xfrm>
+          <a:prstGeom prst="rect">
+            <a:avLst/>
+          </a:prstGeom>
+          <a:noFill/>
+          <a:ln/>
+        </p:spPr>
+        <p:txBody>
+          <a:bodyPr wrap="square" lIns="0" tIns="0" rIns="0" bIns="0" rtlCol="0" anchor="t"/>
+          <a:lstStyle/>
+          <a:p>
+            <a:pPr marL="0" indent="0">
+              <a:buNone/>
+            </a:pPr>
+            <a:r>
+              <a:rPr lang="en-US" sz="1400" b="1" dirty="0">
+                <a:solidFill>
+                  <a:srgbClr val="10263B"/>
+                </a:solidFill>
+                <a:latin typeface="Calibri" pitchFamily="34" charset="0"/>
+                <a:ea typeface="Calibri" pitchFamily="34" charset="-122"/>
+                <a:cs typeface="Calibri" pitchFamily="34" charset="-120"/>
+              </a:rPr>
+              <a:t>Security</a:t>
+            </a:r>
+            <a:endParaRPr lang="en-US" sz="1400" dirty="0"/>
+          </a:p>
+          <a:p>
+            <a:pPr marL="0" indent="0">
+              <a:buNone/>
+            </a:pPr>
+            <a:r>
+              <a:rPr lang="en-US" sz="1200" dirty="0">
+                <a:solidFill>
+                  <a:srgbClr val="1F2933"/>
+                </a:solidFill>
+                <a:latin typeface="Calibri" pitchFamily="34" charset="0"/>
+                <a:ea typeface="Calibri" pitchFamily="34" charset="-122"/>
+                <a:cs typeface="Calibri" pitchFamily="34" charset="-120"/>
+              </a:rPr>
+              <a:t>JWT filter validates the token and extracts the role.</a:t>
+            </a:r>
+            <a:endParaRPr lang="en-US" sz="1400" dirty="0"/>
+          </a:p>
+        </p:txBody>
+      </p:sp>
+      <p:sp>
+        <p:nvSpPr>
+          <p:cNvPr id="14" name="Shape 11"/>
+          <p:cNvSpPr/>
+          <p:nvPr/>
+        </p:nvSpPr>
+        <p:spPr>
+          <a:xfrm>
+            <a:off x="8458200" y="4069080"/>
+            <a:ext cx="457200" cy="457200"/>
+          </a:xfrm>
+          <a:prstGeom prst="ellipse">
+            <a:avLst/>
+          </a:prstGeom>
+          <a:solidFill>
+            <a:srgbClr val="0F8B8D"/>
+          </a:solidFill>
+          <a:ln w="12700">
+            <a:solidFill>
+              <a:srgbClr val="0F8B8D"/>
+            </a:solidFill>
+            <a:prstDash val="solid"/>
+          </a:ln>
+        </p:spPr>
+      </p:sp>
+      <p:sp>
+        <p:nvSpPr>
+          <p:cNvPr id="15" name="Text 12"/>
+          <p:cNvSpPr txBox="1"/>
+          <p:nvPr/>
+        </p:nvSpPr>
+        <p:spPr>
+          <a:xfrm>
+            <a:off x="8458200" y="4069080"/>
+            <a:ext cx="457200" cy="457200"/>
+          </a:xfrm>
+          <a:prstGeom prst="rect">
+            <a:avLst/>
+          </a:prstGeom>
+          <a:noFill/>
+          <a:ln/>
+        </p:spPr>
+        <p:txBody>
+          <a:bodyPr wrap="square" lIns="0" tIns="0" rIns="0" bIns="0" rtlCol="0" anchor="ctr"/>
+          <a:lstStyle/>
+          <a:p>
+            <a:pPr marL="0" indent="0" algn="ctr">
+              <a:buNone/>
+            </a:pPr>
+            <a:r>
+              <a:rPr lang="en-US" sz="1600" b="1" dirty="0">
+                <a:solidFill>
+                  <a:srgbClr val="FFFFFF"/>
+                </a:solidFill>
+                <a:latin typeface="Calibri" pitchFamily="34" charset="0"/>
+                <a:ea typeface="Calibri" pitchFamily="34" charset="-122"/>
+                <a:cs typeface="Calibri" pitchFamily="34" charset="-120"/>
+              </a:rPr>
+              <a:t>3</a:t>
+            </a:r>
+            <a:endParaRPr lang="en-US" sz="1600" dirty="0"/>
+          </a:p>
+        </p:txBody>
+      </p:sp>
+      <p:sp>
+        <p:nvSpPr>
+          <p:cNvPr id="16" name="Text 13"/>
+          <p:cNvSpPr txBox="1"/>
+          <p:nvPr/>
+        </p:nvSpPr>
+        <p:spPr>
+          <a:xfrm>
+            <a:off x="9052560" y="4023360"/>
+            <a:ext cx="2377440" cy="960120"/>
+          </a:xfrm>
+          <a:prstGeom prst="rect">
+            <a:avLst/>
+          </a:prstGeom>
+          <a:noFill/>
+          <a:ln/>
+        </p:spPr>
+        <p:txBody>
+          <a:bodyPr wrap="square" lIns="0" tIns="0" rIns="0" bIns="0" rtlCol="0" anchor="t"/>
+          <a:lstStyle/>
+          <a:p>
+            <a:pPr marL="0" indent="0">
+              <a:buNone/>
+            </a:pPr>
+            <a:r>
+              <a:rPr lang="en-US" sz="1400" b="1" dirty="0">
+                <a:solidFill>
+                  <a:srgbClr val="10263B"/>
+                </a:solidFill>
+                <a:latin typeface="Calibri" pitchFamily="34" charset="0"/>
+                <a:ea typeface="Calibri" pitchFamily="34" charset="-122"/>
+                <a:cs typeface="Calibri" pitchFamily="34" charset="-120"/>
+              </a:rPr>
+              <a:t>Business logic</a:t>
+            </a:r>
+            <a:endParaRPr lang="en-US" sz="1400" dirty="0"/>
+          </a:p>
+          <a:p>
+            <a:pPr marL="0" indent="0">
+              <a:buNone/>
+            </a:pPr>
+            <a:r>
+              <a:rPr lang="en-US" sz="1200" dirty="0">
+                <a:solidFill>
+                  <a:srgbClr val="1F2933"/>
+                </a:solidFill>
+                <a:latin typeface="Calibri" pitchFamily="34" charset="0"/>
+                <a:ea typeface="Calibri" pitchFamily="34" charset="-122"/>
+                <a:cs typeface="Calibri" pitchFamily="34" charset="-120"/>
+              </a:rPr>
+              <a:t>Services check stock and manage order lifecycles.</a:t>
+            </a:r>
+            <a:endParaRPr lang="en-US" sz="1400" dirty="0"/>
+          </a:p>
+        </p:txBody>
+      </p:sp>
+      <p:sp>
+        <p:nvSpPr>
+          <p:cNvPr id="17" name="Shape 14"/>
+          <p:cNvSpPr/>
+          <p:nvPr/>
+        </p:nvSpPr>
+        <p:spPr>
+          <a:xfrm>
+            <a:off x="8458200" y="5120640"/>
+            <a:ext cx="457200" cy="457200"/>
+          </a:xfrm>
+          <a:prstGeom prst="ellipse">
+            <a:avLst/>
+          </a:prstGeom>
+          <a:solidFill>
+            <a:srgbClr val="0F8B8D"/>
+          </a:solidFill>
+          <a:ln w="12700">
+            <a:solidFill>
+              <a:srgbClr val="0F8B8D"/>
+            </a:solidFill>
+            <a:prstDash val="solid"/>
+          </a:ln>
+        </p:spPr>
+      </p:sp>
+      <p:sp>
+        <p:nvSpPr>
+          <p:cNvPr id="18" name="Text 15"/>
+          <p:cNvSpPr txBox="1"/>
+          <p:nvPr/>
+        </p:nvSpPr>
+        <p:spPr>
+          <a:xfrm>
+            <a:off x="8458200" y="5120640"/>
+            <a:ext cx="457200" cy="457200"/>
+          </a:xfrm>
+          <a:prstGeom prst="rect">
+            <a:avLst/>
+          </a:prstGeom>
+          <a:noFill/>
+          <a:ln/>
+        </p:spPr>
+        <p:txBody>
+          <a:bodyPr wrap="square" lIns="0" tIns="0" rIns="0" bIns="0" rtlCol="0" anchor="ctr"/>
+          <a:lstStyle/>
+          <a:p>
+            <a:pPr marL="0" indent="0" algn="ctr">
+              <a:buNone/>
+            </a:pPr>
+            <a:r>
+              <a:rPr lang="en-US" sz="1600" b="1" dirty="0">
+                <a:solidFill>
+                  <a:srgbClr val="FFFFFF"/>
+                </a:solidFill>
+                <a:latin typeface="Calibri" pitchFamily="34" charset="0"/>
+                <a:ea typeface="Calibri" pitchFamily="34" charset="-122"/>
+                <a:cs typeface="Calibri" pitchFamily="34" charset="-120"/>
+              </a:rPr>
+              <a:t>4</a:t>
+            </a:r>
+            <a:endParaRPr lang="en-US" sz="1600" dirty="0"/>
+          </a:p>
+        </p:txBody>
+      </p:sp>
+      <p:sp>
+        <p:nvSpPr>
+          <p:cNvPr id="19" name="Text 16"/>
+          <p:cNvSpPr txBox="1"/>
+          <p:nvPr/>
+        </p:nvSpPr>
+        <p:spPr>
+          <a:xfrm>
+            <a:off x="9052560" y="5074920"/>
+            <a:ext cx="2377440" cy="960120"/>
+          </a:xfrm>
+          <a:prstGeom prst="rect">
+            <a:avLst/>
+          </a:prstGeom>
+          <a:noFill/>
+          <a:ln/>
+        </p:spPr>
+        <p:txBody>
+          <a:bodyPr wrap="square" lIns="0" tIns="0" rIns="0" bIns="0" rtlCol="0" anchor="t"/>
+          <a:lstStyle/>
+          <a:p>
+            <a:pPr marL="0" indent="0">
+              <a:buNone/>
+            </a:pPr>
+            <a:r>
+              <a:rPr lang="en-US" sz="1400" b="1" dirty="0">
+                <a:solidFill>
+                  <a:srgbClr val="10263B"/>
+                </a:solidFill>
+                <a:latin typeface="Calibri" pitchFamily="34" charset="0"/>
+                <a:ea typeface="Calibri" pitchFamily="34" charset="-122"/>
+                <a:cs typeface="Calibri" pitchFamily="34" charset="-120"/>
+              </a:rPr>
+              <a:t>Persistence</a:t>
+            </a:r>
+            <a:endParaRPr lang="en-US" sz="1400" dirty="0"/>
+          </a:p>
+          <a:p>
+            <a:pPr marL="0" indent="0">
+              <a:buNone/>
+            </a:pPr>
+            <a:r>
+              <a:rPr lang="en-US" sz="1200" dirty="0">
+                <a:solidFill>
+                  <a:srgbClr val="1F2933"/>
+                </a:solidFill>
+                <a:latin typeface="Calibri" pitchFamily="34" charset="0"/>
+                <a:ea typeface="Calibri" pitchFamily="34" charset="-122"/>
+                <a:cs typeface="Calibri" pitchFamily="34" charset="-120"/>
+              </a:rPr>
+              <a:t>Spring Data JPA over JDBC to MySQL.</a:t>
+            </a:r>
+            <a:endParaRPr lang="en-US" sz="1400" dirty="0"/>
+          </a:p>
+        </p:txBody>
+      </p:sp>
     </p:spTree>
   </p:cSld>
   <p:clrMapOvr>
@@ -3020,7 +4512,7 @@
     <p:bg>
       <p:bgPr>
         <a:solidFill>
-          <a:srgbClr val="FFFFFF"/>
+          <a:srgbClr val="F6F8FA"/>
         </a:solidFill>
         <a:effectLst/>
       </p:bgPr>
@@ -3047,8 +4539,8 @@
         </p:nvSpPr>
         <p:spPr>
           <a:xfrm>
-            <a:off x="548640" y="320040"/>
-            <a:ext cx="8046720" cy="640080"/>
+            <a:off x="640080" y="365760"/>
+            <a:ext cx="8229600" cy="274320"/>
           </a:xfrm>
           <a:prstGeom prst="rect">
             <a:avLst/>
@@ -3064,30 +4556,69 @@
               <a:buNone/>
             </a:pPr>
             <a:r>
-              <a:rPr lang="en-US" sz="3200" b="1" dirty="0">
-                <a:solidFill>
-                  <a:srgbClr val="12324A"/>
+              <a:rPr lang="en-US" sz="1200" b="1" kern="0" spc="200" dirty="0">
+                <a:solidFill>
+                  <a:srgbClr val="0F8B8D"/>
+                </a:solidFill>
+                <a:latin typeface="Calibri" pitchFamily="34" charset="0"/>
+                <a:ea typeface="Calibri" pitchFamily="34" charset="-122"/>
+                <a:cs typeface="Calibri" pitchFamily="34" charset="-120"/>
+              </a:rPr>
+              <a:t>04 | MODULES &amp; RBAC</a:t>
+            </a:r>
+            <a:endParaRPr lang="en-US" sz="1200" dirty="0"/>
+          </a:p>
+        </p:txBody>
+      </p:sp>
+      <p:sp>
+        <p:nvSpPr>
+          <p:cNvPr id="3" name="Text 1"/>
+          <p:cNvSpPr txBox="1"/>
+          <p:nvPr/>
+        </p:nvSpPr>
+        <p:spPr>
+          <a:xfrm>
+            <a:off x="640080" y="658368"/>
+            <a:ext cx="10881360" cy="594360"/>
+          </a:xfrm>
+          <a:prstGeom prst="rect">
+            <a:avLst/>
+          </a:prstGeom>
+          <a:noFill/>
+          <a:ln/>
+        </p:spPr>
+        <p:txBody>
+          <a:bodyPr wrap="square" lIns="0" tIns="0" rIns="0" bIns="0" rtlCol="0" anchor="ctr"/>
+          <a:lstStyle/>
+          <a:p>
+            <a:pPr marL="0" indent="0">
+              <a:buNone/>
+            </a:pPr>
+            <a:r>
+              <a:rPr lang="en-US" sz="3000" b="1" dirty="0">
+                <a:solidFill>
+                  <a:srgbClr val="10263B"/>
                 </a:solidFill>
                 <a:latin typeface="Cambria" pitchFamily="34" charset="0"/>
                 <a:ea typeface="Cambria" pitchFamily="34" charset="-122"/>
                 <a:cs typeface="Cambria" pitchFamily="34" charset="-120"/>
               </a:rPr>
-              <a:t>Modules &amp; Role-Based Access</a:t>
-            </a:r>
-            <a:endParaRPr lang="en-US" sz="3200" dirty="0"/>
-          </a:p>
-        </p:txBody>
-      </p:sp>
-      <p:sp>
-        <p:nvSpPr>
-          <p:cNvPr id="3" name="Text 1"/>
+              <a:t>Core Business Modules &amp; Access Control</a:t>
+            </a:r>
+            <a:endParaRPr lang="en-US" sz="3000" dirty="0"/>
+          </a:p>
+        </p:txBody>
+      </p:sp>
+      <p:sp>
+        <p:nvSpPr>
+          <p:cNvPr id="4" name="Text 2"/>
           <p:cNvSpPr txBox="1"/>
           <p:nvPr/>
         </p:nvSpPr>
         <p:spPr>
           <a:xfrm>
-            <a:off x="548640" y="914400"/>
-            <a:ext cx="8046720" cy="365760"/>
+            <a:off x="640080" y="1261872"/>
+            <a:ext cx="10881360" cy="320040"/>
           </a:xfrm>
           <a:prstGeom prst="rect">
             <a:avLst/>
@@ -3111,7 +4642,7 @@
                 <a:ea typeface="Calibri" pitchFamily="34" charset="-122"/>
                 <a:cs typeface="Calibri" pitchFamily="34" charset="-120"/>
               </a:rPr>
-              <a:t>Supplier, Purchase Order and User APIs are ADMIN-only</a:t>
+              <a:t>Eight modules; Supplier, Purchase Order and User APIs are ADMIN-only</a:t>
             </a:r>
             <a:endParaRPr lang="en-US" sz="1500" dirty="0"/>
           </a:p>
@@ -3119,41 +4650,48 @@
       </p:sp>
       <p:sp>
         <p:nvSpPr>
-          <p:cNvPr id="4" name="Shape 2"/>
+          <p:cNvPr id="5" name="Shape 3"/>
           <p:cNvSpPr/>
           <p:nvPr/>
         </p:nvSpPr>
         <p:spPr>
           <a:xfrm>
-            <a:off x="548640" y="1463040"/>
-            <a:ext cx="1280160" cy="914400"/>
+            <a:off x="640080" y="1783080"/>
+            <a:ext cx="2651760" cy="1051560"/>
           </a:xfrm>
           <a:prstGeom prst="roundRect">
             <a:avLst>
-              <a:gd name="adj" fmla="val 10000"/>
+              <a:gd name="adj" fmla="val 10435"/>
             </a:avLst>
           </a:prstGeom>
           <a:solidFill>
-            <a:srgbClr val="E3F2F1"/>
+            <a:srgbClr val="FFFFFF"/>
           </a:solidFill>
           <a:ln w="12700">
             <a:solidFill>
-              <a:srgbClr val="E3F2F1"/>
+              <a:srgbClr val="FFFFFF"/>
             </a:solidFill>
             <a:prstDash val="solid"/>
           </a:ln>
-        </p:spPr>
-      </p:sp>
-      <p:sp>
-        <p:nvSpPr>
-          <p:cNvPr id="5" name="Text 3"/>
+          <a:effectLst>
+            <a:outerShdw blurRad="101600" dist="25400" dir="5400000" algn="bl" rotWithShape="0">
+              <a:srgbClr val="000000">
+                <a:alpha val="12000"/>
+              </a:srgbClr>
+            </a:outerShdw>
+          </a:effectLst>
+        </p:spPr>
+      </p:sp>
+      <p:sp>
+        <p:nvSpPr>
+          <p:cNvPr id="6" name="Text 4"/>
           <p:cNvSpPr txBox="1"/>
           <p:nvPr/>
         </p:nvSpPr>
         <p:spPr>
           <a:xfrm>
-            <a:off x="548640" y="1463040"/>
-            <a:ext cx="1280160" cy="914400"/>
+            <a:off x="822960" y="1874520"/>
+            <a:ext cx="2331720" cy="868680"/>
           </a:xfrm>
           <a:prstGeom prst="rect">
             <a:avLst/>
@@ -3162,16 +4700,16 @@
           <a:ln/>
         </p:spPr>
         <p:txBody>
-          <a:bodyPr wrap="square" lIns="25400" tIns="25400" rIns="25400" bIns="25400" rtlCol="0" anchor="ctr"/>
-          <a:lstStyle/>
-          <a:p>
-            <a:pPr marL="0" indent="0" algn="ctr">
-              <a:buNone/>
-            </a:pPr>
-            <a:r>
-              <a:rPr lang="en-US" sz="1300" b="1" dirty="0">
-                <a:solidFill>
-                  <a:srgbClr val="12324A"/>
+          <a:bodyPr wrap="square" lIns="0" tIns="0" rIns="0" bIns="0" rtlCol="0" anchor="ctr"/>
+          <a:lstStyle/>
+          <a:p>
+            <a:pPr marL="0" indent="0">
+              <a:buNone/>
+            </a:pPr>
+            <a:r>
+              <a:rPr lang="en-US" sz="1500" b="1" dirty="0">
+                <a:solidFill>
+                  <a:srgbClr val="0F8B8D"/>
                 </a:solidFill>
                 <a:latin typeface="Calibri" pitchFamily="34" charset="0"/>
                 <a:ea typeface="Calibri" pitchFamily="34" charset="-122"/>
@@ -3179,64 +4717,71 @@
               </a:rPr>
               <a:t>Products</a:t>
             </a:r>
-            <a:endParaRPr lang="en-US" sz="1300" dirty="0"/>
-          </a:p>
-          <a:p>
-            <a:pPr marL="0" indent="0" algn="ctr">
-              <a:buNone/>
-            </a:pPr>
-            <a:r>
-              <a:rPr lang="en-US" sz="1100" dirty="0">
-                <a:solidFill>
-                  <a:srgbClr val="5B6770"/>
-                </a:solidFill>
-                <a:latin typeface="Calibri" pitchFamily="34" charset="0"/>
-                <a:ea typeface="Calibri" pitchFamily="34" charset="-122"/>
-                <a:cs typeface="Calibri" pitchFamily="34" charset="-120"/>
-              </a:rPr>
-              <a:t>SKU, brand, price</a:t>
-            </a:r>
-            <a:endParaRPr lang="en-US" sz="1300" dirty="0"/>
-          </a:p>
-        </p:txBody>
-      </p:sp>
-      <p:sp>
-        <p:nvSpPr>
-          <p:cNvPr id="6" name="Shape 4"/>
+            <a:endParaRPr lang="en-US" sz="1500" dirty="0"/>
+          </a:p>
+          <a:p>
+            <a:pPr marL="0" indent="0">
+              <a:buNone/>
+            </a:pPr>
+            <a:r>
+              <a:rPr lang="en-US" sz="1200" dirty="0">
+                <a:solidFill>
+                  <a:srgbClr val="1F2933"/>
+                </a:solidFill>
+                <a:latin typeface="Calibri" pitchFamily="34" charset="0"/>
+                <a:ea typeface="Calibri" pitchFamily="34" charset="-122"/>
+                <a:cs typeface="Calibri" pitchFamily="34" charset="-120"/>
+              </a:rPr>
+              <a:t>SKU, brand, category, price</a:t>
+            </a:r>
+            <a:endParaRPr lang="en-US" sz="1500" dirty="0"/>
+          </a:p>
+        </p:txBody>
+      </p:sp>
+      <p:sp>
+        <p:nvSpPr>
+          <p:cNvPr id="7" name="Shape 5"/>
           <p:cNvSpPr/>
           <p:nvPr/>
         </p:nvSpPr>
         <p:spPr>
           <a:xfrm>
-            <a:off x="1920240" y="1463040"/>
-            <a:ext cx="1280160" cy="914400"/>
+            <a:off x="3429000" y="1783080"/>
+            <a:ext cx="2651760" cy="1051560"/>
           </a:xfrm>
           <a:prstGeom prst="roundRect">
             <a:avLst>
-              <a:gd name="adj" fmla="val 10000"/>
+              <a:gd name="adj" fmla="val 10435"/>
             </a:avLst>
           </a:prstGeom>
           <a:solidFill>
-            <a:srgbClr val="E3F2F1"/>
+            <a:srgbClr val="FFFFFF"/>
           </a:solidFill>
           <a:ln w="12700">
             <a:solidFill>
-              <a:srgbClr val="E3F2F1"/>
+              <a:srgbClr val="FFFFFF"/>
             </a:solidFill>
             <a:prstDash val="solid"/>
           </a:ln>
-        </p:spPr>
-      </p:sp>
-      <p:sp>
-        <p:nvSpPr>
-          <p:cNvPr id="7" name="Text 5"/>
+          <a:effectLst>
+            <a:outerShdw blurRad="101600" dist="25400" dir="5400000" algn="bl" rotWithShape="0">
+              <a:srgbClr val="000000">
+                <a:alpha val="12000"/>
+              </a:srgbClr>
+            </a:outerShdw>
+          </a:effectLst>
+        </p:spPr>
+      </p:sp>
+      <p:sp>
+        <p:nvSpPr>
+          <p:cNvPr id="8" name="Text 6"/>
           <p:cNvSpPr txBox="1"/>
           <p:nvPr/>
         </p:nvSpPr>
         <p:spPr>
           <a:xfrm>
-            <a:off x="1920240" y="1463040"/>
-            <a:ext cx="1280160" cy="914400"/>
+            <a:off x="3611880" y="1874520"/>
+            <a:ext cx="2331720" cy="868680"/>
           </a:xfrm>
           <a:prstGeom prst="rect">
             <a:avLst/>
@@ -3245,16 +4790,16 @@
           <a:ln/>
         </p:spPr>
         <p:txBody>
-          <a:bodyPr wrap="square" lIns="25400" tIns="25400" rIns="25400" bIns="25400" rtlCol="0" anchor="ctr"/>
-          <a:lstStyle/>
-          <a:p>
-            <a:pPr marL="0" indent="0" algn="ctr">
-              <a:buNone/>
-            </a:pPr>
-            <a:r>
-              <a:rPr lang="en-US" sz="1300" b="1" dirty="0">
-                <a:solidFill>
-                  <a:srgbClr val="12324A"/>
+          <a:bodyPr wrap="square" lIns="0" tIns="0" rIns="0" bIns="0" rtlCol="0" anchor="ctr"/>
+          <a:lstStyle/>
+          <a:p>
+            <a:pPr marL="0" indent="0">
+              <a:buNone/>
+            </a:pPr>
+            <a:r>
+              <a:rPr lang="en-US" sz="1500" b="1" dirty="0">
+                <a:solidFill>
+                  <a:srgbClr val="0F8B8D"/>
                 </a:solidFill>
                 <a:latin typeface="Calibri" pitchFamily="34" charset="0"/>
                 <a:ea typeface="Calibri" pitchFamily="34" charset="-122"/>
@@ -3262,64 +4807,71 @@
               </a:rPr>
               <a:t>Warehouses</a:t>
             </a:r>
-            <a:endParaRPr lang="en-US" sz="1300" dirty="0"/>
-          </a:p>
-          <a:p>
-            <a:pPr marL="0" indent="0" algn="ctr">
-              <a:buNone/>
-            </a:pPr>
-            <a:r>
-              <a:rPr lang="en-US" sz="1100" dirty="0">
-                <a:solidFill>
-                  <a:srgbClr val="5B6770"/>
-                </a:solidFill>
-                <a:latin typeface="Calibri" pitchFamily="34" charset="0"/>
-                <a:ea typeface="Calibri" pitchFamily="34" charset="-122"/>
-                <a:cs typeface="Calibri" pitchFamily="34" charset="-120"/>
-              </a:rPr>
-              <a:t>code, capacity</a:t>
-            </a:r>
-            <a:endParaRPr lang="en-US" sz="1300" dirty="0"/>
-          </a:p>
-        </p:txBody>
-      </p:sp>
-      <p:sp>
-        <p:nvSpPr>
-          <p:cNvPr id="8" name="Shape 6"/>
+            <a:endParaRPr lang="en-US" sz="1500" dirty="0"/>
+          </a:p>
+          <a:p>
+            <a:pPr marL="0" indent="0">
+              <a:buNone/>
+            </a:pPr>
+            <a:r>
+              <a:rPr lang="en-US" sz="1200" dirty="0">
+                <a:solidFill>
+                  <a:srgbClr val="1F2933"/>
+                </a:solidFill>
+                <a:latin typeface="Calibri" pitchFamily="34" charset="0"/>
+                <a:ea typeface="Calibri" pitchFamily="34" charset="-122"/>
+                <a:cs typeface="Calibri" pitchFamily="34" charset="-120"/>
+              </a:rPr>
+              <a:t>Capacity, contact, status</a:t>
+            </a:r>
+            <a:endParaRPr lang="en-US" sz="1500" dirty="0"/>
+          </a:p>
+        </p:txBody>
+      </p:sp>
+      <p:sp>
+        <p:nvSpPr>
+          <p:cNvPr id="9" name="Shape 7"/>
           <p:cNvSpPr/>
           <p:nvPr/>
         </p:nvSpPr>
         <p:spPr>
           <a:xfrm>
-            <a:off x="3291840" y="1463040"/>
-            <a:ext cx="1280160" cy="914400"/>
+            <a:off x="6217920" y="1783080"/>
+            <a:ext cx="2651760" cy="1051560"/>
           </a:xfrm>
           <a:prstGeom prst="roundRect">
             <a:avLst>
-              <a:gd name="adj" fmla="val 10000"/>
+              <a:gd name="adj" fmla="val 10435"/>
             </a:avLst>
           </a:prstGeom>
           <a:solidFill>
-            <a:srgbClr val="E3F2F1"/>
+            <a:srgbClr val="FFFFFF"/>
           </a:solidFill>
           <a:ln w="12700">
             <a:solidFill>
-              <a:srgbClr val="E3F2F1"/>
+              <a:srgbClr val="FFFFFF"/>
             </a:solidFill>
             <a:prstDash val="solid"/>
           </a:ln>
-        </p:spPr>
-      </p:sp>
-      <p:sp>
-        <p:nvSpPr>
-          <p:cNvPr id="9" name="Text 7"/>
+          <a:effectLst>
+            <a:outerShdw blurRad="101600" dist="25400" dir="5400000" algn="bl" rotWithShape="0">
+              <a:srgbClr val="000000">
+                <a:alpha val="12000"/>
+              </a:srgbClr>
+            </a:outerShdw>
+          </a:effectLst>
+        </p:spPr>
+      </p:sp>
+      <p:sp>
+        <p:nvSpPr>
+          <p:cNvPr id="10" name="Text 8"/>
           <p:cNvSpPr txBox="1"/>
           <p:nvPr/>
         </p:nvSpPr>
         <p:spPr>
           <a:xfrm>
-            <a:off x="3291840" y="1463040"/>
-            <a:ext cx="1280160" cy="914400"/>
+            <a:off x="6400800" y="1874520"/>
+            <a:ext cx="2331720" cy="868680"/>
           </a:xfrm>
           <a:prstGeom prst="rect">
             <a:avLst/>
@@ -3328,16 +4880,16 @@
           <a:ln/>
         </p:spPr>
         <p:txBody>
-          <a:bodyPr wrap="square" lIns="25400" tIns="25400" rIns="25400" bIns="25400" rtlCol="0" anchor="ctr"/>
-          <a:lstStyle/>
-          <a:p>
-            <a:pPr marL="0" indent="0" algn="ctr">
-              <a:buNone/>
-            </a:pPr>
-            <a:r>
-              <a:rPr lang="en-US" sz="1300" b="1" dirty="0">
-                <a:solidFill>
-                  <a:srgbClr val="12324A"/>
+          <a:bodyPr wrap="square" lIns="0" tIns="0" rIns="0" bIns="0" rtlCol="0" anchor="ctr"/>
+          <a:lstStyle/>
+          <a:p>
+            <a:pPr marL="0" indent="0">
+              <a:buNone/>
+            </a:pPr>
+            <a:r>
+              <a:rPr lang="en-US" sz="1500" b="1" dirty="0">
+                <a:solidFill>
+                  <a:srgbClr val="0F8B8D"/>
                 </a:solidFill>
                 <a:latin typeface="Calibri" pitchFamily="34" charset="0"/>
                 <a:ea typeface="Calibri" pitchFamily="34" charset="-122"/>
@@ -3345,64 +4897,71 @@
               </a:rPr>
               <a:t>Inventory</a:t>
             </a:r>
-            <a:endParaRPr lang="en-US" sz="1300" dirty="0"/>
-          </a:p>
-          <a:p>
-            <a:pPr marL="0" indent="0" algn="ctr">
-              <a:buNone/>
-            </a:pPr>
-            <a:r>
-              <a:rPr lang="en-US" sz="1100" dirty="0">
-                <a:solidFill>
-                  <a:srgbClr val="5B6770"/>
-                </a:solidFill>
-                <a:latin typeface="Calibri" pitchFamily="34" charset="0"/>
-                <a:ea typeface="Calibri" pitchFamily="34" charset="-122"/>
-                <a:cs typeface="Calibri" pitchFamily="34" charset="-120"/>
-              </a:rPr>
-              <a:t>qty, reorder level</a:t>
-            </a:r>
-            <a:endParaRPr lang="en-US" sz="1300" dirty="0"/>
-          </a:p>
-        </p:txBody>
-      </p:sp>
-      <p:sp>
-        <p:nvSpPr>
-          <p:cNvPr id="10" name="Shape 8"/>
+            <a:endParaRPr lang="en-US" sz="1500" dirty="0"/>
+          </a:p>
+          <a:p>
+            <a:pPr marL="0" indent="0">
+              <a:buNone/>
+            </a:pPr>
+            <a:r>
+              <a:rPr lang="en-US" sz="1200" dirty="0">
+                <a:solidFill>
+                  <a:srgbClr val="1F2933"/>
+                </a:solidFill>
+                <a:latin typeface="Calibri" pitchFamily="34" charset="0"/>
+                <a:ea typeface="Calibri" pitchFamily="34" charset="-122"/>
+                <a:cs typeface="Calibri" pitchFamily="34" charset="-120"/>
+              </a:rPr>
+              <a:t>On-hand, reserved, reorder level</a:t>
+            </a:r>
+            <a:endParaRPr lang="en-US" sz="1500" dirty="0"/>
+          </a:p>
+        </p:txBody>
+      </p:sp>
+      <p:sp>
+        <p:nvSpPr>
+          <p:cNvPr id="11" name="Shape 9"/>
           <p:cNvSpPr/>
           <p:nvPr/>
         </p:nvSpPr>
         <p:spPr>
           <a:xfrm>
-            <a:off x="4663440" y="1463040"/>
-            <a:ext cx="1280160" cy="914400"/>
+            <a:off x="9006840" y="1783080"/>
+            <a:ext cx="2651760" cy="1051560"/>
           </a:xfrm>
           <a:prstGeom prst="roundRect">
             <a:avLst>
-              <a:gd name="adj" fmla="val 10000"/>
+              <a:gd name="adj" fmla="val 10435"/>
             </a:avLst>
           </a:prstGeom>
           <a:solidFill>
-            <a:srgbClr val="E3F2F1"/>
+            <a:srgbClr val="FFFFFF"/>
           </a:solidFill>
           <a:ln w="12700">
             <a:solidFill>
-              <a:srgbClr val="E3F2F1"/>
+              <a:srgbClr val="FFFFFF"/>
             </a:solidFill>
             <a:prstDash val="solid"/>
           </a:ln>
-        </p:spPr>
-      </p:sp>
-      <p:sp>
-        <p:nvSpPr>
-          <p:cNvPr id="11" name="Text 9"/>
+          <a:effectLst>
+            <a:outerShdw blurRad="101600" dist="25400" dir="5400000" algn="bl" rotWithShape="0">
+              <a:srgbClr val="000000">
+                <a:alpha val="12000"/>
+              </a:srgbClr>
+            </a:outerShdw>
+          </a:effectLst>
+        </p:spPr>
+      </p:sp>
+      <p:sp>
+        <p:nvSpPr>
+          <p:cNvPr id="12" name="Text 10"/>
           <p:cNvSpPr txBox="1"/>
           <p:nvPr/>
         </p:nvSpPr>
         <p:spPr>
           <a:xfrm>
-            <a:off x="4663440" y="1463040"/>
-            <a:ext cx="1280160" cy="914400"/>
+            <a:off x="9189720" y="1874520"/>
+            <a:ext cx="2331720" cy="868680"/>
           </a:xfrm>
           <a:prstGeom prst="rect">
             <a:avLst/>
@@ -3411,16 +4970,16 @@
           <a:ln/>
         </p:spPr>
         <p:txBody>
-          <a:bodyPr wrap="square" lIns="25400" tIns="25400" rIns="25400" bIns="25400" rtlCol="0" anchor="ctr"/>
-          <a:lstStyle/>
-          <a:p>
-            <a:pPr marL="0" indent="0" algn="ctr">
-              <a:buNone/>
-            </a:pPr>
-            <a:r>
-              <a:rPr lang="en-US" sz="1300" b="1" dirty="0">
-                <a:solidFill>
-                  <a:srgbClr val="12324A"/>
+          <a:bodyPr wrap="square" lIns="0" tIns="0" rIns="0" bIns="0" rtlCol="0" anchor="ctr"/>
+          <a:lstStyle/>
+          <a:p>
+            <a:pPr marL="0" indent="0">
+              <a:buNone/>
+            </a:pPr>
+            <a:r>
+              <a:rPr lang="en-US" sz="1500" b="1" dirty="0">
+                <a:solidFill>
+                  <a:srgbClr val="0F8B8D"/>
                 </a:solidFill>
                 <a:latin typeface="Calibri" pitchFamily="34" charset="0"/>
                 <a:ea typeface="Calibri" pitchFamily="34" charset="-122"/>
@@ -3428,64 +4987,71 @@
               </a:rPr>
               <a:t>Customers</a:t>
             </a:r>
-            <a:endParaRPr lang="en-US" sz="1300" dirty="0"/>
-          </a:p>
-          <a:p>
-            <a:pPr marL="0" indent="0" algn="ctr">
-              <a:buNone/>
-            </a:pPr>
-            <a:r>
-              <a:rPr lang="en-US" sz="1100" dirty="0">
-                <a:solidFill>
-                  <a:srgbClr val="5B6770"/>
-                </a:solidFill>
-                <a:latin typeface="Calibri" pitchFamily="34" charset="0"/>
-                <a:ea typeface="Calibri" pitchFamily="34" charset="-122"/>
-                <a:cs typeface="Calibri" pitchFamily="34" charset="-120"/>
-              </a:rPr>
-              <a:t>contact details</a:t>
-            </a:r>
-            <a:endParaRPr lang="en-US" sz="1300" dirty="0"/>
-          </a:p>
-        </p:txBody>
-      </p:sp>
-      <p:sp>
-        <p:nvSpPr>
-          <p:cNvPr id="12" name="Shape 10"/>
+            <a:endParaRPr lang="en-US" sz="1500" dirty="0"/>
+          </a:p>
+          <a:p>
+            <a:pPr marL="0" indent="0">
+              <a:buNone/>
+            </a:pPr>
+            <a:r>
+              <a:rPr lang="en-US" sz="1200" dirty="0">
+                <a:solidFill>
+                  <a:srgbClr val="1F2933"/>
+                </a:solidFill>
+                <a:latin typeface="Calibri" pitchFamily="34" charset="0"/>
+                <a:ea typeface="Calibri" pitchFamily="34" charset="-122"/>
+                <a:cs typeface="Calibri" pitchFamily="34" charset="-120"/>
+              </a:rPr>
+              <a:t>Accounts and contact details</a:t>
+            </a:r>
+            <a:endParaRPr lang="en-US" sz="1500" dirty="0"/>
+          </a:p>
+        </p:txBody>
+      </p:sp>
+      <p:sp>
+        <p:nvSpPr>
+          <p:cNvPr id="13" name="Shape 11"/>
           <p:cNvSpPr/>
           <p:nvPr/>
         </p:nvSpPr>
         <p:spPr>
           <a:xfrm>
-            <a:off x="548640" y="2514600"/>
-            <a:ext cx="1280160" cy="914400"/>
+            <a:off x="640080" y="2971800"/>
+            <a:ext cx="2651760" cy="1051560"/>
           </a:xfrm>
           <a:prstGeom prst="roundRect">
             <a:avLst>
-              <a:gd name="adj" fmla="val 10000"/>
+              <a:gd name="adj" fmla="val 10435"/>
             </a:avLst>
           </a:prstGeom>
           <a:solidFill>
-            <a:srgbClr val="E3F2F1"/>
+            <a:srgbClr val="FFFFFF"/>
           </a:solidFill>
           <a:ln w="12700">
             <a:solidFill>
-              <a:srgbClr val="E3F2F1"/>
+              <a:srgbClr val="FFFFFF"/>
             </a:solidFill>
             <a:prstDash val="solid"/>
           </a:ln>
-        </p:spPr>
-      </p:sp>
-      <p:sp>
-        <p:nvSpPr>
-          <p:cNvPr id="13" name="Text 11"/>
+          <a:effectLst>
+            <a:outerShdw blurRad="101600" dist="25400" dir="5400000" algn="bl" rotWithShape="0">
+              <a:srgbClr val="000000">
+                <a:alpha val="12000"/>
+              </a:srgbClr>
+            </a:outerShdw>
+          </a:effectLst>
+        </p:spPr>
+      </p:sp>
+      <p:sp>
+        <p:nvSpPr>
+          <p:cNvPr id="14" name="Text 12"/>
           <p:cNvSpPr txBox="1"/>
           <p:nvPr/>
         </p:nvSpPr>
         <p:spPr>
           <a:xfrm>
-            <a:off x="548640" y="2514600"/>
-            <a:ext cx="1280160" cy="914400"/>
+            <a:off x="822960" y="3063240"/>
+            <a:ext cx="2331720" cy="868680"/>
           </a:xfrm>
           <a:prstGeom prst="rect">
             <a:avLst/>
@@ -3494,81 +5060,88 @@
           <a:ln/>
         </p:spPr>
         <p:txBody>
-          <a:bodyPr wrap="square" lIns="25400" tIns="25400" rIns="25400" bIns="25400" rtlCol="0" anchor="ctr"/>
-          <a:lstStyle/>
-          <a:p>
-            <a:pPr marL="0" indent="0" algn="ctr">
-              <a:buNone/>
-            </a:pPr>
-            <a:r>
-              <a:rPr lang="en-US" sz="1300" b="1" dirty="0">
-                <a:solidFill>
-                  <a:srgbClr val="12324A"/>
-                </a:solidFill>
-                <a:latin typeface="Calibri" pitchFamily="34" charset="0"/>
-                <a:ea typeface="Calibri" pitchFamily="34" charset="-122"/>
-                <a:cs typeface="Calibri" pitchFamily="34" charset="-120"/>
-              </a:rPr>
-              <a:t>Orders</a:t>
-            </a:r>
-            <a:endParaRPr lang="en-US" sz="1300" dirty="0"/>
-          </a:p>
-          <a:p>
-            <a:pPr marL="0" indent="0" algn="ctr">
-              <a:buNone/>
-            </a:pPr>
-            <a:r>
-              <a:rPr lang="en-US" sz="1100" dirty="0">
-                <a:solidFill>
-                  <a:srgbClr val="5B6770"/>
-                </a:solidFill>
-                <a:latin typeface="Calibri" pitchFamily="34" charset="0"/>
-                <a:ea typeface="Calibri" pitchFamily="34" charset="-122"/>
-                <a:cs typeface="Calibri" pitchFamily="34" charset="-120"/>
-              </a:rPr>
-              <a:t>6 status stages</a:t>
-            </a:r>
-            <a:endParaRPr lang="en-US" sz="1300" dirty="0"/>
-          </a:p>
-        </p:txBody>
-      </p:sp>
-      <p:sp>
-        <p:nvSpPr>
-          <p:cNvPr id="14" name="Shape 12"/>
+          <a:bodyPr wrap="square" lIns="0" tIns="0" rIns="0" bIns="0" rtlCol="0" anchor="ctr"/>
+          <a:lstStyle/>
+          <a:p>
+            <a:pPr marL="0" indent="0">
+              <a:buNone/>
+            </a:pPr>
+            <a:r>
+              <a:rPr lang="en-US" sz="1500" b="1" dirty="0">
+                <a:solidFill>
+                  <a:srgbClr val="0F8B8D"/>
+                </a:solidFill>
+                <a:latin typeface="Calibri" pitchFamily="34" charset="0"/>
+                <a:ea typeface="Calibri" pitchFamily="34" charset="-122"/>
+                <a:cs typeface="Calibri" pitchFamily="34" charset="-120"/>
+              </a:rPr>
+              <a:t>Sales Orders</a:t>
+            </a:r>
+            <a:endParaRPr lang="en-US" sz="1500" dirty="0"/>
+          </a:p>
+          <a:p>
+            <a:pPr marL="0" indent="0">
+              <a:buNone/>
+            </a:pPr>
+            <a:r>
+              <a:rPr lang="en-US" sz="1200" dirty="0">
+                <a:solidFill>
+                  <a:srgbClr val="1F2933"/>
+                </a:solidFill>
+                <a:latin typeface="Calibri" pitchFamily="34" charset="0"/>
+                <a:ea typeface="Calibri" pitchFamily="34" charset="-122"/>
+                <a:cs typeface="Calibri" pitchFamily="34" charset="-120"/>
+              </a:rPr>
+              <a:t>Multi-item orders, 6 stages</a:t>
+            </a:r>
+            <a:endParaRPr lang="en-US" sz="1500" dirty="0"/>
+          </a:p>
+        </p:txBody>
+      </p:sp>
+      <p:sp>
+        <p:nvSpPr>
+          <p:cNvPr id="15" name="Shape 13"/>
           <p:cNvSpPr/>
           <p:nvPr/>
         </p:nvSpPr>
         <p:spPr>
           <a:xfrm>
-            <a:off x="1920240" y="2514600"/>
-            <a:ext cx="1280160" cy="914400"/>
+            <a:off x="3429000" y="2971800"/>
+            <a:ext cx="2651760" cy="1051560"/>
           </a:xfrm>
           <a:prstGeom prst="roundRect">
             <a:avLst>
-              <a:gd name="adj" fmla="val 10000"/>
+              <a:gd name="adj" fmla="val 10435"/>
             </a:avLst>
           </a:prstGeom>
           <a:solidFill>
-            <a:srgbClr val="FCEFD9"/>
+            <a:srgbClr val="FBE9ED"/>
           </a:solidFill>
           <a:ln w="12700">
             <a:solidFill>
-              <a:srgbClr val="FCEFD9"/>
+              <a:srgbClr val="FBE9ED"/>
             </a:solidFill>
             <a:prstDash val="solid"/>
           </a:ln>
-        </p:spPr>
-      </p:sp>
-      <p:sp>
-        <p:nvSpPr>
-          <p:cNvPr id="15" name="Text 13"/>
+          <a:effectLst>
+            <a:outerShdw blurRad="101600" dist="25400" dir="5400000" algn="bl" rotWithShape="0">
+              <a:srgbClr val="000000">
+                <a:alpha val="12000"/>
+              </a:srgbClr>
+            </a:outerShdw>
+          </a:effectLst>
+        </p:spPr>
+      </p:sp>
+      <p:sp>
+        <p:nvSpPr>
+          <p:cNvPr id="16" name="Text 14"/>
           <p:cNvSpPr txBox="1"/>
           <p:nvPr/>
         </p:nvSpPr>
         <p:spPr>
           <a:xfrm>
-            <a:off x="1920240" y="2514600"/>
-            <a:ext cx="1280160" cy="914400"/>
+            <a:off x="3611880" y="3063240"/>
+            <a:ext cx="2331720" cy="868680"/>
           </a:xfrm>
           <a:prstGeom prst="rect">
             <a:avLst/>
@@ -3577,16 +5150,16 @@
           <a:ln/>
         </p:spPr>
         <p:txBody>
-          <a:bodyPr wrap="square" lIns="25400" tIns="25400" rIns="25400" bIns="25400" rtlCol="0" anchor="ctr"/>
-          <a:lstStyle/>
-          <a:p>
-            <a:pPr marL="0" indent="0" algn="ctr">
-              <a:buNone/>
-            </a:pPr>
-            <a:r>
-              <a:rPr lang="en-US" sz="1300" b="1" dirty="0">
-                <a:solidFill>
-                  <a:srgbClr val="12324A"/>
+          <a:bodyPr wrap="square" lIns="0" tIns="0" rIns="0" bIns="0" rtlCol="0" anchor="ctr"/>
+          <a:lstStyle/>
+          <a:p>
+            <a:pPr marL="0" indent="0">
+              <a:buNone/>
+            </a:pPr>
+            <a:r>
+              <a:rPr lang="en-US" sz="1500" b="1" dirty="0">
+                <a:solidFill>
+                  <a:srgbClr val="B83255"/>
                 </a:solidFill>
                 <a:latin typeface="Calibri" pitchFamily="34" charset="0"/>
                 <a:ea typeface="Calibri" pitchFamily="34" charset="-122"/>
@@ -3594,64 +5167,71 @@
               </a:rPr>
               <a:t>Suppliers</a:t>
             </a:r>
-            <a:endParaRPr lang="en-US" sz="1300" dirty="0"/>
-          </a:p>
-          <a:p>
-            <a:pPr marL="0" indent="0" algn="ctr">
-              <a:buNone/>
-            </a:pPr>
-            <a:r>
-              <a:rPr lang="en-US" sz="1100" dirty="0">
-                <a:solidFill>
-                  <a:srgbClr val="5B6770"/>
-                </a:solidFill>
-                <a:latin typeface="Calibri" pitchFamily="34" charset="0"/>
-                <a:ea typeface="Calibri" pitchFamily="34" charset="-122"/>
-                <a:cs typeface="Calibri" pitchFamily="34" charset="-120"/>
-              </a:rPr>
-              <a:t>ADMIN only</a:t>
-            </a:r>
-            <a:endParaRPr lang="en-US" sz="1300" dirty="0"/>
-          </a:p>
-        </p:txBody>
-      </p:sp>
-      <p:sp>
-        <p:nvSpPr>
-          <p:cNvPr id="16" name="Shape 14"/>
+            <a:endParaRPr lang="en-US" sz="1500" dirty="0"/>
+          </a:p>
+          <a:p>
+            <a:pPr marL="0" indent="0">
+              <a:buNone/>
+            </a:pPr>
+            <a:r>
+              <a:rPr lang="en-US" sz="1200" dirty="0">
+                <a:solidFill>
+                  <a:srgbClr val="1F2933"/>
+                </a:solidFill>
+                <a:latin typeface="Calibri" pitchFamily="34" charset="0"/>
+                <a:ea typeface="Calibri" pitchFamily="34" charset="-122"/>
+                <a:cs typeface="Calibri" pitchFamily="34" charset="-120"/>
+              </a:rPr>
+              <a:t>Vendor profiles · ADMIN</a:t>
+            </a:r>
+            <a:endParaRPr lang="en-US" sz="1500" dirty="0"/>
+          </a:p>
+        </p:txBody>
+      </p:sp>
+      <p:sp>
+        <p:nvSpPr>
+          <p:cNvPr id="17" name="Shape 15"/>
           <p:cNvSpPr/>
           <p:nvPr/>
         </p:nvSpPr>
         <p:spPr>
           <a:xfrm>
-            <a:off x="3291840" y="2514600"/>
-            <a:ext cx="1280160" cy="914400"/>
+            <a:off x="6217920" y="2971800"/>
+            <a:ext cx="2651760" cy="1051560"/>
           </a:xfrm>
           <a:prstGeom prst="roundRect">
             <a:avLst>
-              <a:gd name="adj" fmla="val 10000"/>
+              <a:gd name="adj" fmla="val 10435"/>
             </a:avLst>
           </a:prstGeom>
           <a:solidFill>
-            <a:srgbClr val="E3F2F1"/>
+            <a:srgbClr val="FBE9ED"/>
           </a:solidFill>
           <a:ln w="12700">
             <a:solidFill>
-              <a:srgbClr val="E3F2F1"/>
+              <a:srgbClr val="FBE9ED"/>
             </a:solidFill>
             <a:prstDash val="solid"/>
           </a:ln>
-        </p:spPr>
-      </p:sp>
-      <p:sp>
-        <p:nvSpPr>
-          <p:cNvPr id="17" name="Text 15"/>
+          <a:effectLst>
+            <a:outerShdw blurRad="101600" dist="25400" dir="5400000" algn="bl" rotWithShape="0">
+              <a:srgbClr val="000000">
+                <a:alpha val="12000"/>
+              </a:srgbClr>
+            </a:outerShdw>
+          </a:effectLst>
+        </p:spPr>
+      </p:sp>
+      <p:sp>
+        <p:nvSpPr>
+          <p:cNvPr id="18" name="Text 16"/>
           <p:cNvSpPr txBox="1"/>
           <p:nvPr/>
         </p:nvSpPr>
         <p:spPr>
           <a:xfrm>
-            <a:off x="3291840" y="2514600"/>
-            <a:ext cx="1280160" cy="914400"/>
+            <a:off x="6400800" y="3063240"/>
+            <a:ext cx="2331720" cy="868680"/>
           </a:xfrm>
           <a:prstGeom prst="rect">
             <a:avLst/>
@@ -3660,16 +5240,16 @@
           <a:ln/>
         </p:spPr>
         <p:txBody>
-          <a:bodyPr wrap="square" lIns="25400" tIns="25400" rIns="25400" bIns="25400" rtlCol="0" anchor="ctr"/>
-          <a:lstStyle/>
-          <a:p>
-            <a:pPr marL="0" indent="0" algn="ctr">
-              <a:buNone/>
-            </a:pPr>
-            <a:r>
-              <a:rPr lang="en-US" sz="1300" b="1" dirty="0">
-                <a:solidFill>
-                  <a:srgbClr val="12324A"/>
+          <a:bodyPr wrap="square" lIns="0" tIns="0" rIns="0" bIns="0" rtlCol="0" anchor="ctr"/>
+          <a:lstStyle/>
+          <a:p>
+            <a:pPr marL="0" indent="0">
+              <a:buNone/>
+            </a:pPr>
+            <a:r>
+              <a:rPr lang="en-US" sz="1500" b="1" dirty="0">
+                <a:solidFill>
+                  <a:srgbClr val="B83255"/>
                 </a:solidFill>
                 <a:latin typeface="Calibri" pitchFamily="34" charset="0"/>
                 <a:ea typeface="Calibri" pitchFamily="34" charset="-122"/>
@@ -3677,64 +5257,71 @@
               </a:rPr>
               <a:t>Purchase Orders</a:t>
             </a:r>
-            <a:endParaRPr lang="en-US" sz="1300" dirty="0"/>
-          </a:p>
-          <a:p>
-            <a:pPr marL="0" indent="0" algn="ctr">
-              <a:buNone/>
-            </a:pPr>
-            <a:r>
-              <a:rPr lang="en-US" sz="1100" dirty="0">
-                <a:solidFill>
-                  <a:srgbClr val="5B6770"/>
-                </a:solidFill>
-                <a:latin typeface="Calibri" pitchFamily="34" charset="0"/>
-                <a:ea typeface="Calibri" pitchFamily="34" charset="-122"/>
-                <a:cs typeface="Calibri" pitchFamily="34" charset="-120"/>
-              </a:rPr>
-              <a:t>5 status stages</a:t>
-            </a:r>
-            <a:endParaRPr lang="en-US" sz="1300" dirty="0"/>
-          </a:p>
-        </p:txBody>
-      </p:sp>
-      <p:sp>
-        <p:nvSpPr>
-          <p:cNvPr id="18" name="Shape 16"/>
+            <a:endParaRPr lang="en-US" sz="1500" dirty="0"/>
+          </a:p>
+          <a:p>
+            <a:pPr marL="0" indent="0">
+              <a:buNone/>
+            </a:pPr>
+            <a:r>
+              <a:rPr lang="en-US" sz="1200" dirty="0">
+                <a:solidFill>
+                  <a:srgbClr val="1F2933"/>
+                </a:solidFill>
+                <a:latin typeface="Calibri" pitchFamily="34" charset="0"/>
+                <a:ea typeface="Calibri" pitchFamily="34" charset="-122"/>
+                <a:cs typeface="Calibri" pitchFamily="34" charset="-120"/>
+              </a:rPr>
+              <a:t>Approve, receive stock · ADMIN</a:t>
+            </a:r>
+            <a:endParaRPr lang="en-US" sz="1500" dirty="0"/>
+          </a:p>
+        </p:txBody>
+      </p:sp>
+      <p:sp>
+        <p:nvSpPr>
+          <p:cNvPr id="19" name="Shape 17"/>
           <p:cNvSpPr/>
           <p:nvPr/>
         </p:nvSpPr>
         <p:spPr>
           <a:xfrm>
-            <a:off x="4663440" y="2514600"/>
-            <a:ext cx="1280160" cy="914400"/>
+            <a:off x="9006840" y="2971800"/>
+            <a:ext cx="2651760" cy="1051560"/>
           </a:xfrm>
           <a:prstGeom prst="roundRect">
             <a:avLst>
-              <a:gd name="adj" fmla="val 10000"/>
+              <a:gd name="adj" fmla="val 10435"/>
             </a:avLst>
           </a:prstGeom>
           <a:solidFill>
-            <a:srgbClr val="FCEFD9"/>
+            <a:srgbClr val="FBE9ED"/>
           </a:solidFill>
           <a:ln w="12700">
             <a:solidFill>
-              <a:srgbClr val="FCEFD9"/>
+              <a:srgbClr val="FBE9ED"/>
             </a:solidFill>
             <a:prstDash val="solid"/>
           </a:ln>
-        </p:spPr>
-      </p:sp>
-      <p:sp>
-        <p:nvSpPr>
-          <p:cNvPr id="19" name="Text 17"/>
+          <a:effectLst>
+            <a:outerShdw blurRad="101600" dist="25400" dir="5400000" algn="bl" rotWithShape="0">
+              <a:srgbClr val="000000">
+                <a:alpha val="12000"/>
+              </a:srgbClr>
+            </a:outerShdw>
+          </a:effectLst>
+        </p:spPr>
+      </p:sp>
+      <p:sp>
+        <p:nvSpPr>
+          <p:cNvPr id="20" name="Text 18"/>
           <p:cNvSpPr txBox="1"/>
           <p:nvPr/>
         </p:nvSpPr>
         <p:spPr>
           <a:xfrm>
-            <a:off x="4663440" y="2514600"/>
-            <a:ext cx="1280160" cy="914400"/>
+            <a:off x="9189720" y="3063240"/>
+            <a:ext cx="2331720" cy="868680"/>
           </a:xfrm>
           <a:prstGeom prst="rect">
             <a:avLst/>
@@ -3743,16 +5330,16 @@
           <a:ln/>
         </p:spPr>
         <p:txBody>
-          <a:bodyPr wrap="square" lIns="25400" tIns="25400" rIns="25400" bIns="25400" rtlCol="0" anchor="ctr"/>
-          <a:lstStyle/>
-          <a:p>
-            <a:pPr marL="0" indent="0" algn="ctr">
-              <a:buNone/>
-            </a:pPr>
-            <a:r>
-              <a:rPr lang="en-US" sz="1300" b="1" dirty="0">
-                <a:solidFill>
-                  <a:srgbClr val="12324A"/>
+          <a:bodyPr wrap="square" lIns="0" tIns="0" rIns="0" bIns="0" rtlCol="0" anchor="ctr"/>
+          <a:lstStyle/>
+          <a:p>
+            <a:pPr marL="0" indent="0">
+              <a:buNone/>
+            </a:pPr>
+            <a:r>
+              <a:rPr lang="en-US" sz="1500" b="1" dirty="0">
+                <a:solidFill>
+                  <a:srgbClr val="B83255"/>
                 </a:solidFill>
                 <a:latin typeface="Calibri" pitchFamily="34" charset="0"/>
                 <a:ea typeface="Calibri" pitchFamily="34" charset="-122"/>
@@ -3760,53 +5347,14 @@
               </a:rPr>
               <a:t>Users</a:t>
             </a:r>
-            <a:endParaRPr lang="en-US" sz="1300" dirty="0"/>
-          </a:p>
-          <a:p>
-            <a:pPr marL="0" indent="0" algn="ctr">
-              <a:buNone/>
-            </a:pPr>
-            <a:r>
-              <a:rPr lang="en-US" sz="1100" dirty="0">
-                <a:solidFill>
-                  <a:srgbClr val="5B6770"/>
-                </a:solidFill>
-                <a:latin typeface="Calibri" pitchFamily="34" charset="0"/>
-                <a:ea typeface="Calibri" pitchFamily="34" charset="-122"/>
-                <a:cs typeface="Calibri" pitchFamily="34" charset="-120"/>
-              </a:rPr>
-              <a:t>ADMIN only</a:t>
-            </a:r>
-            <a:endParaRPr lang="en-US" sz="1300" dirty="0"/>
-          </a:p>
-        </p:txBody>
-      </p:sp>
-      <p:sp>
-        <p:nvSpPr>
-          <p:cNvPr id="20" name="Text 18"/>
-          <p:cNvSpPr txBox="1"/>
-          <p:nvPr/>
-        </p:nvSpPr>
-        <p:spPr>
-          <a:xfrm>
-            <a:off x="548640" y="3611880"/>
-            <a:ext cx="5303520" cy="548640"/>
-          </a:xfrm>
-          <a:prstGeom prst="rect">
-            <a:avLst/>
-          </a:prstGeom>
-          <a:noFill/>
-          <a:ln/>
-        </p:spPr>
-        <p:txBody>
-          <a:bodyPr wrap="square" lIns="0" tIns="0" rIns="0" bIns="0" rtlCol="0" anchor="t"/>
-          <a:lstStyle/>
-          <a:p>
-            <a:pPr marL="0" indent="0">
-              <a:buNone/>
-            </a:pPr>
-            <a:r>
-              <a:rPr lang="en-US" sz="1300" dirty="0">
+            <a:endParaRPr lang="en-US" sz="1500" dirty="0"/>
+          </a:p>
+          <a:p>
+            <a:pPr marL="0" indent="0">
+              <a:buNone/>
+            </a:pPr>
+            <a:r>
+              <a:rPr lang="en-US" sz="1200" dirty="0">
                 <a:solidFill>
                   <a:srgbClr val="1F2933"/>
                 </a:solidFill>
@@ -3814,9 +5362,9 @@
                 <a:ea typeface="Calibri" pitchFamily="34" charset="-122"/>
                 <a:cs typeface="Calibri" pitchFamily="34" charset="-120"/>
               </a:rPr>
-              <a:t>Authentication: register &amp; login, JWT issued, first registered account becomes ADMIN</a:t>
-            </a:r>
-            <a:endParaRPr lang="en-US" sz="1300" dirty="0"/>
+              <a:t>Accounts and roles · ADMIN</a:t>
+            </a:r>
+            <a:endParaRPr lang="en-US" sz="1500" dirty="0"/>
           </a:p>
         </p:txBody>
       </p:sp>
@@ -3828,23 +5376,30 @@
         </p:nvSpPr>
         <p:spPr>
           <a:xfrm>
-            <a:off x="6126480" y="1463040"/>
-            <a:ext cx="2468880" cy="3017520"/>
+            <a:off x="640080" y="4251960"/>
+            <a:ext cx="5486400" cy="2011680"/>
           </a:xfrm>
           <a:prstGeom prst="roundRect">
             <a:avLst>
-              <a:gd name="adj" fmla="val 4444"/>
+              <a:gd name="adj" fmla="val 5455"/>
             </a:avLst>
           </a:prstGeom>
           <a:solidFill>
-            <a:srgbClr val="12324A"/>
+            <a:srgbClr val="10263B"/>
           </a:solidFill>
           <a:ln w="12700">
             <a:solidFill>
-              <a:srgbClr val="12324A"/>
+              <a:srgbClr val="10263B"/>
             </a:solidFill>
             <a:prstDash val="solid"/>
           </a:ln>
+          <a:effectLst>
+            <a:outerShdw blurRad="101600" dist="25400" dir="5400000" algn="bl" rotWithShape="0">
+              <a:srgbClr val="000000">
+                <a:alpha val="12000"/>
+              </a:srgbClr>
+            </a:outerShdw>
+          </a:effectLst>
         </p:spPr>
       </p:sp>
       <p:sp>
@@ -3855,8 +5410,8 @@
         </p:nvSpPr>
         <p:spPr>
           <a:xfrm>
-            <a:off x="6309360" y="1600200"/>
-            <a:ext cx="2103120" cy="2743200"/>
+            <a:off x="914400" y="4389120"/>
+            <a:ext cx="4937760" cy="1783080"/>
           </a:xfrm>
           <a:prstGeom prst="rect">
             <a:avLst/>
@@ -3870,12 +5425,12 @@
           <a:p>
             <a:pPr marL="0" indent="0">
               <a:spcAft>
-                <a:spcPts val="400"/>
+                <a:spcPts val="500"/>
               </a:spcAft>
               <a:buNone/>
             </a:pPr>
             <a:r>
-              <a:rPr lang="en-US" sz="1800" b="1" dirty="0">
+              <a:rPr lang="en-US" sz="1700" b="1" dirty="0">
                 <a:solidFill>
                   <a:srgbClr val="F2A541"/>
                 </a:solidFill>
@@ -3885,17 +5440,18 @@
               </a:rPr>
               <a:t>ADMIN</a:t>
             </a:r>
-            <a:endParaRPr lang="en-US" sz="1800" dirty="0"/>
-          </a:p>
-          <a:p>
-            <a:pPr marL="0" indent="0">
+            <a:endParaRPr lang="en-US" sz="1350" dirty="0"/>
+          </a:p>
+          <a:p>
+            <a:pPr marL="342900" indent="-342900">
               <a:spcAft>
-                <a:spcPts val="400"/>
+                <a:spcPts val="500"/>
               </a:spcAft>
-              <a:buNone/>
-            </a:pPr>
-            <a:r>
-              <a:rPr lang="en-US" sz="1300" dirty="0">
+              <a:buSzPct val="100000"/>
+              <a:buChar char="•"/>
+            </a:pPr>
+            <a:r>
+              <a:rPr lang="en-US" sz="1350" dirty="0">
                 <a:solidFill>
                   <a:srgbClr val="FFFFFF"/>
                 </a:solidFill>
@@ -3903,41 +5459,119 @@
                 <a:ea typeface="Calibri" pitchFamily="34" charset="-122"/>
                 <a:cs typeface="Calibri" pitchFamily="34" charset="-120"/>
               </a:rPr>
-              <a:t>Full system access, user management, admin dashboard</a:t>
-            </a:r>
-            <a:endParaRPr lang="en-US" sz="1800" dirty="0"/>
-          </a:p>
-          <a:p>
-            <a:pPr marL="0" indent="0">
+              <a:t>Full access to all modules</a:t>
+            </a:r>
+            <a:endParaRPr lang="en-US" sz="1350" dirty="0"/>
+          </a:p>
+          <a:p>
+            <a:pPr marL="342900" indent="-342900">
               <a:spcAft>
-                <a:spcPts val="400"/>
+                <a:spcPts val="500"/>
               </a:spcAft>
-              <a:buNone/>
-            </a:pPr>
-            <a:r>
-              <a:rPr lang="en-US" sz="800" dirty="0">
-                <a:solidFill>
-                  <a:srgbClr val="000000"/>
-                </a:solidFill>
-                <a:latin typeface="Calibri" pitchFamily="34" charset="0"/>
-                <a:ea typeface="Calibri" pitchFamily="34" charset="-122"/>
-                <a:cs typeface="Calibri" pitchFamily="34" charset="-120"/>
-              </a:rPr>
-              <a:t> </a:t>
-            </a:r>
-            <a:endParaRPr lang="en-US" sz="1800" dirty="0"/>
-          </a:p>
-          <a:p>
-            <a:pPr marL="0" indent="0">
+              <a:buSzPct val="100000"/>
+              <a:buChar char="•"/>
+            </a:pPr>
+            <a:r>
+              <a:rPr lang="en-US" sz="1350" dirty="0">
+                <a:solidFill>
+                  <a:srgbClr val="FFFFFF"/>
+                </a:solidFill>
+                <a:latin typeface="Calibri" pitchFamily="34" charset="0"/>
+                <a:ea typeface="Calibri" pitchFamily="34" charset="-122"/>
+                <a:cs typeface="Calibri" pitchFamily="34" charset="-120"/>
+              </a:rPr>
+              <a:t>Approves purchase orders; receiving stock raises inventory</a:t>
+            </a:r>
+            <a:endParaRPr lang="en-US" sz="1350" dirty="0"/>
+          </a:p>
+          <a:p>
+            <a:pPr marL="342900" indent="-342900">
               <a:spcAft>
-                <a:spcPts val="400"/>
+                <a:spcPts val="500"/>
               </a:spcAft>
-              <a:buNone/>
-            </a:pPr>
-            <a:r>
-              <a:rPr lang="en-US" sz="1800" b="1" dirty="0">
-                <a:solidFill>
-                  <a:srgbClr val="7FD6D0"/>
+              <a:buSzPct val="100000"/>
+              <a:buChar char="•"/>
+            </a:pPr>
+            <a:r>
+              <a:rPr lang="en-US" sz="1350" dirty="0">
+                <a:solidFill>
+                  <a:srgbClr val="FFFFFF"/>
+                </a:solidFill>
+                <a:latin typeface="Calibri" pitchFamily="34" charset="0"/>
+                <a:ea typeface="Calibri" pitchFamily="34" charset="-122"/>
+                <a:cs typeface="Calibri" pitchFamily="34" charset="-120"/>
+              </a:rPr>
+              <a:t>Manages suppliers, users and roles</a:t>
+            </a:r>
+            <a:endParaRPr lang="en-US" sz="1350" dirty="0"/>
+          </a:p>
+        </p:txBody>
+      </p:sp>
+      <p:sp>
+        <p:nvSpPr>
+          <p:cNvPr id="23" name="Shape 21"/>
+          <p:cNvSpPr/>
+          <p:nvPr/>
+        </p:nvSpPr>
+        <p:spPr>
+          <a:xfrm>
+            <a:off x="6355080" y="4251960"/>
+            <a:ext cx="5212080" cy="2011680"/>
+          </a:xfrm>
+          <a:prstGeom prst="roundRect">
+            <a:avLst>
+              <a:gd name="adj" fmla="val 5455"/>
+            </a:avLst>
+          </a:prstGeom>
+          <a:solidFill>
+            <a:srgbClr val="FFFFFF"/>
+          </a:solidFill>
+          <a:ln w="12700">
+            <a:solidFill>
+              <a:srgbClr val="FFFFFF"/>
+            </a:solidFill>
+            <a:prstDash val="solid"/>
+          </a:ln>
+          <a:effectLst>
+            <a:outerShdw blurRad="101600" dist="25400" dir="5400000" algn="bl" rotWithShape="0">
+              <a:srgbClr val="000000">
+                <a:alpha val="12000"/>
+              </a:srgbClr>
+            </a:outerShdw>
+          </a:effectLst>
+        </p:spPr>
+      </p:sp>
+      <p:sp>
+        <p:nvSpPr>
+          <p:cNvPr id="24" name="Text 22"/>
+          <p:cNvSpPr txBox="1"/>
+          <p:nvPr/>
+        </p:nvSpPr>
+        <p:spPr>
+          <a:xfrm>
+            <a:off x="6629400" y="4389120"/>
+            <a:ext cx="4663440" cy="1783080"/>
+          </a:xfrm>
+          <a:prstGeom prst="rect">
+            <a:avLst/>
+          </a:prstGeom>
+          <a:noFill/>
+          <a:ln/>
+        </p:spPr>
+        <p:txBody>
+          <a:bodyPr wrap="square" lIns="0" tIns="0" rIns="0" bIns="0" rtlCol="0" anchor="t"/>
+          <a:lstStyle/>
+          <a:p>
+            <a:pPr marL="0" indent="0">
+              <a:spcAft>
+                <a:spcPts val="500"/>
+              </a:spcAft>
+              <a:buNone/>
+            </a:pPr>
+            <a:r>
+              <a:rPr lang="en-US" sz="1700" b="1" dirty="0">
+                <a:solidFill>
+                  <a:srgbClr val="0F8B8D"/>
                 </a:solidFill>
                 <a:latin typeface="Calibri" pitchFamily="34" charset="0"/>
                 <a:ea typeface="Calibri" pitchFamily="34" charset="-122"/>
@@ -3945,27 +5579,70 @@
               </a:rPr>
               <a:t>USER</a:t>
             </a:r>
-            <a:endParaRPr lang="en-US" sz="1800" dirty="0"/>
-          </a:p>
-          <a:p>
-            <a:pPr marL="0" indent="0">
+            <a:endParaRPr lang="en-US" sz="1350" dirty="0"/>
+          </a:p>
+          <a:p>
+            <a:pPr marL="342900" indent="-342900">
               <a:spcAft>
-                <a:spcPts val="400"/>
+                <a:spcPts val="500"/>
               </a:spcAft>
-              <a:buNone/>
-            </a:pPr>
-            <a:r>
-              <a:rPr lang="en-US" sz="1300" dirty="0">
-                <a:solidFill>
-                  <a:srgbClr val="FFFFFF"/>
-                </a:solidFill>
-                <a:latin typeface="Calibri" pitchFamily="34" charset="0"/>
-                <a:ea typeface="Calibri" pitchFamily="34" charset="-122"/>
-                <a:cs typeface="Calibri" pitchFamily="34" charset="-120"/>
-              </a:rPr>
-              <a:t>Permitted operations: view stock, manage customers, create orders, user dashboard</a:t>
-            </a:r>
-            <a:endParaRPr lang="en-US" sz="1800" dirty="0"/>
+              <a:buSzPct val="100000"/>
+              <a:buChar char="•"/>
+            </a:pPr>
+            <a:r>
+              <a:rPr lang="en-US" sz="1350" dirty="0">
+                <a:solidFill>
+                  <a:srgbClr val="1F2933"/>
+                </a:solidFill>
+                <a:latin typeface="Calibri" pitchFamily="34" charset="0"/>
+                <a:ea typeface="Calibri" pitchFamily="34" charset="-122"/>
+                <a:cs typeface="Calibri" pitchFamily="34" charset="-120"/>
+              </a:rPr>
+              <a:t>Sales order entry and customer lookup</a:t>
+            </a:r>
+            <a:endParaRPr lang="en-US" sz="1350" dirty="0"/>
+          </a:p>
+          <a:p>
+            <a:pPr marL="342900" indent="-342900">
+              <a:spcAft>
+                <a:spcPts val="500"/>
+              </a:spcAft>
+              <a:buSzPct val="100000"/>
+              <a:buChar char="•"/>
+            </a:pPr>
+            <a:r>
+              <a:rPr lang="en-US" sz="1350" dirty="0">
+                <a:solidFill>
+                  <a:srgbClr val="1F2933"/>
+                </a:solidFill>
+                <a:latin typeface="Calibri" pitchFamily="34" charset="0"/>
+                <a:ea typeface="Calibri" pitchFamily="34" charset="-122"/>
+                <a:cs typeface="Calibri" pitchFamily="34" charset="-120"/>
+              </a:rPr>
+              <a:t>View products and stock availability</a:t>
+            </a:r>
+            <a:endParaRPr lang="en-US" sz="1350" dirty="0"/>
+          </a:p>
+          <a:p>
+            <a:pPr marL="342900" indent="-342900">
+              <a:spcAft>
+                <a:spcPts val="500"/>
+              </a:spcAft>
+              <a:buSzPct val="100000"/>
+              <a:buChar char="•"/>
+            </a:pPr>
+            <a:r>
+              <a:rPr lang="en-US" sz="1350" dirty="0">
+                <a:solidFill>
+                  <a:srgbClr val="1F2933"/>
+                </a:solidFill>
+                <a:latin typeface="Calibri" pitchFamily="34" charset="0"/>
+                <a:ea typeface="Calibri" pitchFamily="34" charset="-122"/>
+                <a:cs typeface="Calibri" pitchFamily="34" charset="-120"/>
+              </a:rPr>
+              <a:t>First registered account becomes ADMIN</a:t>
+            </a:r>
+            <a:endParaRPr lang="en-US" sz="1350" dirty="0"/>
           </a:p>
         </p:txBody>
       </p:sp>
@@ -3983,7 +5660,7 @@
     <p:bg>
       <p:bgPr>
         <a:solidFill>
-          <a:srgbClr val="FFFFFF"/>
+          <a:srgbClr val="F6F8FA"/>
         </a:solidFill>
         <a:effectLst/>
       </p:bgPr>
@@ -4010,8 +5687,8 @@
         </p:nvSpPr>
         <p:spPr>
           <a:xfrm>
-            <a:off x="548640" y="320040"/>
-            <a:ext cx="8046720" cy="640080"/>
+            <a:off x="640080" y="365760"/>
+            <a:ext cx="8229600" cy="274320"/>
           </a:xfrm>
           <a:prstGeom prst="rect">
             <a:avLst/>
@@ -4027,30 +5704,69 @@
               <a:buNone/>
             </a:pPr>
             <a:r>
-              <a:rPr lang="en-US" sz="3200" b="1" dirty="0">
-                <a:solidFill>
-                  <a:srgbClr val="12324A"/>
+              <a:rPr lang="en-US" sz="1200" b="1" kern="0" spc="200" dirty="0">
+                <a:solidFill>
+                  <a:srgbClr val="0F8B8D"/>
+                </a:solidFill>
+                <a:latin typeface="Calibri" pitchFamily="34" charset="0"/>
+                <a:ea typeface="Calibri" pitchFamily="34" charset="-122"/>
+                <a:cs typeface="Calibri" pitchFamily="34" charset="-120"/>
+              </a:rPr>
+              <a:t>05 | DATA ARCHITECTURE</a:t>
+            </a:r>
+            <a:endParaRPr lang="en-US" sz="1200" dirty="0"/>
+          </a:p>
+        </p:txBody>
+      </p:sp>
+      <p:sp>
+        <p:nvSpPr>
+          <p:cNvPr id="3" name="Text 1"/>
+          <p:cNvSpPr txBox="1"/>
+          <p:nvPr/>
+        </p:nvSpPr>
+        <p:spPr>
+          <a:xfrm>
+            <a:off x="640080" y="658368"/>
+            <a:ext cx="10881360" cy="594360"/>
+          </a:xfrm>
+          <a:prstGeom prst="rect">
+            <a:avLst/>
+          </a:prstGeom>
+          <a:noFill/>
+          <a:ln/>
+        </p:spPr>
+        <p:txBody>
+          <a:bodyPr wrap="square" lIns="0" tIns="0" rIns="0" bIns="0" rtlCol="0" anchor="ctr"/>
+          <a:lstStyle/>
+          <a:p>
+            <a:pPr marL="0" indent="0">
+              <a:buNone/>
+            </a:pPr>
+            <a:r>
+              <a:rPr lang="en-US" sz="3000" b="1" dirty="0">
+                <a:solidFill>
+                  <a:srgbClr val="10263B"/>
                 </a:solidFill>
                 <a:latin typeface="Cambria" pitchFamily="34" charset="0"/>
                 <a:ea typeface="Cambria" pitchFamily="34" charset="-122"/>
                 <a:cs typeface="Cambria" pitchFamily="34" charset="-120"/>
               </a:rPr>
-              <a:t>Database Design</a:t>
-            </a:r>
-            <a:endParaRPr lang="en-US" sz="3200" dirty="0"/>
-          </a:p>
-        </p:txBody>
-      </p:sp>
-      <p:sp>
-        <p:nvSpPr>
-          <p:cNvPr id="3" name="Text 1"/>
+              <a:t>Database Schema &amp; ER Model</a:t>
+            </a:r>
+            <a:endParaRPr lang="en-US" sz="3000" dirty="0"/>
+          </a:p>
+        </p:txBody>
+      </p:sp>
+      <p:sp>
+        <p:nvSpPr>
+          <p:cNvPr id="4" name="Text 2"/>
           <p:cNvSpPr txBox="1"/>
           <p:nvPr/>
         </p:nvSpPr>
         <p:spPr>
           <a:xfrm>
-            <a:off x="548640" y="914400"/>
-            <a:ext cx="8046720" cy="365760"/>
+            <a:off x="640080" y="1261872"/>
+            <a:ext cx="10881360" cy="320040"/>
           </a:xfrm>
           <a:prstGeom prst="rect">
             <a:avLst/>
@@ -4074,15 +5790,49 @@
                 <a:ea typeface="Calibri" pitchFamily="34" charset="-122"/>
                 <a:cs typeface="Calibri" pitchFamily="34" charset="-120"/>
               </a:rPr>
-              <a:t>10 normalized tables with primary, foreign and unique keys</a:t>
+              <a:t>10 normalized tables enforcing referential integrity and status pipelines</a:t>
             </a:r>
             <a:endParaRPr lang="en-US" sz="1500" dirty="0"/>
           </a:p>
         </p:txBody>
+      </p:sp>
+      <p:sp>
+        <p:nvSpPr>
+          <p:cNvPr id="5" name="Shape 3"/>
+          <p:cNvSpPr/>
+          <p:nvPr/>
+        </p:nvSpPr>
+        <p:spPr>
+          <a:xfrm>
+            <a:off x="640080" y="1783080"/>
+            <a:ext cx="6675120" cy="4480560"/>
+          </a:xfrm>
+          <a:prstGeom prst="roundRect">
+            <a:avLst>
+              <a:gd name="adj" fmla="val 2449"/>
+            </a:avLst>
+          </a:prstGeom>
+          <a:solidFill>
+            <a:srgbClr val="FFFFFF"/>
+          </a:solidFill>
+          <a:ln w="12700">
+            <a:solidFill>
+              <a:srgbClr val="FFFFFF"/>
+            </a:solidFill>
+            <a:prstDash val="solid"/>
+          </a:ln>
+          <a:effectLst>
+            <a:outerShdw blurRad="101600" dist="25400" dir="5400000" algn="bl" rotWithShape="0">
+              <a:srgbClr val="000000">
+                <a:alpha val="12000"/>
+              </a:srgbClr>
+            </a:outerShdw>
+          </a:effectLst>
+        </p:spPr>
       </p:sp>
       <p:pic>
         <p:nvPicPr>
-          <p:cNvPr id="4" name="Image 0" descr="er.png"/>
+          <p:cNvPr id="6" name="Image 0" descr="er.png"/>
           <p:cNvPicPr>
             <a:picLocks noChangeAspect="1"/>
           </p:cNvPicPr>
@@ -4096,8 +5846,8 @@
         </p:blipFill>
         <p:spPr>
           <a:xfrm>
-            <a:off x="4206240" y="1325880"/>
-            <a:ext cx="4526280" cy="3017520"/>
+            <a:off x="777240" y="1920240"/>
+            <a:ext cx="6400800" cy="4270248"/>
           </a:xfrm>
           <a:prstGeom prst="rect">
             <a:avLst/>
@@ -4106,14 +5856,48 @@
       </p:pic>
       <p:sp>
         <p:nvSpPr>
-          <p:cNvPr id="5" name="Text 2"/>
+          <p:cNvPr id="7" name="Shape 4"/>
+          <p:cNvSpPr/>
+          <p:nvPr/>
+        </p:nvSpPr>
+        <p:spPr>
+          <a:xfrm>
+            <a:off x="7543800" y="1783080"/>
+            <a:ext cx="4023360" cy="4480560"/>
+          </a:xfrm>
+          <a:prstGeom prst="roundRect">
+            <a:avLst>
+              <a:gd name="adj" fmla="val 2727"/>
+            </a:avLst>
+          </a:prstGeom>
+          <a:solidFill>
+            <a:srgbClr val="FFFFFF"/>
+          </a:solidFill>
+          <a:ln w="12700">
+            <a:solidFill>
+              <a:srgbClr val="FFFFFF"/>
+            </a:solidFill>
+            <a:prstDash val="solid"/>
+          </a:ln>
+          <a:effectLst>
+            <a:outerShdw blurRad="101600" dist="25400" dir="5400000" algn="bl" rotWithShape="0">
+              <a:srgbClr val="000000">
+                <a:alpha val="12000"/>
+              </a:srgbClr>
+            </a:outerShdw>
+          </a:effectLst>
+        </p:spPr>
+      </p:sp>
+      <p:sp>
+        <p:nvSpPr>
+          <p:cNvPr id="8" name="Text 5"/>
           <p:cNvSpPr txBox="1"/>
           <p:nvPr/>
         </p:nvSpPr>
         <p:spPr>
           <a:xfrm>
-            <a:off x="548640" y="1417320"/>
-            <a:ext cx="3474720" cy="3108960"/>
+            <a:off x="7772400" y="1965960"/>
+            <a:ext cx="3611880" cy="4206240"/>
           </a:xfrm>
           <a:prstGeom prst="rect">
             <a:avLst/>
@@ -4127,27 +5911,27 @@
           <a:p>
             <a:pPr marL="0" indent="0">
               <a:spcAft>
-                <a:spcPts val="600"/>
+                <a:spcPts val="400"/>
               </a:spcAft>
               <a:buNone/>
             </a:pPr>
             <a:r>
               <a:rPr lang="en-US" sz="1600" b="1" dirty="0">
                 <a:solidFill>
-                  <a:srgbClr val="12324A"/>
-                </a:solidFill>
-                <a:latin typeface="Calibri" pitchFamily="34" charset="0"/>
-                <a:ea typeface="Calibri" pitchFamily="34" charset="-122"/>
-                <a:cs typeface="Calibri" pitchFamily="34" charset="-120"/>
-              </a:rPr>
-              <a:t>Key integrity rules</a:t>
+                  <a:srgbClr val="10263B"/>
+                </a:solidFill>
+                <a:latin typeface="Calibri" pitchFamily="34" charset="0"/>
+                <a:ea typeface="Calibri" pitchFamily="34" charset="-122"/>
+                <a:cs typeface="Calibri" pitchFamily="34" charset="-120"/>
+              </a:rPr>
+              <a:t>Integrity rules</a:t>
             </a:r>
             <a:endParaRPr lang="en-US" sz="1300" dirty="0"/>
           </a:p>
           <a:p>
             <a:pPr marL="342900" indent="-342900">
               <a:spcAft>
-                <a:spcPts val="600"/>
+                <a:spcPts val="400"/>
               </a:spcAft>
               <a:buSzPct val="100000"/>
               <a:buChar char="•"/>
@@ -4161,14 +5945,14 @@
                 <a:ea typeface="Calibri" pitchFamily="34" charset="-122"/>
                 <a:cs typeface="Calibri" pitchFamily="34" charset="-120"/>
               </a:rPr>
-              <a:t>Unique SKU per product</a:t>
+              <a:t>Unique SKU per product, unique user email</a:t>
             </a:r>
             <a:endParaRPr lang="en-US" sz="1300" dirty="0"/>
           </a:p>
           <a:p>
             <a:pPr marL="342900" indent="-342900">
               <a:spcAft>
-                <a:spcPts val="600"/>
+                <a:spcPts val="400"/>
               </a:spcAft>
               <a:buSzPct val="100000"/>
               <a:buChar char="•"/>
@@ -4182,14 +5966,14 @@
                 <a:ea typeface="Calibri" pitchFamily="34" charset="-122"/>
                 <a:cs typeface="Calibri" pitchFamily="34" charset="-120"/>
               </a:rPr>
-              <a:t>Inventory per product and warehouse</a:t>
+              <a:t>Inventory unique per product + warehouse</a:t>
             </a:r>
             <a:endParaRPr lang="en-US" sz="1300" dirty="0"/>
           </a:p>
           <a:p>
             <a:pPr marL="342900" indent="-342900">
               <a:spcAft>
-                <a:spcPts val="600"/>
+                <a:spcPts val="400"/>
               </a:spcAft>
               <a:buSzPct val="100000"/>
               <a:buChar char="•"/>
@@ -4203,14 +5987,14 @@
                 <a:ea typeface="Calibri" pitchFamily="34" charset="-122"/>
                 <a:cs typeface="Calibri" pitchFamily="34" charset="-120"/>
               </a:rPr>
-              <a:t>Hashed passwords, enum roles</a:t>
+              <a:t>Order items bound to parent order</a:t>
             </a:r>
             <a:endParaRPr lang="en-US" sz="1300" dirty="0"/>
           </a:p>
           <a:p>
             <a:pPr marL="342900" indent="-342900">
               <a:spcAft>
-                <a:spcPts val="600"/>
+                <a:spcPts val="400"/>
               </a:spcAft>
               <a:buSzPct val="100000"/>
               <a:buChar char="•"/>
@@ -4224,20 +6008,59 @@
                 <a:ea typeface="Calibri" pitchFamily="34" charset="-122"/>
                 <a:cs typeface="Calibri" pitchFamily="34" charset="-120"/>
               </a:rPr>
-              <a:t>Order: PENDING → CONFIRMED → PROCESSING → SHIPPED → DELIVERED / CANCELLED</a:t>
+              <a:t>Passwords stored hashed</a:t>
             </a:r>
             <a:endParaRPr lang="en-US" sz="1300" dirty="0"/>
           </a:p>
           <a:p>
-            <a:pPr marL="342900" indent="-342900">
+            <a:pPr marL="0" indent="0">
               <a:spcAft>
-                <a:spcPts val="600"/>
+                <a:spcPts val="400"/>
               </a:spcAft>
-              <a:buSzPct val="100000"/>
-              <a:buChar char="•"/>
-            </a:pPr>
-            <a:r>
-              <a:rPr lang="en-US" sz="1300" dirty="0">
+              <a:buNone/>
+            </a:pPr>
+            <a:r>
+              <a:rPr lang="en-US" sz="600" dirty="0">
+                <a:solidFill>
+                  <a:srgbClr val="000000"/>
+                </a:solidFill>
+                <a:latin typeface="Calibri" pitchFamily="34" charset="0"/>
+                <a:ea typeface="Calibri" pitchFamily="34" charset="-122"/>
+                <a:cs typeface="Calibri" pitchFamily="34" charset="-120"/>
+              </a:rPr>
+              <a:t> </a:t>
+            </a:r>
+            <a:endParaRPr lang="en-US" sz="1300" dirty="0"/>
+          </a:p>
+          <a:p>
+            <a:pPr marL="0" indent="0">
+              <a:spcAft>
+                <a:spcPts val="400"/>
+              </a:spcAft>
+              <a:buNone/>
+            </a:pPr>
+            <a:r>
+              <a:rPr lang="en-US" sz="1400" b="1" dirty="0">
+                <a:solidFill>
+                  <a:srgbClr val="0F8B8D"/>
+                </a:solidFill>
+                <a:latin typeface="Calibri" pitchFamily="34" charset="0"/>
+                <a:ea typeface="Calibri" pitchFamily="34" charset="-122"/>
+                <a:cs typeface="Calibri" pitchFamily="34" charset="-120"/>
+              </a:rPr>
+              <a:t>Sales order</a:t>
+            </a:r>
+            <a:endParaRPr lang="en-US" sz="1300" dirty="0"/>
+          </a:p>
+          <a:p>
+            <a:pPr marL="0" indent="0">
+              <a:spcAft>
+                <a:spcPts val="400"/>
+              </a:spcAft>
+              <a:buNone/>
+            </a:pPr>
+            <a:r>
+              <a:rPr lang="en-US" sz="1250" dirty="0">
                 <a:solidFill>
                   <a:srgbClr val="1F2933"/>
                 </a:solidFill>
@@ -4245,7 +6068,67 @@
                 <a:ea typeface="Calibri" pitchFamily="34" charset="-122"/>
                 <a:cs typeface="Calibri" pitchFamily="34" charset="-120"/>
               </a:rPr>
-              <a:t>PO: PENDING → APPROVED → ORDERED → RECEIVED / CANCELLED</a:t>
+              <a:t>PENDING → CONFIRMED → PROCESSING → SHIPPED → DELIVERED (or CANCELLED)</a:t>
+            </a:r>
+            <a:endParaRPr lang="en-US" sz="1300" dirty="0"/>
+          </a:p>
+          <a:p>
+            <a:pPr marL="0" indent="0">
+              <a:spcAft>
+                <a:spcPts val="400"/>
+              </a:spcAft>
+              <a:buNone/>
+            </a:pPr>
+            <a:r>
+              <a:rPr lang="en-US" sz="600" dirty="0">
+                <a:solidFill>
+                  <a:srgbClr val="000000"/>
+                </a:solidFill>
+                <a:latin typeface="Calibri" pitchFamily="34" charset="0"/>
+                <a:ea typeface="Calibri" pitchFamily="34" charset="-122"/>
+                <a:cs typeface="Calibri" pitchFamily="34" charset="-120"/>
+              </a:rPr>
+              <a:t> </a:t>
+            </a:r>
+            <a:endParaRPr lang="en-US" sz="1300" dirty="0"/>
+          </a:p>
+          <a:p>
+            <a:pPr marL="0" indent="0">
+              <a:spcAft>
+                <a:spcPts val="400"/>
+              </a:spcAft>
+              <a:buNone/>
+            </a:pPr>
+            <a:r>
+              <a:rPr lang="en-US" sz="1400" b="1" dirty="0">
+                <a:solidFill>
+                  <a:srgbClr val="0F8B8D"/>
+                </a:solidFill>
+                <a:latin typeface="Calibri" pitchFamily="34" charset="0"/>
+                <a:ea typeface="Calibri" pitchFamily="34" charset="-122"/>
+                <a:cs typeface="Calibri" pitchFamily="34" charset="-120"/>
+              </a:rPr>
+              <a:t>Purchase order</a:t>
+            </a:r>
+            <a:endParaRPr lang="en-US" sz="1300" dirty="0"/>
+          </a:p>
+          <a:p>
+            <a:pPr marL="0" indent="0">
+              <a:spcAft>
+                <a:spcPts val="400"/>
+              </a:spcAft>
+              <a:buNone/>
+            </a:pPr>
+            <a:r>
+              <a:rPr lang="en-US" sz="1250" dirty="0">
+                <a:solidFill>
+                  <a:srgbClr val="1F2933"/>
+                </a:solidFill>
+                <a:latin typeface="Calibri" pitchFamily="34" charset="0"/>
+                <a:ea typeface="Calibri" pitchFamily="34" charset="-122"/>
+                <a:cs typeface="Calibri" pitchFamily="34" charset="-120"/>
+              </a:rPr>
+              <a:t>PENDING → APPROVED → ORDERED → RECEIVED (or CANCELLED)</a:t>
             </a:r>
             <a:endParaRPr lang="en-US" sz="1300" dirty="0"/>
           </a:p>
@@ -4265,7 +6148,7 @@
     <p:bg>
       <p:bgPr>
         <a:solidFill>
-          <a:srgbClr val="12324A"/>
+          <a:srgbClr val="10263B"/>
         </a:solidFill>
         <a:effectLst/>
       </p:bgPr>
@@ -4292,8 +6175,8 @@
         </p:nvSpPr>
         <p:spPr>
           <a:xfrm>
-            <a:off x="548640" y="320040"/>
-            <a:ext cx="8046720" cy="640080"/>
+            <a:off x="640080" y="365760"/>
+            <a:ext cx="8229600" cy="274320"/>
           </a:xfrm>
           <a:prstGeom prst="rect">
             <a:avLst/>
@@ -4309,7 +6192,46 @@
               <a:buNone/>
             </a:pPr>
             <a:r>
-              <a:rPr lang="en-US" sz="3200" b="1" dirty="0">
+              <a:rPr lang="en-US" sz="1200" b="1" kern="0" spc="200" dirty="0">
+                <a:solidFill>
+                  <a:srgbClr val="F2A541"/>
+                </a:solidFill>
+                <a:latin typeface="Calibri" pitchFamily="34" charset="0"/>
+                <a:ea typeface="Calibri" pitchFamily="34" charset="-122"/>
+                <a:cs typeface="Calibri" pitchFamily="34" charset="-120"/>
+              </a:rPr>
+              <a:t>06 | EVALUATION &amp; ROADMAP</a:t>
+            </a:r>
+            <a:endParaRPr lang="en-US" sz="1200" dirty="0"/>
+          </a:p>
+        </p:txBody>
+      </p:sp>
+      <p:sp>
+        <p:nvSpPr>
+          <p:cNvPr id="3" name="Text 1"/>
+          <p:cNvSpPr txBox="1"/>
+          <p:nvPr/>
+        </p:nvSpPr>
+        <p:spPr>
+          <a:xfrm>
+            <a:off x="640080" y="658368"/>
+            <a:ext cx="10881360" cy="594360"/>
+          </a:xfrm>
+          <a:prstGeom prst="rect">
+            <a:avLst/>
+          </a:prstGeom>
+          <a:noFill/>
+          <a:ln/>
+        </p:spPr>
+        <p:txBody>
+          <a:bodyPr wrap="square" lIns="0" tIns="0" rIns="0" bIns="0" rtlCol="0" anchor="ctr"/>
+          <a:lstStyle/>
+          <a:p>
+            <a:pPr marL="0" indent="0">
+              <a:buNone/>
+            </a:pPr>
+            <a:r>
+              <a:rPr lang="en-US" sz="3000" b="1" dirty="0">
                 <a:solidFill>
                   <a:srgbClr val="FFFFFF"/>
                 </a:solidFill>
@@ -4317,26 +6239,26 @@
                 <a:ea typeface="Cambria" pitchFamily="34" charset="-122"/>
                 <a:cs typeface="Cambria" pitchFamily="34" charset="-120"/>
               </a:rPr>
-              <a:t>Testing, Scope &amp; Conclusion</a:t>
-            </a:r>
-            <a:endParaRPr lang="en-US" sz="3200" dirty="0"/>
-          </a:p>
-        </p:txBody>
-      </p:sp>
-      <p:sp>
-        <p:nvSpPr>
-          <p:cNvPr id="3" name="Shape 1"/>
+              <a:t>Verification, Limits &amp; Future Roadmap</a:t>
+            </a:r>
+            <a:endParaRPr lang="en-US" sz="3000" dirty="0"/>
+          </a:p>
+        </p:txBody>
+      </p:sp>
+      <p:sp>
+        <p:nvSpPr>
+          <p:cNvPr id="4" name="Shape 2"/>
           <p:cNvSpPr/>
           <p:nvPr/>
         </p:nvSpPr>
         <p:spPr>
           <a:xfrm>
-            <a:off x="548640" y="1234440"/>
-            <a:ext cx="2560320" cy="2377440"/>
+            <a:off x="640080" y="1600200"/>
+            <a:ext cx="3566160" cy="3063240"/>
           </a:xfrm>
           <a:prstGeom prst="roundRect">
             <a:avLst>
-              <a:gd name="adj" fmla="val 4615"/>
+              <a:gd name="adj" fmla="val 3582"/>
             </a:avLst>
           </a:prstGeom>
           <a:solidFill>
@@ -4352,14 +6274,14 @@
       </p:sp>
       <p:sp>
         <p:nvSpPr>
-          <p:cNvPr id="4" name="Text 2"/>
+          <p:cNvPr id="5" name="Text 3"/>
           <p:cNvSpPr txBox="1"/>
           <p:nvPr/>
         </p:nvSpPr>
         <p:spPr>
           <a:xfrm>
-            <a:off x="777240" y="1371600"/>
-            <a:ext cx="2103120" cy="365760"/>
+            <a:off x="914400" y="1783080"/>
+            <a:ext cx="3017520" cy="411480"/>
           </a:xfrm>
           <a:prstGeom prst="rect">
             <a:avLst/>
@@ -4375,7 +6297,7 @@
               <a:buNone/>
             </a:pPr>
             <a:r>
-              <a:rPr lang="en-US" sz="1800" b="1" dirty="0">
+              <a:rPr lang="en-US" sz="2100" b="1" dirty="0">
                 <a:solidFill>
                   <a:srgbClr val="F2A541"/>
                 </a:solidFill>
@@ -4383,22 +6305,22 @@
                 <a:ea typeface="Cambria" pitchFamily="34" charset="-122"/>
                 <a:cs typeface="Cambria" pitchFamily="34" charset="-120"/>
               </a:rPr>
-              <a:t>Tested</a:t>
-            </a:r>
-            <a:endParaRPr lang="en-US" sz="1800" dirty="0"/>
-          </a:p>
-        </p:txBody>
-      </p:sp>
-      <p:sp>
-        <p:nvSpPr>
-          <p:cNvPr id="5" name="Text 3"/>
+              <a:t>Verified</a:t>
+            </a:r>
+            <a:endParaRPr lang="en-US" sz="2100" dirty="0"/>
+          </a:p>
+        </p:txBody>
+      </p:sp>
+      <p:sp>
+        <p:nvSpPr>
+          <p:cNvPr id="6" name="Text 4"/>
           <p:cNvSpPr txBox="1"/>
           <p:nvPr/>
         </p:nvSpPr>
         <p:spPr>
           <a:xfrm>
-            <a:off x="777240" y="1828800"/>
-            <a:ext cx="2148840" cy="1691640"/>
+            <a:off x="914400" y="2331720"/>
+            <a:ext cx="3063240" cy="2194560"/>
           </a:xfrm>
           <a:prstGeom prst="rect">
             <a:avLst/>
@@ -4412,13 +6334,13 @@
           <a:p>
             <a:pPr marL="342900" indent="-342900">
               <a:spcAft>
-                <a:spcPts val="500"/>
+                <a:spcPts val="900"/>
               </a:spcAft>
               <a:buSzPct val="100000"/>
               <a:buChar char="•"/>
             </a:pPr>
             <a:r>
-              <a:rPr lang="en-US" sz="1400" dirty="0">
+              <a:rPr lang="en-US" sz="1450" dirty="0">
                 <a:solidFill>
                   <a:srgbClr val="FFFFFF"/>
                 </a:solidFill>
@@ -4428,18 +6350,18 @@
               </a:rPr>
               <a:t>13 acceptance test cases</a:t>
             </a:r>
-            <a:endParaRPr lang="en-US" sz="1400" dirty="0"/>
+            <a:endParaRPr lang="en-US" sz="1450" dirty="0"/>
           </a:p>
           <a:p>
             <a:pPr marL="342900" indent="-342900">
               <a:spcAft>
-                <a:spcPts val="500"/>
+                <a:spcPts val="900"/>
               </a:spcAft>
               <a:buSzPct val="100000"/>
               <a:buChar char="•"/>
             </a:pPr>
             <a:r>
-              <a:rPr lang="en-US" sz="1400" dirty="0">
+              <a:rPr lang="en-US" sz="1450" dirty="0">
                 <a:solidFill>
                   <a:srgbClr val="FFFFFF"/>
                 </a:solidFill>
@@ -4447,20 +6369,20 @@
                 <a:ea typeface="Calibri" pitchFamily="34" charset="-122"/>
                 <a:cs typeface="Calibri" pitchFamily="34" charset="-120"/>
               </a:rPr>
-              <a:t>Login, CRUD, duplicate SKU</a:t>
-            </a:r>
-            <a:endParaRPr lang="en-US" sz="1400" dirty="0"/>
+              <a:t>Login, CRUD, duplicate SKU rejected</a:t>
+            </a:r>
+            <a:endParaRPr lang="en-US" sz="1450" dirty="0"/>
           </a:p>
           <a:p>
             <a:pPr marL="342900" indent="-342900">
               <a:spcAft>
-                <a:spcPts val="500"/>
+                <a:spcPts val="900"/>
               </a:spcAft>
               <a:buSzPct val="100000"/>
               <a:buChar char="•"/>
             </a:pPr>
             <a:r>
-              <a:rPr lang="en-US" sz="1400" dirty="0">
+              <a:rPr lang="en-US" sz="1450" dirty="0">
                 <a:solidFill>
                   <a:srgbClr val="FFFFFF"/>
                 </a:solidFill>
@@ -4468,20 +6390,20 @@
                 <a:ea typeface="Calibri" pitchFamily="34" charset="-122"/>
                 <a:cs typeface="Calibri" pitchFamily="34" charset="-120"/>
               </a:rPr>
-              <a:t>Validation and ADMIN-only access</a:t>
-            </a:r>
-            <a:endParaRPr lang="en-US" sz="1400" dirty="0"/>
+              <a:t>Validation errors on bad input</a:t>
+            </a:r>
+            <a:endParaRPr lang="en-US" sz="1450" dirty="0"/>
           </a:p>
           <a:p>
             <a:pPr marL="342900" indent="-342900">
               <a:spcAft>
-                <a:spcPts val="500"/>
+                <a:spcPts val="900"/>
               </a:spcAft>
               <a:buSzPct val="100000"/>
               <a:buChar char="•"/>
             </a:pPr>
             <a:r>
-              <a:rPr lang="en-US" sz="1400" dirty="0">
+              <a:rPr lang="en-US" sz="1450" dirty="0">
                 <a:solidFill>
                   <a:srgbClr val="FFFFFF"/>
                 </a:solidFill>
@@ -4489,26 +6411,26 @@
                 <a:ea typeface="Calibri" pitchFamily="34" charset="-122"/>
                 <a:cs typeface="Calibri" pitchFamily="34" charset="-120"/>
               </a:rPr>
-              <a:t>API, unit and frontend testing</a:t>
-            </a:r>
-            <a:endParaRPr lang="en-US" sz="1400" dirty="0"/>
-          </a:p>
-        </p:txBody>
-      </p:sp>
-      <p:sp>
-        <p:nvSpPr>
-          <p:cNvPr id="6" name="Shape 4"/>
+              <a:t>USER blocked from ADMIN-only APIs</a:t>
+            </a:r>
+            <a:endParaRPr lang="en-US" sz="1450" dirty="0"/>
+          </a:p>
+        </p:txBody>
+      </p:sp>
+      <p:sp>
+        <p:nvSpPr>
+          <p:cNvPr id="7" name="Shape 5"/>
           <p:cNvSpPr/>
           <p:nvPr/>
         </p:nvSpPr>
         <p:spPr>
           <a:xfrm>
-            <a:off x="3291840" y="1234440"/>
-            <a:ext cx="2560320" cy="2377440"/>
+            <a:off x="4389120" y="1600200"/>
+            <a:ext cx="3566160" cy="3063240"/>
           </a:xfrm>
           <a:prstGeom prst="roundRect">
             <a:avLst>
-              <a:gd name="adj" fmla="val 4615"/>
+              <a:gd name="adj" fmla="val 3582"/>
             </a:avLst>
           </a:prstGeom>
           <a:solidFill>
@@ -4524,14 +6446,14 @@
       </p:sp>
       <p:sp>
         <p:nvSpPr>
-          <p:cNvPr id="7" name="Text 5"/>
+          <p:cNvPr id="8" name="Text 6"/>
           <p:cNvSpPr txBox="1"/>
           <p:nvPr/>
         </p:nvSpPr>
         <p:spPr>
           <a:xfrm>
-            <a:off x="3520440" y="1371600"/>
-            <a:ext cx="2103120" cy="365760"/>
+            <a:off x="4663440" y="1783080"/>
+            <a:ext cx="3017520" cy="411480"/>
           </a:xfrm>
           <a:prstGeom prst="rect">
             <a:avLst/>
@@ -4547,7 +6469,7 @@
               <a:buNone/>
             </a:pPr>
             <a:r>
-              <a:rPr lang="en-US" sz="1800" b="1" dirty="0">
+              <a:rPr lang="en-US" sz="2100" b="1" dirty="0">
                 <a:solidFill>
                   <a:srgbClr val="F2A541"/>
                 </a:solidFill>
@@ -4555,22 +6477,22 @@
                 <a:ea typeface="Cambria" pitchFamily="34" charset="-122"/>
                 <a:cs typeface="Cambria" pitchFamily="34" charset="-120"/>
               </a:rPr>
-              <a:t>Limitations</a:t>
-            </a:r>
-            <a:endParaRPr lang="en-US" sz="1800" dirty="0"/>
-          </a:p>
-        </p:txBody>
-      </p:sp>
-      <p:sp>
-        <p:nvSpPr>
-          <p:cNvPr id="8" name="Text 6"/>
+              <a:t>Current limits</a:t>
+            </a:r>
+            <a:endParaRPr lang="en-US" sz="2100" dirty="0"/>
+          </a:p>
+        </p:txBody>
+      </p:sp>
+      <p:sp>
+        <p:nvSpPr>
+          <p:cNvPr id="9" name="Text 7"/>
           <p:cNvSpPr txBox="1"/>
           <p:nvPr/>
         </p:nvSpPr>
         <p:spPr>
           <a:xfrm>
-            <a:off x="3520440" y="1828800"/>
-            <a:ext cx="2148840" cy="1691640"/>
+            <a:off x="4663440" y="2331720"/>
+            <a:ext cx="3063240" cy="2194560"/>
           </a:xfrm>
           <a:prstGeom prst="rect">
             <a:avLst/>
@@ -4584,13 +6506,13 @@
           <a:p>
             <a:pPr marL="342900" indent="-342900">
               <a:spcAft>
-                <a:spcPts val="500"/>
+                <a:spcPts val="900"/>
               </a:spcAft>
               <a:buSzPct val="100000"/>
               <a:buChar char="•"/>
             </a:pPr>
             <a:r>
-              <a:rPr lang="en-US" sz="1400" dirty="0">
+              <a:rPr lang="en-US" sz="1450" dirty="0">
                 <a:solidFill>
                   <a:srgbClr val="FFFFFF"/>
                 </a:solidFill>
@@ -4598,20 +6520,20 @@
                 <a:ea typeface="Calibri" pitchFamily="34" charset="-122"/>
                 <a:cs typeface="Calibri" pitchFamily="34" charset="-120"/>
               </a:rPr>
-              <a:t>No barcode/QR scanning</a:t>
-            </a:r>
-            <a:endParaRPr lang="en-US" sz="1400" dirty="0"/>
+              <a:t>No barcode / QR scanning</a:t>
+            </a:r>
+            <a:endParaRPr lang="en-US" sz="1450" dirty="0"/>
           </a:p>
           <a:p>
             <a:pPr marL="342900" indent="-342900">
               <a:spcAft>
-                <a:spcPts val="500"/>
+                <a:spcPts val="900"/>
               </a:spcAft>
               <a:buSzPct val="100000"/>
               <a:buChar char="•"/>
             </a:pPr>
             <a:r>
-              <a:rPr lang="en-US" sz="1400" dirty="0">
+              <a:rPr lang="en-US" sz="1450" dirty="0">
                 <a:solidFill>
                   <a:srgbClr val="FFFFFF"/>
                 </a:solidFill>
@@ -4621,18 +6543,18 @@
               </a:rPr>
               <a:t>No payment gateway</a:t>
             </a:r>
-            <a:endParaRPr lang="en-US" sz="1400" dirty="0"/>
+            <a:endParaRPr lang="en-US" sz="1450" dirty="0"/>
           </a:p>
           <a:p>
             <a:pPr marL="342900" indent="-342900">
               <a:spcAft>
-                <a:spcPts val="500"/>
+                <a:spcPts val="900"/>
               </a:spcAft>
               <a:buSzPct val="100000"/>
               <a:buChar char="•"/>
             </a:pPr>
             <a:r>
-              <a:rPr lang="en-US" sz="1400" dirty="0">
+              <a:rPr lang="en-US" sz="1450" dirty="0">
                 <a:solidFill>
                   <a:srgbClr val="FFFFFF"/>
                 </a:solidFill>
@@ -4642,18 +6564,18 @@
               </a:rPr>
               <a:t>No shipment tracking</a:t>
             </a:r>
-            <a:endParaRPr lang="en-US" sz="1400" dirty="0"/>
+            <a:endParaRPr lang="en-US" sz="1450" dirty="0"/>
           </a:p>
           <a:p>
             <a:pPr marL="342900" indent="-342900">
               <a:spcAft>
-                <a:spcPts val="500"/>
+                <a:spcPts val="900"/>
               </a:spcAft>
               <a:buSzPct val="100000"/>
               <a:buChar char="•"/>
             </a:pPr>
             <a:r>
-              <a:rPr lang="en-US" sz="1400" dirty="0">
+              <a:rPr lang="en-US" sz="1450" dirty="0">
                 <a:solidFill>
                   <a:srgbClr val="FFFFFF"/>
                 </a:solidFill>
@@ -4661,26 +6583,26 @@
                 <a:ea typeface="Calibri" pitchFamily="34" charset="-122"/>
                 <a:cs typeface="Calibri" pitchFamily="34" charset="-120"/>
               </a:rPr>
-              <a:t>No email/SMS alerts</a:t>
-            </a:r>
-            <a:endParaRPr lang="en-US" sz="1400" dirty="0"/>
-          </a:p>
-        </p:txBody>
-      </p:sp>
-      <p:sp>
-        <p:nvSpPr>
-          <p:cNvPr id="9" name="Shape 7"/>
+              <a:t>No email / SMS notifications</a:t>
+            </a:r>
+            <a:endParaRPr lang="en-US" sz="1450" dirty="0"/>
+          </a:p>
+        </p:txBody>
+      </p:sp>
+      <p:sp>
+        <p:nvSpPr>
+          <p:cNvPr id="10" name="Shape 8"/>
           <p:cNvSpPr/>
           <p:nvPr/>
         </p:nvSpPr>
         <p:spPr>
           <a:xfrm>
-            <a:off x="6035040" y="1234440"/>
-            <a:ext cx="2560320" cy="2377440"/>
+            <a:off x="8138160" y="1600200"/>
+            <a:ext cx="3566160" cy="3063240"/>
           </a:xfrm>
           <a:prstGeom prst="roundRect">
             <a:avLst>
-              <a:gd name="adj" fmla="val 4615"/>
+              <a:gd name="adj" fmla="val 3582"/>
             </a:avLst>
           </a:prstGeom>
           <a:solidFill>
@@ -4696,14 +6618,14 @@
       </p:sp>
       <p:sp>
         <p:nvSpPr>
-          <p:cNvPr id="10" name="Text 8"/>
+          <p:cNvPr id="11" name="Text 9"/>
           <p:cNvSpPr txBox="1"/>
           <p:nvPr/>
         </p:nvSpPr>
         <p:spPr>
           <a:xfrm>
-            <a:off x="6263640" y="1371600"/>
-            <a:ext cx="2103120" cy="365760"/>
+            <a:off x="8412480" y="1783080"/>
+            <a:ext cx="3017520" cy="411480"/>
           </a:xfrm>
           <a:prstGeom prst="rect">
             <a:avLst/>
@@ -4719,7 +6641,7 @@
               <a:buNone/>
             </a:pPr>
             <a:r>
-              <a:rPr lang="en-US" sz="1800" b="1" dirty="0">
+              <a:rPr lang="en-US" sz="2100" b="1" dirty="0">
                 <a:solidFill>
                   <a:srgbClr val="F2A541"/>
                 </a:solidFill>
@@ -4727,22 +6649,22 @@
                 <a:ea typeface="Cambria" pitchFamily="34" charset="-122"/>
                 <a:cs typeface="Cambria" pitchFamily="34" charset="-120"/>
               </a:rPr>
-              <a:t>Future scope</a:t>
-            </a:r>
-            <a:endParaRPr lang="en-US" sz="1800" dirty="0"/>
-          </a:p>
-        </p:txBody>
-      </p:sp>
-      <p:sp>
-        <p:nvSpPr>
-          <p:cNvPr id="11" name="Text 9"/>
+              <a:t>Future roadmap</a:t>
+            </a:r>
+            <a:endParaRPr lang="en-US" sz="2100" dirty="0"/>
+          </a:p>
+        </p:txBody>
+      </p:sp>
+      <p:sp>
+        <p:nvSpPr>
+          <p:cNvPr id="12" name="Text 10"/>
           <p:cNvSpPr txBox="1"/>
           <p:nvPr/>
         </p:nvSpPr>
         <p:spPr>
           <a:xfrm>
-            <a:off x="6263640" y="1828800"/>
-            <a:ext cx="2148840" cy="1691640"/>
+            <a:off x="8412480" y="2331720"/>
+            <a:ext cx="3063240" cy="2194560"/>
           </a:xfrm>
           <a:prstGeom prst="rect">
             <a:avLst/>
@@ -4756,13 +6678,13 @@
           <a:p>
             <a:pPr marL="342900" indent="-342900">
               <a:spcAft>
-                <a:spcPts val="500"/>
+                <a:spcPts val="900"/>
               </a:spcAft>
               <a:buSzPct val="100000"/>
               <a:buChar char="•"/>
             </a:pPr>
             <a:r>
-              <a:rPr lang="en-US" sz="1400" dirty="0">
+              <a:rPr lang="en-US" sz="1450" dirty="0">
                 <a:solidFill>
                   <a:srgbClr val="FFFFFF"/>
                 </a:solidFill>
@@ -4772,18 +6694,18 @@
               </a:rPr>
               <a:t>Low-stock alerts</a:t>
             </a:r>
-            <a:endParaRPr lang="en-US" sz="1400" dirty="0"/>
+            <a:endParaRPr lang="en-US" sz="1450" dirty="0"/>
           </a:p>
           <a:p>
             <a:pPr marL="342900" indent="-342900">
               <a:spcAft>
-                <a:spcPts val="500"/>
+                <a:spcPts val="900"/>
               </a:spcAft>
               <a:buSzPct val="100000"/>
               <a:buChar char="•"/>
             </a:pPr>
             <a:r>
-              <a:rPr lang="en-US" sz="1400" dirty="0">
+              <a:rPr lang="en-US" sz="1450" dirty="0">
                 <a:solidFill>
                   <a:srgbClr val="FFFFFF"/>
                 </a:solidFill>
@@ -4791,20 +6713,20 @@
                 <a:ea typeface="Calibri" pitchFamily="34" charset="-122"/>
                 <a:cs typeface="Calibri" pitchFamily="34" charset="-120"/>
               </a:rPr>
-              <a:t>Analytics and demand prediction</a:t>
-            </a:r>
-            <a:endParaRPr lang="en-US" sz="1400" dirty="0"/>
+              <a:t>Inventory analytics, demand prediction</a:t>
+            </a:r>
+            <a:endParaRPr lang="en-US" sz="1450" dirty="0"/>
           </a:p>
           <a:p>
             <a:pPr marL="342900" indent="-342900">
               <a:spcAft>
-                <a:spcPts val="500"/>
+                <a:spcPts val="900"/>
               </a:spcAft>
               <a:buSzPct val="100000"/>
               <a:buChar char="•"/>
             </a:pPr>
             <a:r>
-              <a:rPr lang="en-US" sz="1400" dirty="0">
+              <a:rPr lang="en-US" sz="1450" dirty="0">
                 <a:solidFill>
                   <a:srgbClr val="FFFFFF"/>
                 </a:solidFill>
@@ -4812,20 +6734,20 @@
                 <a:ea typeface="Calibri" pitchFamily="34" charset="-122"/>
                 <a:cs typeface="Calibri" pitchFamily="34" charset="-120"/>
               </a:rPr>
-              <a:t>Mobile app</a:t>
-            </a:r>
-            <a:endParaRPr lang="en-US" sz="1400" dirty="0"/>
+              <a:t>Mobile companion app</a:t>
+            </a:r>
+            <a:endParaRPr lang="en-US" sz="1450" dirty="0"/>
           </a:p>
           <a:p>
             <a:pPr marL="342900" indent="-342900">
               <a:spcAft>
-                <a:spcPts val="500"/>
+                <a:spcPts val="900"/>
               </a:spcAft>
               <a:buSzPct val="100000"/>
               <a:buChar char="•"/>
             </a:pPr>
             <a:r>
-              <a:rPr lang="en-US" sz="1400" dirty="0">
+              <a:rPr lang="en-US" sz="1450" dirty="0">
                 <a:solidFill>
                   <a:srgbClr val="FFFFFF"/>
                 </a:solidFill>
@@ -4835,20 +6757,47 @@
               </a:rPr>
               <a:t>Cloud deployment</a:t>
             </a:r>
-            <a:endParaRPr lang="en-US" sz="1400" dirty="0"/>
-          </a:p>
-        </p:txBody>
-      </p:sp>
-      <p:sp>
-        <p:nvSpPr>
-          <p:cNvPr id="12" name="Text 10"/>
+            <a:endParaRPr lang="en-US" sz="1450" dirty="0"/>
+          </a:p>
+        </p:txBody>
+      </p:sp>
+      <p:sp>
+        <p:nvSpPr>
+          <p:cNvPr id="13" name="Shape 11"/>
+          <p:cNvSpPr/>
+          <p:nvPr/>
+        </p:nvSpPr>
+        <p:spPr>
+          <a:xfrm>
+            <a:off x="640080" y="4937760"/>
+            <a:ext cx="10927080" cy="1325880"/>
+          </a:xfrm>
+          <a:prstGeom prst="roundRect">
+            <a:avLst>
+              <a:gd name="adj" fmla="val 8276"/>
+            </a:avLst>
+          </a:prstGeom>
+          <a:solidFill>
+            <a:srgbClr val="0F8B8D"/>
+          </a:solidFill>
+          <a:ln w="12700">
+            <a:solidFill>
+              <a:srgbClr val="0F8B8D"/>
+            </a:solidFill>
+            <a:prstDash val="solid"/>
+          </a:ln>
+        </p:spPr>
+      </p:sp>
+      <p:sp>
+        <p:nvSpPr>
+          <p:cNvPr id="14" name="Text 12"/>
           <p:cNvSpPr txBox="1"/>
           <p:nvPr/>
         </p:nvSpPr>
         <p:spPr>
           <a:xfrm>
-            <a:off x="548640" y="3886200"/>
-            <a:ext cx="8046720" cy="640080"/>
+            <a:off x="914400" y="5029200"/>
+            <a:ext cx="10332720" cy="1143000"/>
           </a:xfrm>
           <a:prstGeom prst="rect">
             <a:avLst/>
@@ -4861,20 +6810,43 @@
           <a:lstStyle/>
           <a:p>
             <a:pPr marL="0" indent="0">
-              <a:buNone/>
-            </a:pPr>
-            <a:r>
-              <a:rPr lang="en-US" sz="1600" i="1" dirty="0">
-                <a:solidFill>
-                  <a:srgbClr val="CADCFC"/>
-                </a:solidFill>
-                <a:latin typeface="Calibri" pitchFamily="34" charset="0"/>
-                <a:ea typeface="Calibri" pitchFamily="34" charset="-122"/>
-                <a:cs typeface="Calibri" pitchFamily="34" charset="-120"/>
-              </a:rPr>
-              <a:t>RIMS delivers a secure, modular inventory platform that replaces manual records with a single, role-controlled web application.</a:t>
-            </a:r>
-            <a:endParaRPr lang="en-US" sz="1600" dirty="0"/>
+              <a:spcAft>
+                <a:spcPts val="400"/>
+              </a:spcAft>
+              <a:buNone/>
+            </a:pPr>
+            <a:r>
+              <a:rPr lang="en-US" sz="1200" b="1" kern="0" spc="200" dirty="0">
+                <a:solidFill>
+                  <a:srgbClr val="FFFFFF"/>
+                </a:solidFill>
+                <a:latin typeface="Calibri" pitchFamily="34" charset="0"/>
+                <a:ea typeface="Calibri" pitchFamily="34" charset="-122"/>
+                <a:cs typeface="Calibri" pitchFamily="34" charset="-120"/>
+              </a:rPr>
+              <a:t>CONCLUSION</a:t>
+            </a:r>
+            <a:endParaRPr lang="en-US" sz="1200" dirty="0"/>
+          </a:p>
+          <a:p>
+            <a:pPr marL="0" indent="0">
+              <a:spcAft>
+                <a:spcPts val="400"/>
+              </a:spcAft>
+              <a:buNone/>
+            </a:pPr>
+            <a:r>
+              <a:rPr lang="en-US" sz="1600" dirty="0">
+                <a:solidFill>
+                  <a:srgbClr val="FFFFFF"/>
+                </a:solidFill>
+                <a:latin typeface="Calibri" pitchFamily="34" charset="0"/>
+                <a:ea typeface="Calibri" pitchFamily="34" charset="-122"/>
+                <a:cs typeface="Calibri" pitchFamily="34" charset="-120"/>
+              </a:rPr>
+              <a:t>RIMS is a secure, modular inventory and procurement platform that replaces manual spreadsheet records with one role-controlled web application.</a:t>
+            </a:r>
+            <a:endParaRPr lang="en-US" sz="1200" dirty="0"/>
           </a:p>
         </p:txBody>
       </p:sp>

--- a/documents/Presentation.pptx
+++ b/documents/Presentation.pptx
@@ -4,9 +4,6 @@
   <p:sldMasterIdLst>
     <p:sldMasterId id="2147483648" r:id="rId1"/>
   </p:sldMasterIdLst>
-  <p:notesMasterIdLst>
-    <p:notesMasterId r:id="rId9"/>
-  </p:notesMasterIdLst>
   <p:sldIdLst>
     <p:sldId id="256" r:id="rId2"/>
     <p:sldId id="257" r:id="rId3"/>
@@ -16,6 +13,9 @@
     <p:sldId id="261" r:id="rId7"/>
     <p:sldId id="262" r:id="rId8"/>
   </p:sldIdLst>
+  <p:notesMasterIdLst>
+    <p:notesMasterId r:id="rId9"/>
+  </p:notesMasterIdLst>
   <p:sldSz cx="12192000" cy="6858000"/>
   <p:notesSz cx="6858000" cy="12192000"/>
   <p:defaultTextStyle>
@@ -110,11 +110,6 @@
       </a:defRPr>
     </a:lvl9pPr>
   </p:defaultTextStyle>
-  <p:extLst>
-    <p:ext uri="{EFAFB233-063F-42B5-8137-9DF3F51BA10A}">
-      <p15:sldGuideLst xmlns:p15="http://schemas.microsoft.com/office/powerpoint/2012/main"/>
-    </p:ext>
-  </p:extLst>
 </p:presentation>
 </file>
 
@@ -140,10 +135,234 @@
           <a:chExt cx="0" cy="0"/>
         </a:xfrm>
       </p:grpSpPr>
+      <p:sp>
+        <p:nvSpPr>
+          <p:cNvPr id="2" name="Header Placeholder 1"/>
+          <p:cNvSpPr>
+            <a:spLocks noGrp="1"/>
+          </p:cNvSpPr>
+          <p:nvPr>
+            <p:ph type="hdr" sz="quarter"/>
+          </p:nvPr>
+        </p:nvSpPr>
+        <p:spPr>
+          <a:xfrm>
+            <a:off x="0" y="0"/>
+            <a:ext cx="2971800" cy="458788"/>
+          </a:xfrm>
+          <a:prstGeom prst="rect">
+            <a:avLst/>
+          </a:prstGeom>
+        </p:spPr>
+        <p:txBody>
+          <a:bodyPr vert="horz" lIns="91440" tIns="45720" rIns="91440" bIns="45720" rtlCol="0"/>
+          <a:lstStyle>
+            <a:lvl1pPr algn="l">
+              <a:defRPr sz="1200"/>
+            </a:lvl1pPr>
+          </a:lstStyle>
+          <a:p>
+            <a:endParaRPr lang="en-US"/>
+          </a:p>
+        </p:txBody>
+      </p:sp>
+      <p:sp>
+        <p:nvSpPr>
+          <p:cNvPr id="3" name="Date Placeholder 2"/>
+          <p:cNvSpPr>
+            <a:spLocks noGrp="1"/>
+          </p:cNvSpPr>
+          <p:nvPr>
+            <p:ph type="dt" idx="1"/>
+          </p:nvPr>
+        </p:nvSpPr>
+        <p:spPr>
+          <a:xfrm>
+            <a:off x="3884613" y="0"/>
+            <a:ext cx="2971800" cy="458788"/>
+          </a:xfrm>
+          <a:prstGeom prst="rect">
+            <a:avLst/>
+          </a:prstGeom>
+        </p:spPr>
+        <p:txBody>
+          <a:bodyPr vert="horz" lIns="91440" tIns="45720" rIns="91440" bIns="45720" rtlCol="0"/>
+          <a:lstStyle>
+            <a:lvl1pPr algn="r">
+              <a:defRPr sz="1200"/>
+            </a:lvl1pPr>
+          </a:lstStyle>
+          <a:p>
+            <a:fld id="{5282F153-3F37-0F45-9E97-73ACFA13230C}" type="datetimeFigureOut">
+              <a:rPr lang="en-US"/>
+              <a:t>7/23/19</a:t>
+            </a:fld>
+            <a:endParaRPr lang="en-US"/>
+          </a:p>
+        </p:txBody>
+      </p:sp>
+      <p:sp>
+        <p:nvSpPr>
+          <p:cNvPr id="4" name="Slide Image Placeholder 3"/>
+          <p:cNvSpPr>
+            <a:spLocks noGrp="1" noRot="1" noChangeAspect="1"/>
+          </p:cNvSpPr>
+          <p:nvPr>
+            <p:ph type="sldImg" idx="2"/>
+          </p:nvPr>
+        </p:nvSpPr>
+        <p:spPr>
+          <a:xfrm>
+            <a:off x="685800" y="1143000"/>
+            <a:ext cx="5486400" cy="3086100"/>
+          </a:xfrm>
+          <a:prstGeom prst="rect">
+            <a:avLst/>
+          </a:prstGeom>
+          <a:noFill/>
+          <a:ln w="12700">
+            <a:solidFill>
+              <a:prstClr val="black"/>
+            </a:solidFill>
+          </a:ln>
+        </p:spPr>
+        <p:txBody>
+          <a:bodyPr vert="horz" lIns="91440" tIns="45720" rIns="91440" bIns="45720" rtlCol="0" anchor="ctr"/>
+          <a:lstStyle/>
+          <a:p>
+            <a:endParaRPr lang="en-US"/>
+          </a:p>
+        </p:txBody>
+      </p:sp>
+      <p:sp>
+        <p:nvSpPr>
+          <p:cNvPr id="5" name="Notes Placeholder 4"/>
+          <p:cNvSpPr>
+            <a:spLocks noGrp="1"/>
+          </p:cNvSpPr>
+          <p:nvPr>
+            <p:ph type="body" sz="quarter" idx="3"/>
+          </p:nvPr>
+        </p:nvSpPr>
+        <p:spPr>
+          <a:xfrm>
+            <a:off x="685800" y="4400550"/>
+            <a:ext cx="5486400" cy="3600450"/>
+          </a:xfrm>
+          <a:prstGeom prst="rect">
+            <a:avLst/>
+          </a:prstGeom>
+        </p:spPr>
+        <p:txBody>
+          <a:bodyPr vert="horz" lIns="91440" tIns="45720" rIns="91440" bIns="45720" rtlCol="0"/>
+          <a:lstStyle/>
+          <a:p>
+            <a:pPr lvl="0"/>
+            <a:r>
+              <a:rPr lang="en-US"/>
+              <a:t>Click to edit Master text styles</a:t>
+            </a:r>
+          </a:p>
+          <a:p>
+            <a:pPr lvl="1"/>
+            <a:r>
+              <a:rPr lang="en-US"/>
+              <a:t>Second level</a:t>
+            </a:r>
+          </a:p>
+          <a:p>
+            <a:pPr lvl="2"/>
+            <a:r>
+              <a:rPr lang="en-US"/>
+              <a:t>Third level</a:t>
+            </a:r>
+          </a:p>
+          <a:p>
+            <a:pPr lvl="3"/>
+            <a:r>
+              <a:rPr lang="en-US"/>
+              <a:t>Fourth level</a:t>
+            </a:r>
+          </a:p>
+          <a:p>
+            <a:pPr lvl="4"/>
+            <a:r>
+              <a:rPr lang="en-US"/>
+              <a:t>Fifth level</a:t>
+            </a:r>
+          </a:p>
+        </p:txBody>
+      </p:sp>
+      <p:sp>
+        <p:nvSpPr>
+          <p:cNvPr id="6" name="Footer Placeholder 5"/>
+          <p:cNvSpPr>
+            <a:spLocks noGrp="1"/>
+          </p:cNvSpPr>
+          <p:nvPr>
+            <p:ph type="ftr" sz="quarter" idx="4"/>
+          </p:nvPr>
+        </p:nvSpPr>
+        <p:spPr>
+          <a:xfrm>
+            <a:off x="0" y="8685213"/>
+            <a:ext cx="2971800" cy="458787"/>
+          </a:xfrm>
+          <a:prstGeom prst="rect">
+            <a:avLst/>
+          </a:prstGeom>
+        </p:spPr>
+        <p:txBody>
+          <a:bodyPr vert="horz" lIns="91440" tIns="45720" rIns="91440" bIns="45720" rtlCol="0" anchor="b"/>
+          <a:lstStyle>
+            <a:lvl1pPr algn="l">
+              <a:defRPr sz="1200"/>
+            </a:lvl1pPr>
+          </a:lstStyle>
+          <a:p>
+            <a:endParaRPr lang="en-US"/>
+          </a:p>
+        </p:txBody>
+      </p:sp>
+      <p:sp>
+        <p:nvSpPr>
+          <p:cNvPr id="7" name="Slide Number Placeholder 6"/>
+          <p:cNvSpPr>
+            <a:spLocks noGrp="1"/>
+          </p:cNvSpPr>
+          <p:nvPr>
+            <p:ph type="sldNum" sz="quarter" idx="5"/>
+          </p:nvPr>
+        </p:nvSpPr>
+        <p:spPr>
+          <a:xfrm>
+            <a:off x="3884613" y="8685213"/>
+            <a:ext cx="2971800" cy="458787"/>
+          </a:xfrm>
+          <a:prstGeom prst="rect">
+            <a:avLst/>
+          </a:prstGeom>
+        </p:spPr>
+        <p:txBody>
+          <a:bodyPr vert="horz" lIns="91440" tIns="45720" rIns="91440" bIns="45720" rtlCol="0" anchor="b"/>
+          <a:lstStyle>
+            <a:lvl1pPr algn="r">
+              <a:defRPr sz="1200"/>
+            </a:lvl1pPr>
+          </a:lstStyle>
+          <a:p>
+            <a:fld id="{CE5E9CC1-C706-0F49-92D6-E571CC5EEA8F}" type="slidenum">
+              <a:rPr lang="en-US"/>
+              <a:t>‹#›</a:t>
+            </a:fld>
+            <a:endParaRPr lang="en-US"/>
+          </a:p>
+        </p:txBody>
+      </p:sp>
     </p:spTree>
     <p:extLst>
       <p:ext uri="{BB962C8B-B14F-4D97-AF65-F5344CB8AC3E}">
-        <p14:creationId xmlns:p14="http://schemas.microsoft.com/office/powerpoint/2010/main" val="3476162427"/>
+        <p14:creationId xmlns:p14="http://schemas.microsoft.com/office/powerpoint/2010/main" val="1024086991"/>
       </p:ext>
     </p:extLst>
   </p:cSld>
@@ -287,6 +506,10 @@
           <a:bodyPr/>
           <a:lstStyle/>
           <a:p>
+            <a:r>
+              <a:rPr lang="en-US" dirty="0"/>
+              <a:t/>
+            </a:r>
             <a:endParaRPr lang="en-US" dirty="0"/>
           </a:p>
         </p:txBody>
@@ -371,6 +594,10 @@
           <a:bodyPr/>
           <a:lstStyle/>
           <a:p>
+            <a:r>
+              <a:rPr lang="en-US" dirty="0"/>
+              <a:t/>
+            </a:r>
             <a:endParaRPr lang="en-US" dirty="0"/>
           </a:p>
         </p:txBody>
@@ -455,6 +682,10 @@
           <a:bodyPr/>
           <a:lstStyle/>
           <a:p>
+            <a:r>
+              <a:rPr lang="en-US" dirty="0"/>
+              <a:t/>
+            </a:r>
             <a:endParaRPr lang="en-US" dirty="0"/>
           </a:p>
         </p:txBody>
@@ -539,6 +770,10 @@
           <a:bodyPr/>
           <a:lstStyle/>
           <a:p>
+            <a:r>
+              <a:rPr lang="en-US" dirty="0"/>
+              <a:t/>
+            </a:r>
             <a:endParaRPr lang="en-US" dirty="0"/>
           </a:p>
         </p:txBody>
@@ -623,6 +858,10 @@
           <a:bodyPr/>
           <a:lstStyle/>
           <a:p>
+            <a:r>
+              <a:rPr lang="en-US" dirty="0"/>
+              <a:t/>
+            </a:r>
             <a:endParaRPr lang="en-US" dirty="0"/>
           </a:p>
         </p:txBody>
@@ -707,6 +946,10 @@
           <a:bodyPr/>
           <a:lstStyle/>
           <a:p>
+            <a:r>
+              <a:rPr lang="en-US" dirty="0"/>
+              <a:t/>
+            </a:r>
             <a:endParaRPr lang="en-US" dirty="0"/>
           </a:p>
         </p:txBody>
@@ -791,6 +1034,10 @@
           <a:bodyPr/>
           <a:lstStyle/>
           <a:p>
+            <a:r>
+              <a:rPr lang="en-US" dirty="0"/>
+              <a:t/>
+            </a:r>
             <a:endParaRPr lang="en-US" dirty="0"/>
           </a:p>
         </p:txBody>
@@ -864,11 +1111,6 @@
 <file path=ppt/slideMasters/slideMaster1.xml><?xml version="1.0" encoding="utf-8"?>
 <p:sldMaster xmlns:a="http://schemas.openxmlformats.org/drawingml/2006/main" xmlns:r="http://schemas.openxmlformats.org/officeDocument/2006/relationships" xmlns:p="http://schemas.openxmlformats.org/presentationml/2006/main">
   <p:cSld>
-    <p:bg>
-      <p:bgRef idx="1001">
-        <a:schemeClr val="bg1"/>
-      </p:bgRef>
-    </p:bg>
     <p:spTree>
       <p:nvGrpSpPr>
         <p:cNvPr id="1" name=""/>
@@ -1149,9 +1391,8 @@
     <p:bg>
       <p:bgPr>
         <a:solidFill>
-          <a:srgbClr val="10263B"/>
+          <a:srgbClr val="1E1E1E"/>
         </a:solidFill>
-        <a:effectLst/>
       </p:bgPr>
     </p:bg>
     <p:spTree>
@@ -1183,13 +1424,13 @@
             <a:avLst/>
           </a:prstGeom>
           <a:solidFill>
-            <a:srgbClr val="0F8B8D">
+            <a:srgbClr val="4A4A4A">
               <a:alpha val="40000"/>
             </a:srgbClr>
           </a:solidFill>
           <a:ln w="12700">
             <a:solidFill>
-              <a:srgbClr val="0F8B8D">
+              <a:srgbClr val="4A4A4A">
                 <a:alpha val="0"/>
               </a:srgbClr>
             </a:solidFill>
@@ -1212,13 +1453,13 @@
             <a:avLst/>
           </a:prstGeom>
           <a:solidFill>
-            <a:srgbClr val="F2A541">
+            <a:srgbClr val="BDBDBD">
               <a:alpha val="25000"/>
             </a:srgbClr>
           </a:solidFill>
           <a:ln w="12700">
             <a:solidFill>
-              <a:srgbClr val="F2A541">
+              <a:srgbClr val="BDBDBD">
                 <a:alpha val="0"/>
               </a:srgbClr>
             </a:solidFill>
@@ -1228,6 +1469,45 @@
       </p:sp>
       <p:sp>
         <p:nvSpPr>
+          <p:cNvPr id="4" name="Text 2"/>
+          <p:cNvSpPr txBox="1"/>
+          <p:nvPr/>
+        </p:nvSpPr>
+        <p:spPr>
+          <a:xfrm>
+            <a:off x="731520" y="822960"/>
+            <a:ext cx="7315200" cy="320040"/>
+          </a:xfrm>
+          <a:prstGeom prst="rect">
+            <a:avLst/>
+          </a:prstGeom>
+          <a:noFill/>
+          <a:ln/>
+        </p:spPr>
+        <p:txBody>
+          <a:bodyPr wrap="square" lIns="0" tIns="0" rIns="0" bIns="0" rtlCol="0" anchor="ctr"/>
+          <a:lstStyle/>
+          <a:p>
+            <a:pPr indent="0" marL="0">
+              <a:buNone/>
+            </a:pPr>
+            <a:r>
+              <a:rPr lang="en-US" sz="1400" b="1" spc="300" kern="0" dirty="0">
+                <a:solidFill>
+                  <a:srgbClr val="BDBDBD"/>
+                </a:solidFill>
+                <a:latin typeface="Calibri" pitchFamily="34" charset="0"/>
+                <a:ea typeface="Calibri" pitchFamily="34" charset="-122"/>
+                <a:cs typeface="Calibri" pitchFamily="34" charset="-120"/>
+              </a:rPr>
+              <a:t>5TH SEMESTER CAPSTONE PROJECT</a:t>
+            </a:r>
+            <a:endParaRPr lang="en-US" sz="1400" dirty="0"/>
+          </a:p>
+        </p:txBody>
+      </p:sp>
+      <p:sp>
+        <p:nvSpPr>
           <p:cNvPr id="5" name="Text 3"/>
           <p:cNvSpPr txBox="1"/>
           <p:nvPr/>
@@ -1247,7 +1527,7 @@
           <a:bodyPr wrap="square" lIns="0" tIns="0" rIns="0" bIns="0" rtlCol="0" anchor="t"/>
           <a:lstStyle/>
           <a:p>
-            <a:pPr marL="0" indent="0">
+            <a:pPr indent="0" marL="0">
               <a:buNone/>
             </a:pPr>
             <a:r>
@@ -1259,7 +1539,7 @@
                 <a:ea typeface="Cambria" pitchFamily="34" charset="-122"/>
                 <a:cs typeface="Cambria" pitchFamily="34" charset="-120"/>
               </a:rPr>
-              <a:t>Retail Inventory Management System</a:t>
+              <a:t>Retail Inventory &amp; Supply Chain ERP System</a:t>
             </a:r>
             <a:endParaRPr lang="en-US" sz="4600" dirty="0"/>
           </a:p>
@@ -1286,13 +1566,13 @@
           <a:bodyPr wrap="square" lIns="0" tIns="0" rIns="0" bIns="0" rtlCol="0" anchor="ctr"/>
           <a:lstStyle/>
           <a:p>
-            <a:pPr marL="0" indent="0">
+            <a:pPr indent="0" marL="0">
               <a:buNone/>
             </a:pPr>
             <a:r>
               <a:rPr lang="en-US" sz="1800" dirty="0">
                 <a:solidFill>
-                  <a:srgbClr val="CADCFC"/>
+                  <a:srgbClr val="D0D0D0"/>
                 </a:solidFill>
                 <a:latin typeface="Calibri" pitchFamily="34" charset="0"/>
                 <a:ea typeface="Calibri" pitchFamily="34" charset="-122"/>
@@ -1321,11 +1601,11 @@
             </a:avLst>
           </a:prstGeom>
           <a:solidFill>
-            <a:srgbClr val="1C4463"/>
+            <a:srgbClr val="3A3A3A"/>
           </a:solidFill>
           <a:ln w="12700">
             <a:solidFill>
-              <a:srgbClr val="2F6A8E"/>
+              <a:srgbClr val="6A6A6A"/>
             </a:solidFill>
             <a:prstDash val="solid"/>
           </a:ln>
@@ -1352,7 +1632,7 @@
           <a:bodyPr wrap="square" lIns="0" tIns="0" rIns="0" bIns="0" rtlCol="0" anchor="ctr"/>
           <a:lstStyle/>
           <a:p>
-            <a:pPr marL="0" indent="0" algn="ctr">
+            <a:pPr algn="ctr" indent="0" marL="0">
               <a:buNone/>
             </a:pPr>
             <a:r>
@@ -1387,11 +1667,11 @@
             </a:avLst>
           </a:prstGeom>
           <a:solidFill>
-            <a:srgbClr val="1C4463"/>
+            <a:srgbClr val="3A3A3A"/>
           </a:solidFill>
           <a:ln w="12700">
             <a:solidFill>
-              <a:srgbClr val="2F6A8E"/>
+              <a:srgbClr val="6A6A6A"/>
             </a:solidFill>
             <a:prstDash val="solid"/>
           </a:ln>
@@ -1418,7 +1698,7 @@
           <a:bodyPr wrap="square" lIns="0" tIns="0" rIns="0" bIns="0" rtlCol="0" anchor="ctr"/>
           <a:lstStyle/>
           <a:p>
-            <a:pPr marL="0" indent="0" algn="ctr">
+            <a:pPr algn="ctr" indent="0" marL="0">
               <a:buNone/>
             </a:pPr>
             <a:r>
@@ -1453,11 +1733,11 @@
             </a:avLst>
           </a:prstGeom>
           <a:solidFill>
-            <a:srgbClr val="1C4463"/>
+            <a:srgbClr val="3A3A3A"/>
           </a:solidFill>
           <a:ln w="12700">
             <a:solidFill>
-              <a:srgbClr val="2F6A8E"/>
+              <a:srgbClr val="6A6A6A"/>
             </a:solidFill>
             <a:prstDash val="solid"/>
           </a:ln>
@@ -1484,7 +1764,7 @@
           <a:bodyPr wrap="square" lIns="0" tIns="0" rIns="0" bIns="0" rtlCol="0" anchor="ctr"/>
           <a:lstStyle/>
           <a:p>
-            <a:pPr marL="0" indent="0" algn="ctr">
+            <a:pPr algn="ctr" indent="0" marL="0">
               <a:buNone/>
             </a:pPr>
             <a:r>
@@ -1519,11 +1799,11 @@
             </a:avLst>
           </a:prstGeom>
           <a:solidFill>
-            <a:srgbClr val="1C4463"/>
+            <a:srgbClr val="3A3A3A"/>
           </a:solidFill>
           <a:ln w="12700">
             <a:solidFill>
-              <a:srgbClr val="2F6A8E"/>
+              <a:srgbClr val="6A6A6A"/>
             </a:solidFill>
             <a:prstDash val="solid"/>
           </a:ln>
@@ -1550,7 +1830,7 @@
           <a:bodyPr wrap="square" lIns="0" tIns="0" rIns="0" bIns="0" rtlCol="0" anchor="ctr"/>
           <a:lstStyle/>
           <a:p>
-            <a:pPr marL="0" indent="0" algn="ctr">
+            <a:pPr algn="ctr" indent="0" marL="0">
               <a:buNone/>
             </a:pPr>
             <a:r>
@@ -1585,11 +1865,11 @@
             </a:avLst>
           </a:prstGeom>
           <a:solidFill>
-            <a:srgbClr val="1C4463"/>
+            <a:srgbClr val="3A3A3A"/>
           </a:solidFill>
           <a:ln w="12700">
             <a:solidFill>
-              <a:srgbClr val="2F6A8E"/>
+              <a:srgbClr val="6A6A6A"/>
             </a:solidFill>
             <a:prstDash val="solid"/>
           </a:ln>
@@ -1616,7 +1896,7 @@
           <a:bodyPr wrap="square" lIns="0" tIns="0" rIns="0" bIns="0" rtlCol="0" anchor="ctr"/>
           <a:lstStyle/>
           <a:p>
-            <a:pPr marL="0" indent="0" algn="ctr">
+            <a:pPr algn="ctr" indent="0" marL="0">
               <a:buNone/>
             </a:pPr>
             <a:r>
@@ -1651,11 +1931,11 @@
             </a:avLst>
           </a:prstGeom>
           <a:solidFill>
-            <a:srgbClr val="1C4463"/>
+            <a:srgbClr val="3A3A3A"/>
           </a:solidFill>
           <a:ln w="12700">
             <a:solidFill>
-              <a:srgbClr val="1C4463"/>
+              <a:srgbClr val="3A3A3A"/>
             </a:solidFill>
             <a:prstDash val="solid"/>
           </a:ln>
@@ -1682,16 +1962,16 @@
           <a:bodyPr wrap="square" lIns="0" tIns="0" rIns="0" bIns="0" rtlCol="0" anchor="ctr"/>
           <a:lstStyle/>
           <a:p>
-            <a:pPr marL="0" indent="0">
+            <a:pPr indent="0" marL="0">
               <a:spcAft>
                 <a:spcPts val="300"/>
               </a:spcAft>
               <a:buNone/>
             </a:pPr>
             <a:r>
-              <a:rPr lang="en-US" sz="1100" b="1" kern="0" spc="200" dirty="0">
-                <a:solidFill>
-                  <a:srgbClr val="F2A541"/>
+              <a:rPr lang="en-US" sz="1100" b="1" spc="200" kern="0" dirty="0">
+                <a:solidFill>
+                  <a:srgbClr val="BDBDBD"/>
                 </a:solidFill>
                 <a:latin typeface="Calibri" pitchFamily="34" charset="0"/>
                 <a:ea typeface="Calibri" pitchFamily="34" charset="-122"/>
@@ -1702,7 +1982,7 @@
             <a:endParaRPr lang="en-US" sz="1100" dirty="0"/>
           </a:p>
           <a:p>
-            <a:pPr marL="0" indent="0">
+            <a:pPr indent="0" marL="0">
               <a:spcAft>
                 <a:spcPts val="300"/>
               </a:spcAft>
@@ -1717,12 +1997,12 @@
                 <a:ea typeface="Calibri" pitchFamily="34" charset="-122"/>
                 <a:cs typeface="Calibri" pitchFamily="34" charset="-120"/>
               </a:rPr>
-              <a:t>Ajit Kumar Saini | 2400320100114</a:t>
+              <a:t>Ajit Kumar Saini</a:t>
             </a:r>
             <a:endParaRPr lang="en-US" sz="1100" dirty="0"/>
           </a:p>
           <a:p>
-            <a:pPr marL="0" indent="0">
+            <a:pPr indent="0" marL="0">
               <a:spcAft>
                 <a:spcPts val="300"/>
               </a:spcAft>
@@ -1731,7 +2011,7 @@
             <a:r>
               <a:rPr lang="en-US" sz="1300" dirty="0">
                 <a:solidFill>
-                  <a:srgbClr val="CADCFC"/>
+                  <a:srgbClr val="D0D0D0"/>
                 </a:solidFill>
                 <a:latin typeface="Calibri" pitchFamily="34" charset="0"/>
                 <a:ea typeface="Calibri" pitchFamily="34" charset="-122"/>
@@ -1760,11 +2040,11 @@
             </a:avLst>
           </a:prstGeom>
           <a:solidFill>
-            <a:srgbClr val="1C4463"/>
+            <a:srgbClr val="3A3A3A"/>
           </a:solidFill>
           <a:ln w="12700">
             <a:solidFill>
-              <a:srgbClr val="1C4463"/>
+              <a:srgbClr val="3A3A3A"/>
             </a:solidFill>
             <a:prstDash val="solid"/>
           </a:ln>
@@ -1791,16 +2071,16 @@
           <a:bodyPr wrap="square" lIns="0" tIns="0" rIns="0" bIns="0" rtlCol="0" anchor="ctr"/>
           <a:lstStyle/>
           <a:p>
-            <a:pPr marL="0" indent="0">
+            <a:pPr indent="0" marL="0">
               <a:spcAft>
                 <a:spcPts val="300"/>
               </a:spcAft>
               <a:buNone/>
             </a:pPr>
             <a:r>
-              <a:rPr lang="en-US" sz="1100" b="1" kern="0" spc="200" dirty="0">
-                <a:solidFill>
-                  <a:srgbClr val="F2A541"/>
+              <a:rPr lang="en-US" sz="1100" b="1" spc="200" kern="0" dirty="0">
+                <a:solidFill>
+                  <a:srgbClr val="BDBDBD"/>
                 </a:solidFill>
                 <a:latin typeface="Calibri" pitchFamily="34" charset="0"/>
                 <a:ea typeface="Calibri" pitchFamily="34" charset="-122"/>
@@ -1811,7 +2091,7 @@
             <a:endParaRPr lang="en-US" sz="1100" dirty="0"/>
           </a:p>
           <a:p>
-            <a:pPr marL="0" indent="0">
+            <a:pPr indent="0" marL="0">
               <a:spcAft>
                 <a:spcPts val="300"/>
               </a:spcAft>
@@ -1831,7 +2111,7 @@
             <a:endParaRPr lang="en-US" sz="1100" dirty="0"/>
           </a:p>
           <a:p>
-            <a:pPr marL="0" indent="0">
+            <a:pPr indent="0" marL="0">
               <a:spcAft>
                 <a:spcPts val="300"/>
               </a:spcAft>
@@ -1840,13 +2120,13 @@
             <a:r>
               <a:rPr lang="en-US" sz="1300" dirty="0">
                 <a:solidFill>
-                  <a:srgbClr val="CADCFC"/>
-                </a:solidFill>
-                <a:latin typeface="Calibri" pitchFamily="34" charset="0"/>
-                <a:ea typeface="Calibri" pitchFamily="34" charset="-122"/>
-                <a:cs typeface="Calibri" pitchFamily="34" charset="-120"/>
-              </a:rPr>
-              <a:t>Faculty Guide </a:t>
+                  <a:srgbClr val="D0D0D0"/>
+                </a:solidFill>
+                <a:latin typeface="Calibri" pitchFamily="34" charset="0"/>
+                <a:ea typeface="Calibri" pitchFamily="34" charset="-122"/>
+                <a:cs typeface="Calibri" pitchFamily="34" charset="-120"/>
+              </a:rPr>
+              <a:t>Faculty Guide · Dept. of Computer Science &amp; Engineering</a:t>
             </a:r>
             <a:endParaRPr lang="en-US" sz="1100" dirty="0"/>
           </a:p>
@@ -1866,9 +2146,8 @@
     <p:bg>
       <p:bgPr>
         <a:solidFill>
-          <a:srgbClr val="F6F8FA"/>
+          <a:srgbClr val="F5F5F5"/>
         </a:solidFill>
-        <a:effectLst/>
       </p:bgPr>
     </p:bg>
     <p:spTree>
@@ -1906,13 +2185,13 @@
           <a:bodyPr wrap="square" lIns="0" tIns="0" rIns="0" bIns="0" rtlCol="0" anchor="ctr"/>
           <a:lstStyle/>
           <a:p>
-            <a:pPr marL="0" indent="0">
-              <a:buNone/>
-            </a:pPr>
-            <a:r>
-              <a:rPr lang="en-US" sz="1200" b="1" kern="0" spc="200" dirty="0">
-                <a:solidFill>
-                  <a:srgbClr val="0F8B8D"/>
+            <a:pPr indent="0" marL="0">
+              <a:buNone/>
+            </a:pPr>
+            <a:r>
+              <a:rPr lang="en-US" sz="1200" b="1" spc="200" kern="0" dirty="0">
+                <a:solidFill>
+                  <a:srgbClr val="4A4A4A"/>
                 </a:solidFill>
                 <a:latin typeface="Calibri" pitchFamily="34" charset="0"/>
                 <a:ea typeface="Calibri" pitchFamily="34" charset="-122"/>
@@ -1945,13 +2224,13 @@
           <a:bodyPr wrap="square" lIns="0" tIns="0" rIns="0" bIns="0" rtlCol="0" anchor="ctr"/>
           <a:lstStyle/>
           <a:p>
-            <a:pPr marL="0" indent="0">
+            <a:pPr indent="0" marL="0">
               <a:buNone/>
             </a:pPr>
             <a:r>
               <a:rPr lang="en-US" sz="3000" b="1" dirty="0">
                 <a:solidFill>
-                  <a:srgbClr val="10263B"/>
+                  <a:srgbClr val="1E1E1E"/>
                 </a:solidFill>
                 <a:latin typeface="Cambria" pitchFamily="34" charset="0"/>
                 <a:ea typeface="Cambria" pitchFamily="34" charset="-122"/>
@@ -1984,7 +2263,7 @@
           <a:bodyPr wrap="square" lIns="0" tIns="0" rIns="0" bIns="0" rtlCol="0" anchor="ctr"/>
           <a:lstStyle/>
           <a:p>
-            <a:pPr marL="0" indent="0">
+            <a:pPr indent="0" marL="0">
               <a:buNone/>
             </a:pPr>
             <a:r>
@@ -2028,7 +2307,7 @@
             <a:prstDash val="solid"/>
           </a:ln>
           <a:effectLst>
-            <a:outerShdw blurRad="101600" dist="25400" dir="5400000" algn="bl" rotWithShape="0">
+            <a:outerShdw sx="100000" sy="100000" kx="0" ky="0" algn="bl" rotWithShape="0" blurRad="101600" dist="25400" dir="5400000">
               <a:srgbClr val="000000">
                 <a:alpha val="12000"/>
               </a:srgbClr>
@@ -2057,13 +2336,13 @@
           <a:bodyPr wrap="square" lIns="0" tIns="0" rIns="0" bIns="0" rtlCol="0" anchor="ctr"/>
           <a:lstStyle/>
           <a:p>
-            <a:pPr marL="0" indent="0">
-              <a:buNone/>
-            </a:pPr>
-            <a:r>
-              <a:rPr lang="en-US" sz="1300" b="1" kern="0" spc="200" dirty="0">
-                <a:solidFill>
-                  <a:srgbClr val="B83255"/>
+            <a:pPr indent="0" marL="0">
+              <a:buNone/>
+            </a:pPr>
+            <a:r>
+              <a:rPr lang="en-US" sz="1300" b="1" spc="200" kern="0" dirty="0">
+                <a:solidFill>
+                  <a:srgbClr val="2B2B2B"/>
                 </a:solidFill>
                 <a:latin typeface="Calibri" pitchFamily="34" charset="0"/>
                 <a:ea typeface="Calibri" pitchFamily="34" charset="-122"/>
@@ -2096,13 +2375,13 @@
           <a:bodyPr wrap="square" lIns="0" tIns="0" rIns="0" bIns="0" rtlCol="0" anchor="t"/>
           <a:lstStyle/>
           <a:p>
-            <a:pPr marL="0" indent="0">
+            <a:pPr indent="0" marL="0">
               <a:buNone/>
             </a:pPr>
             <a:r>
               <a:rPr lang="en-US" sz="1350" b="1" dirty="0">
                 <a:solidFill>
-                  <a:srgbClr val="B83255"/>
+                  <a:srgbClr val="2B2B2B"/>
                 </a:solidFill>
                 <a:latin typeface="Calibri" pitchFamily="34" charset="0"/>
                 <a:ea typeface="Calibri" pitchFamily="34" charset="-122"/>
@@ -2110,6 +2389,9 @@
               </a:rPr>
               <a:t>Fragmented records: </a:t>
             </a:r>
+            <a:pPr indent="0" marL="0">
+              <a:buNone/>
+            </a:pPr>
             <a:r>
               <a:rPr lang="en-US" sz="1350" dirty="0">
                 <a:solidFill>
@@ -2146,13 +2428,13 @@
           <a:bodyPr wrap="square" lIns="0" tIns="0" rIns="0" bIns="0" rtlCol="0" anchor="t"/>
           <a:lstStyle/>
           <a:p>
-            <a:pPr marL="0" indent="0">
+            <a:pPr indent="0" marL="0">
               <a:buNone/>
             </a:pPr>
             <a:r>
               <a:rPr lang="en-US" sz="1350" b="1" dirty="0">
                 <a:solidFill>
-                  <a:srgbClr val="B83255"/>
+                  <a:srgbClr val="2B2B2B"/>
                 </a:solidFill>
                 <a:latin typeface="Calibri" pitchFamily="34" charset="0"/>
                 <a:ea typeface="Calibri" pitchFamily="34" charset="-122"/>
@@ -2160,6 +2442,9 @@
               </a:rPr>
               <a:t>Stockouts &amp; holding costs: </a:t>
             </a:r>
+            <a:pPr indent="0" marL="0">
+              <a:buNone/>
+            </a:pPr>
             <a:r>
               <a:rPr lang="en-US" sz="1350" dirty="0">
                 <a:solidFill>
@@ -2196,13 +2481,13 @@
           <a:bodyPr wrap="square" lIns="0" tIns="0" rIns="0" bIns="0" rtlCol="0" anchor="t"/>
           <a:lstStyle/>
           <a:p>
-            <a:pPr marL="0" indent="0">
+            <a:pPr indent="0" marL="0">
               <a:buNone/>
             </a:pPr>
             <a:r>
               <a:rPr lang="en-US" sz="1350" b="1" dirty="0">
                 <a:solidFill>
-                  <a:srgbClr val="B83255"/>
+                  <a:srgbClr val="2B2B2B"/>
                 </a:solidFill>
                 <a:latin typeface="Calibri" pitchFamily="34" charset="0"/>
                 <a:ea typeface="Calibri" pitchFamily="34" charset="-122"/>
@@ -2210,6 +2495,9 @@
               </a:rPr>
               <a:t>Warehouse blindspots: </a:t>
             </a:r>
+            <a:pPr indent="0" marL="0">
+              <a:buNone/>
+            </a:pPr>
             <a:r>
               <a:rPr lang="en-US" sz="1350" dirty="0">
                 <a:solidFill>
@@ -2246,13 +2534,13 @@
           <a:bodyPr wrap="square" lIns="0" tIns="0" rIns="0" bIns="0" rtlCol="0" anchor="t"/>
           <a:lstStyle/>
           <a:p>
-            <a:pPr marL="0" indent="0">
+            <a:pPr indent="0" marL="0">
               <a:buNone/>
             </a:pPr>
             <a:r>
               <a:rPr lang="en-US" sz="1350" b="1" dirty="0">
                 <a:solidFill>
-                  <a:srgbClr val="B83255"/>
+                  <a:srgbClr val="2B2B2B"/>
                 </a:solidFill>
                 <a:latin typeface="Calibri" pitchFamily="34" charset="0"/>
                 <a:ea typeface="Calibri" pitchFamily="34" charset="-122"/>
@@ -2260,6 +2548,9 @@
               </a:rPr>
               <a:t>Unregulated access: </a:t>
             </a:r>
+            <a:pPr indent="0" marL="0">
+              <a:buNone/>
+            </a:pPr>
             <a:r>
               <a:rPr lang="en-US" sz="1350" dirty="0">
                 <a:solidFill>
@@ -2301,7 +2592,7 @@
             <a:prstDash val="solid"/>
           </a:ln>
           <a:effectLst>
-            <a:outerShdw blurRad="101600" dist="25400" dir="5400000" algn="bl" rotWithShape="0">
+            <a:outerShdw sx="100000" sy="100000" kx="0" ky="0" algn="bl" rotWithShape="0" blurRad="101600" dist="25400" dir="5400000">
               <a:srgbClr val="000000">
                 <a:alpha val="12000"/>
               </a:srgbClr>
@@ -2330,13 +2621,13 @@
           <a:bodyPr wrap="square" lIns="0" tIns="0" rIns="0" bIns="0" rtlCol="0" anchor="ctr"/>
           <a:lstStyle/>
           <a:p>
-            <a:pPr marL="0" indent="0">
-              <a:buNone/>
-            </a:pPr>
-            <a:r>
-              <a:rPr lang="en-US" sz="1300" b="1" kern="0" spc="200" dirty="0">
-                <a:solidFill>
-                  <a:srgbClr val="0F8B8D"/>
+            <a:pPr indent="0" marL="0">
+              <a:buNone/>
+            </a:pPr>
+            <a:r>
+              <a:rPr lang="en-US" sz="1300" b="1" spc="200" kern="0" dirty="0">
+                <a:solidFill>
+                  <a:srgbClr val="4A4A4A"/>
                 </a:solidFill>
                 <a:latin typeface="Calibri" pitchFamily="34" charset="0"/>
                 <a:ea typeface="Calibri" pitchFamily="34" charset="-122"/>
@@ -2363,11 +2654,11 @@
             <a:avLst/>
           </a:prstGeom>
           <a:solidFill>
-            <a:srgbClr val="0F8B8D"/>
+            <a:srgbClr val="4A4A4A"/>
           </a:solidFill>
           <a:ln w="12700">
             <a:solidFill>
-              <a:srgbClr val="0F8B8D"/>
+              <a:srgbClr val="4A4A4A"/>
             </a:solidFill>
             <a:prstDash val="solid"/>
           </a:ln>
@@ -2394,7 +2685,7 @@
           <a:bodyPr wrap="square" lIns="0" tIns="0" rIns="0" bIns="0" rtlCol="0" anchor="ctr"/>
           <a:lstStyle/>
           <a:p>
-            <a:pPr marL="0" indent="0" algn="ctr">
+            <a:pPr algn="ctr" indent="0" marL="0">
               <a:buNone/>
             </a:pPr>
             <a:r>
@@ -2433,13 +2724,13 @@
           <a:bodyPr wrap="square" lIns="0" tIns="0" rIns="0" bIns="0" rtlCol="0" anchor="t"/>
           <a:lstStyle/>
           <a:p>
-            <a:pPr marL="0" indent="0">
+            <a:pPr indent="0" marL="0">
               <a:buNone/>
             </a:pPr>
             <a:r>
               <a:rPr lang="en-US" sz="1500" b="1" dirty="0">
                 <a:solidFill>
-                  <a:srgbClr val="10263B"/>
+                  <a:srgbClr val="1E1E1E"/>
                 </a:solidFill>
                 <a:latin typeface="Calibri" pitchFamily="34" charset="0"/>
                 <a:ea typeface="Calibri" pitchFamily="34" charset="-122"/>
@@ -2450,7 +2741,7 @@
             <a:endParaRPr lang="en-US" sz="1500" dirty="0"/>
           </a:p>
           <a:p>
-            <a:pPr marL="0" indent="0">
+            <a:pPr indent="0" marL="0">
               <a:buNone/>
             </a:pPr>
             <a:r>
@@ -2483,11 +2774,11 @@
             <a:avLst/>
           </a:prstGeom>
           <a:solidFill>
-            <a:srgbClr val="0F8B8D"/>
+            <a:srgbClr val="4A4A4A"/>
           </a:solidFill>
           <a:ln w="12700">
             <a:solidFill>
-              <a:srgbClr val="0F8B8D"/>
+              <a:srgbClr val="4A4A4A"/>
             </a:solidFill>
             <a:prstDash val="solid"/>
           </a:ln>
@@ -2514,7 +2805,7 @@
           <a:bodyPr wrap="square" lIns="0" tIns="0" rIns="0" bIns="0" rtlCol="0" anchor="ctr"/>
           <a:lstStyle/>
           <a:p>
-            <a:pPr marL="0" indent="0" algn="ctr">
+            <a:pPr algn="ctr" indent="0" marL="0">
               <a:buNone/>
             </a:pPr>
             <a:r>
@@ -2553,13 +2844,13 @@
           <a:bodyPr wrap="square" lIns="0" tIns="0" rIns="0" bIns="0" rtlCol="0" anchor="t"/>
           <a:lstStyle/>
           <a:p>
-            <a:pPr marL="0" indent="0">
+            <a:pPr indent="0" marL="0">
               <a:buNone/>
             </a:pPr>
             <a:r>
               <a:rPr lang="en-US" sz="1500" b="1" dirty="0">
                 <a:solidFill>
-                  <a:srgbClr val="10263B"/>
+                  <a:srgbClr val="1E1E1E"/>
                 </a:solidFill>
                 <a:latin typeface="Calibri" pitchFamily="34" charset="0"/>
                 <a:ea typeface="Calibri" pitchFamily="34" charset="-122"/>
@@ -2570,7 +2861,7 @@
             <a:endParaRPr lang="en-US" sz="1500" dirty="0"/>
           </a:p>
           <a:p>
-            <a:pPr marL="0" indent="0">
+            <a:pPr indent="0" marL="0">
               <a:buNone/>
             </a:pPr>
             <a:r>
@@ -2603,11 +2894,11 @@
             <a:avLst/>
           </a:prstGeom>
           <a:solidFill>
-            <a:srgbClr val="0F8B8D"/>
+            <a:srgbClr val="4A4A4A"/>
           </a:solidFill>
           <a:ln w="12700">
             <a:solidFill>
-              <a:srgbClr val="0F8B8D"/>
+              <a:srgbClr val="4A4A4A"/>
             </a:solidFill>
             <a:prstDash val="solid"/>
           </a:ln>
@@ -2634,7 +2925,7 @@
           <a:bodyPr wrap="square" lIns="0" tIns="0" rIns="0" bIns="0" rtlCol="0" anchor="ctr"/>
           <a:lstStyle/>
           <a:p>
-            <a:pPr marL="0" indent="0" algn="ctr">
+            <a:pPr algn="ctr" indent="0" marL="0">
               <a:buNone/>
             </a:pPr>
             <a:r>
@@ -2673,13 +2964,13 @@
           <a:bodyPr wrap="square" lIns="0" tIns="0" rIns="0" bIns="0" rtlCol="0" anchor="t"/>
           <a:lstStyle/>
           <a:p>
-            <a:pPr marL="0" indent="0">
+            <a:pPr indent="0" marL="0">
               <a:buNone/>
             </a:pPr>
             <a:r>
               <a:rPr lang="en-US" sz="1500" b="1" dirty="0">
                 <a:solidFill>
-                  <a:srgbClr val="10263B"/>
+                  <a:srgbClr val="1E1E1E"/>
                 </a:solidFill>
                 <a:latin typeface="Calibri" pitchFamily="34" charset="0"/>
                 <a:ea typeface="Calibri" pitchFamily="34" charset="-122"/>
@@ -2690,7 +2981,7 @@
             <a:endParaRPr lang="en-US" sz="1500" dirty="0"/>
           </a:p>
           <a:p>
-            <a:pPr marL="0" indent="0">
+            <a:pPr indent="0" marL="0">
               <a:buNone/>
             </a:pPr>
             <a:r>
@@ -2723,11 +3014,11 @@
             <a:avLst/>
           </a:prstGeom>
           <a:solidFill>
-            <a:srgbClr val="0F8B8D"/>
+            <a:srgbClr val="4A4A4A"/>
           </a:solidFill>
           <a:ln w="12700">
             <a:solidFill>
-              <a:srgbClr val="0F8B8D"/>
+              <a:srgbClr val="4A4A4A"/>
             </a:solidFill>
             <a:prstDash val="solid"/>
           </a:ln>
@@ -2754,7 +3045,7 @@
           <a:bodyPr wrap="square" lIns="0" tIns="0" rIns="0" bIns="0" rtlCol="0" anchor="ctr"/>
           <a:lstStyle/>
           <a:p>
-            <a:pPr marL="0" indent="0" algn="ctr">
+            <a:pPr algn="ctr" indent="0" marL="0">
               <a:buNone/>
             </a:pPr>
             <a:r>
@@ -2793,13 +3084,13 @@
           <a:bodyPr wrap="square" lIns="0" tIns="0" rIns="0" bIns="0" rtlCol="0" anchor="t"/>
           <a:lstStyle/>
           <a:p>
-            <a:pPr marL="0" indent="0">
+            <a:pPr indent="0" marL="0">
               <a:buNone/>
             </a:pPr>
             <a:r>
               <a:rPr lang="en-US" sz="1500" b="1" dirty="0">
                 <a:solidFill>
-                  <a:srgbClr val="10263B"/>
+                  <a:srgbClr val="1E1E1E"/>
                 </a:solidFill>
                 <a:latin typeface="Calibri" pitchFamily="34" charset="0"/>
                 <a:ea typeface="Calibri" pitchFamily="34" charset="-122"/>
@@ -2810,7 +3101,7 @@
             <a:endParaRPr lang="en-US" sz="1500" dirty="0"/>
           </a:p>
           <a:p>
-            <a:pPr marL="0" indent="0">
+            <a:pPr indent="0" marL="0">
               <a:buNone/>
             </a:pPr>
             <a:r>
@@ -2842,9 +3133,8 @@
     <p:bg>
       <p:bgPr>
         <a:solidFill>
-          <a:srgbClr val="F6F8FA"/>
+          <a:srgbClr val="F5F5F5"/>
         </a:solidFill>
-        <a:effectLst/>
       </p:bgPr>
     </p:bg>
     <p:spTree>
@@ -2882,13 +3172,13 @@
           <a:bodyPr wrap="square" lIns="0" tIns="0" rIns="0" bIns="0" rtlCol="0" anchor="ctr"/>
           <a:lstStyle/>
           <a:p>
-            <a:pPr marL="0" indent="0">
-              <a:buNone/>
-            </a:pPr>
-            <a:r>
-              <a:rPr lang="en-US" sz="1200" b="1" kern="0" spc="200" dirty="0">
-                <a:solidFill>
-                  <a:srgbClr val="0F8B8D"/>
+            <a:pPr indent="0" marL="0">
+              <a:buNone/>
+            </a:pPr>
+            <a:r>
+              <a:rPr lang="en-US" sz="1200" b="1" spc="200" kern="0" dirty="0">
+                <a:solidFill>
+                  <a:srgbClr val="4A4A4A"/>
                 </a:solidFill>
                 <a:latin typeface="Calibri" pitchFamily="34" charset="0"/>
                 <a:ea typeface="Calibri" pitchFamily="34" charset="-122"/>
@@ -2921,13 +3211,13 @@
           <a:bodyPr wrap="square" lIns="0" tIns="0" rIns="0" bIns="0" rtlCol="0" anchor="ctr"/>
           <a:lstStyle/>
           <a:p>
-            <a:pPr marL="0" indent="0">
+            <a:pPr indent="0" marL="0">
               <a:buNone/>
             </a:pPr>
             <a:r>
               <a:rPr lang="en-US" sz="3000" b="1" dirty="0">
                 <a:solidFill>
-                  <a:srgbClr val="10263B"/>
+                  <a:srgbClr val="1E1E1E"/>
                 </a:solidFill>
                 <a:latin typeface="Cambria" pitchFamily="34" charset="0"/>
                 <a:ea typeface="Cambria" pitchFamily="34" charset="-122"/>
@@ -2960,7 +3250,7 @@
           <a:bodyPr wrap="square" lIns="0" tIns="0" rIns="0" bIns="0" rtlCol="0" anchor="ctr"/>
           <a:lstStyle/>
           <a:p>
-            <a:pPr marL="0" indent="0">
+            <a:pPr indent="0" marL="0">
               <a:buNone/>
             </a:pPr>
             <a:r>
@@ -3004,7 +3294,7 @@
             <a:prstDash val="solid"/>
           </a:ln>
           <a:effectLst>
-            <a:outerShdw blurRad="101600" dist="25400" dir="5400000" algn="bl" rotWithShape="0">
+            <a:outerShdw sx="100000" sy="100000" kx="0" ky="0" algn="bl" rotWithShape="0" blurRad="101600" dist="25400" dir="5400000">
               <a:srgbClr val="000000">
                 <a:alpha val="12000"/>
               </a:srgbClr>
@@ -3029,11 +3319,11 @@
             </a:avLst>
           </a:prstGeom>
           <a:solidFill>
-            <a:srgbClr val="0F8B8D"/>
+            <a:srgbClr val="4A4A4A"/>
           </a:solidFill>
           <a:ln w="12700">
             <a:solidFill>
-              <a:srgbClr val="0F8B8D"/>
+              <a:srgbClr val="4A4A4A"/>
             </a:solidFill>
             <a:prstDash val="solid"/>
           </a:ln>
@@ -3060,11 +3350,11 @@
           <a:bodyPr wrap="square" lIns="0" tIns="0" rIns="0" bIns="0" rtlCol="0" anchor="ctr"/>
           <a:lstStyle/>
           <a:p>
-            <a:pPr marL="0" indent="0" algn="ctr">
-              <a:buNone/>
-            </a:pPr>
-            <a:r>
-              <a:rPr lang="en-US" sz="1200" b="1" kern="0" spc="200" dirty="0">
+            <a:pPr algn="ctr" indent="0" marL="0">
+              <a:buNone/>
+            </a:pPr>
+            <a:r>
+              <a:rPr lang="en-US" sz="1200" b="1" spc="200" kern="0" dirty="0">
                 <a:solidFill>
                   <a:srgbClr val="FFFFFF"/>
                 </a:solidFill>
@@ -3099,13 +3389,13 @@
           <a:bodyPr wrap="square" lIns="0" tIns="0" rIns="0" bIns="0" rtlCol="0" anchor="ctr"/>
           <a:lstStyle/>
           <a:p>
-            <a:pPr marL="0" indent="0">
+            <a:pPr indent="0" marL="0">
               <a:buNone/>
             </a:pPr>
             <a:r>
               <a:rPr lang="en-US" sz="1900" b="1" dirty="0">
                 <a:solidFill>
-                  <a:srgbClr val="10263B"/>
+                  <a:srgbClr val="1E1E1E"/>
                 </a:solidFill>
                 <a:latin typeface="Cambria" pitchFamily="34" charset="0"/>
                 <a:ea typeface="Cambria" pitchFamily="34" charset="-122"/>
@@ -3270,7 +3560,7 @@
             <a:prstDash val="solid"/>
           </a:ln>
           <a:effectLst>
-            <a:outerShdw blurRad="101600" dist="25400" dir="5400000" algn="bl" rotWithShape="0">
+            <a:outerShdw sx="100000" sy="100000" kx="0" ky="0" algn="bl" rotWithShape="0" blurRad="101600" dist="25400" dir="5400000">
               <a:srgbClr val="000000">
                 <a:alpha val="12000"/>
               </a:srgbClr>
@@ -3295,11 +3585,11 @@
             </a:avLst>
           </a:prstGeom>
           <a:solidFill>
-            <a:srgbClr val="10263B"/>
+            <a:srgbClr val="1E1E1E"/>
           </a:solidFill>
           <a:ln w="12700">
             <a:solidFill>
-              <a:srgbClr val="10263B"/>
+              <a:srgbClr val="1E1E1E"/>
             </a:solidFill>
             <a:prstDash val="solid"/>
           </a:ln>
@@ -3326,11 +3616,11 @@
           <a:bodyPr wrap="square" lIns="0" tIns="0" rIns="0" bIns="0" rtlCol="0" anchor="ctr"/>
           <a:lstStyle/>
           <a:p>
-            <a:pPr marL="0" indent="0" algn="ctr">
-              <a:buNone/>
-            </a:pPr>
-            <a:r>
-              <a:rPr lang="en-US" sz="1200" b="1" kern="0" spc="200" dirty="0">
+            <a:pPr algn="ctr" indent="0" marL="0">
+              <a:buNone/>
+            </a:pPr>
+            <a:r>
+              <a:rPr lang="en-US" sz="1200" b="1" spc="200" kern="0" dirty="0">
                 <a:solidFill>
                   <a:srgbClr val="FFFFFF"/>
                 </a:solidFill>
@@ -3365,13 +3655,13 @@
           <a:bodyPr wrap="square" lIns="0" tIns="0" rIns="0" bIns="0" rtlCol="0" anchor="ctr"/>
           <a:lstStyle/>
           <a:p>
-            <a:pPr marL="0" indent="0">
+            <a:pPr indent="0" marL="0">
               <a:buNone/>
             </a:pPr>
             <a:r>
               <a:rPr lang="en-US" sz="1900" b="1" dirty="0">
                 <a:solidFill>
-                  <a:srgbClr val="10263B"/>
+                  <a:srgbClr val="1E1E1E"/>
                 </a:solidFill>
                 <a:latin typeface="Cambria" pitchFamily="34" charset="0"/>
                 <a:ea typeface="Cambria" pitchFamily="34" charset="-122"/>
@@ -3536,7 +3826,7 @@
             <a:prstDash val="solid"/>
           </a:ln>
           <a:effectLst>
-            <a:outerShdw blurRad="101600" dist="25400" dir="5400000" algn="bl" rotWithShape="0">
+            <a:outerShdw sx="100000" sy="100000" kx="0" ky="0" algn="bl" rotWithShape="0" blurRad="101600" dist="25400" dir="5400000">
               <a:srgbClr val="000000">
                 <a:alpha val="12000"/>
               </a:srgbClr>
@@ -3561,11 +3851,11 @@
             </a:avLst>
           </a:prstGeom>
           <a:solidFill>
-            <a:srgbClr val="B7791F"/>
+            <a:srgbClr val="777777"/>
           </a:solidFill>
           <a:ln w="12700">
             <a:solidFill>
-              <a:srgbClr val="B7791F"/>
+              <a:srgbClr val="777777"/>
             </a:solidFill>
             <a:prstDash val="solid"/>
           </a:ln>
@@ -3592,11 +3882,11 @@
           <a:bodyPr wrap="square" lIns="0" tIns="0" rIns="0" bIns="0" rtlCol="0" anchor="ctr"/>
           <a:lstStyle/>
           <a:p>
-            <a:pPr marL="0" indent="0" algn="ctr">
-              <a:buNone/>
-            </a:pPr>
-            <a:r>
-              <a:rPr lang="en-US" sz="1200" b="1" kern="0" spc="200" dirty="0">
+            <a:pPr algn="ctr" indent="0" marL="0">
+              <a:buNone/>
+            </a:pPr>
+            <a:r>
+              <a:rPr lang="en-US" sz="1200" b="1" spc="200" kern="0" dirty="0">
                 <a:solidFill>
                   <a:srgbClr val="FFFFFF"/>
                 </a:solidFill>
@@ -3631,13 +3921,13 @@
           <a:bodyPr wrap="square" lIns="0" tIns="0" rIns="0" bIns="0" rtlCol="0" anchor="ctr"/>
           <a:lstStyle/>
           <a:p>
-            <a:pPr marL="0" indent="0">
+            <a:pPr indent="0" marL="0">
               <a:buNone/>
             </a:pPr>
             <a:r>
               <a:rPr lang="en-US" sz="1900" b="1" dirty="0">
                 <a:solidFill>
-                  <a:srgbClr val="10263B"/>
+                  <a:srgbClr val="1E1E1E"/>
                 </a:solidFill>
                 <a:latin typeface="Cambria" pitchFamily="34" charset="0"/>
                 <a:ea typeface="Cambria" pitchFamily="34" charset="-122"/>
@@ -3790,9 +4080,8 @@
     <p:bg>
       <p:bgPr>
         <a:solidFill>
-          <a:srgbClr val="F6F8FA"/>
+          <a:srgbClr val="F5F5F5"/>
         </a:solidFill>
-        <a:effectLst/>
       </p:bgPr>
     </p:bg>
     <p:spTree>
@@ -3830,13 +4119,13 @@
           <a:bodyPr wrap="square" lIns="0" tIns="0" rIns="0" bIns="0" rtlCol="0" anchor="ctr"/>
           <a:lstStyle/>
           <a:p>
-            <a:pPr marL="0" indent="0">
-              <a:buNone/>
-            </a:pPr>
-            <a:r>
-              <a:rPr lang="en-US" sz="1200" b="1" kern="0" spc="200" dirty="0">
-                <a:solidFill>
-                  <a:srgbClr val="0F8B8D"/>
+            <a:pPr indent="0" marL="0">
+              <a:buNone/>
+            </a:pPr>
+            <a:r>
+              <a:rPr lang="en-US" sz="1200" b="1" spc="200" kern="0" dirty="0">
+                <a:solidFill>
+                  <a:srgbClr val="4A4A4A"/>
                 </a:solidFill>
                 <a:latin typeface="Calibri" pitchFamily="34" charset="0"/>
                 <a:ea typeface="Calibri" pitchFamily="34" charset="-122"/>
@@ -3869,13 +4158,13 @@
           <a:bodyPr wrap="square" lIns="0" tIns="0" rIns="0" bIns="0" rtlCol="0" anchor="ctr"/>
           <a:lstStyle/>
           <a:p>
-            <a:pPr marL="0" indent="0">
+            <a:pPr indent="0" marL="0">
               <a:buNone/>
             </a:pPr>
             <a:r>
               <a:rPr lang="en-US" sz="3000" b="1" dirty="0">
                 <a:solidFill>
-                  <a:srgbClr val="10263B"/>
+                  <a:srgbClr val="1E1E1E"/>
                 </a:solidFill>
                 <a:latin typeface="Cambria" pitchFamily="34" charset="0"/>
                 <a:ea typeface="Cambria" pitchFamily="34" charset="-122"/>
@@ -3908,7 +4197,7 @@
           <a:bodyPr wrap="square" lIns="0" tIns="0" rIns="0" bIns="0" rtlCol="0" anchor="ctr"/>
           <a:lstStyle/>
           <a:p>
-            <a:pPr marL="0" indent="0">
+            <a:pPr indent="0" marL="0">
               <a:buNone/>
             </a:pPr>
             <a:r>
@@ -3952,7 +4241,7 @@
             <a:prstDash val="solid"/>
           </a:ln>
           <a:effectLst>
-            <a:outerShdw blurRad="101600" dist="25400" dir="5400000" algn="bl" rotWithShape="0">
+            <a:outerShdw sx="100000" sy="100000" kx="0" ky="0" algn="bl" rotWithShape="0" blurRad="101600" dist="25400" dir="5400000">
               <a:srgbClr val="000000">
                 <a:alpha val="12000"/>
               </a:srgbClr>
@@ -3962,14 +4251,14 @@
       </p:sp>
       <p:pic>
         <p:nvPicPr>
-          <p:cNvPr id="6" name="Image 0" descr="image4_new.png"/>
+          <p:cNvPr id="6" name="Image 0" descr="arch_gray.png">    </p:cNvPr>
           <p:cNvPicPr>
             <a:picLocks noChangeAspect="1"/>
           </p:cNvPicPr>
           <p:nvPr/>
         </p:nvPicPr>
         <p:blipFill>
-          <a:blip r:embed="rId3"/>
+          <a:blip r:embed="rId1"/>
           <a:stretch>
             <a:fillRect/>
           </a:stretch>
@@ -4010,7 +4299,7 @@
             <a:prstDash val="solid"/>
           </a:ln>
           <a:effectLst>
-            <a:outerShdw blurRad="101600" dist="25400" dir="5400000" algn="bl" rotWithShape="0">
+            <a:outerShdw sx="100000" sy="100000" kx="0" ky="0" algn="bl" rotWithShape="0" blurRad="101600" dist="25400" dir="5400000">
               <a:srgbClr val="000000">
                 <a:alpha val="12000"/>
               </a:srgbClr>
@@ -4033,11 +4322,11 @@
             <a:avLst/>
           </a:prstGeom>
           <a:solidFill>
-            <a:srgbClr val="0F8B8D"/>
+            <a:srgbClr val="4A4A4A"/>
           </a:solidFill>
           <a:ln w="12700">
             <a:solidFill>
-              <a:srgbClr val="0F8B8D"/>
+              <a:srgbClr val="4A4A4A"/>
             </a:solidFill>
             <a:prstDash val="solid"/>
           </a:ln>
@@ -4064,7 +4353,7 @@
           <a:bodyPr wrap="square" lIns="0" tIns="0" rIns="0" bIns="0" rtlCol="0" anchor="ctr"/>
           <a:lstStyle/>
           <a:p>
-            <a:pPr marL="0" indent="0" algn="ctr">
+            <a:pPr algn="ctr" indent="0" marL="0">
               <a:buNone/>
             </a:pPr>
             <a:r>
@@ -4103,13 +4392,13 @@
           <a:bodyPr wrap="square" lIns="0" tIns="0" rIns="0" bIns="0" rtlCol="0" anchor="t"/>
           <a:lstStyle/>
           <a:p>
-            <a:pPr marL="0" indent="0">
+            <a:pPr indent="0" marL="0">
               <a:buNone/>
             </a:pPr>
             <a:r>
               <a:rPr lang="en-US" sz="1400" b="1" dirty="0">
                 <a:solidFill>
-                  <a:srgbClr val="10263B"/>
+                  <a:srgbClr val="1E1E1E"/>
                 </a:solidFill>
                 <a:latin typeface="Calibri" pitchFamily="34" charset="0"/>
                 <a:ea typeface="Calibri" pitchFamily="34" charset="-122"/>
@@ -4120,7 +4409,7 @@
             <a:endParaRPr lang="en-US" sz="1400" dirty="0"/>
           </a:p>
           <a:p>
-            <a:pPr marL="0" indent="0">
+            <a:pPr indent="0" marL="0">
               <a:buNone/>
             </a:pPr>
             <a:r>
@@ -4153,11 +4442,11 @@
             <a:avLst/>
           </a:prstGeom>
           <a:solidFill>
-            <a:srgbClr val="0F8B8D"/>
+            <a:srgbClr val="4A4A4A"/>
           </a:solidFill>
           <a:ln w="12700">
             <a:solidFill>
-              <a:srgbClr val="0F8B8D"/>
+              <a:srgbClr val="4A4A4A"/>
             </a:solidFill>
             <a:prstDash val="solid"/>
           </a:ln>
@@ -4184,7 +4473,7 @@
           <a:bodyPr wrap="square" lIns="0" tIns="0" rIns="0" bIns="0" rtlCol="0" anchor="ctr"/>
           <a:lstStyle/>
           <a:p>
-            <a:pPr marL="0" indent="0" algn="ctr">
+            <a:pPr algn="ctr" indent="0" marL="0">
               <a:buNone/>
             </a:pPr>
             <a:r>
@@ -4223,13 +4512,13 @@
           <a:bodyPr wrap="square" lIns="0" tIns="0" rIns="0" bIns="0" rtlCol="0" anchor="t"/>
           <a:lstStyle/>
           <a:p>
-            <a:pPr marL="0" indent="0">
+            <a:pPr indent="0" marL="0">
               <a:buNone/>
             </a:pPr>
             <a:r>
               <a:rPr lang="en-US" sz="1400" b="1" dirty="0">
                 <a:solidFill>
-                  <a:srgbClr val="10263B"/>
+                  <a:srgbClr val="1E1E1E"/>
                 </a:solidFill>
                 <a:latin typeface="Calibri" pitchFamily="34" charset="0"/>
                 <a:ea typeface="Calibri" pitchFamily="34" charset="-122"/>
@@ -4240,7 +4529,7 @@
             <a:endParaRPr lang="en-US" sz="1400" dirty="0"/>
           </a:p>
           <a:p>
-            <a:pPr marL="0" indent="0">
+            <a:pPr indent="0" marL="0">
               <a:buNone/>
             </a:pPr>
             <a:r>
@@ -4273,11 +4562,11 @@
             <a:avLst/>
           </a:prstGeom>
           <a:solidFill>
-            <a:srgbClr val="0F8B8D"/>
+            <a:srgbClr val="4A4A4A"/>
           </a:solidFill>
           <a:ln w="12700">
             <a:solidFill>
-              <a:srgbClr val="0F8B8D"/>
+              <a:srgbClr val="4A4A4A"/>
             </a:solidFill>
             <a:prstDash val="solid"/>
           </a:ln>
@@ -4304,7 +4593,7 @@
           <a:bodyPr wrap="square" lIns="0" tIns="0" rIns="0" bIns="0" rtlCol="0" anchor="ctr"/>
           <a:lstStyle/>
           <a:p>
-            <a:pPr marL="0" indent="0" algn="ctr">
+            <a:pPr algn="ctr" indent="0" marL="0">
               <a:buNone/>
             </a:pPr>
             <a:r>
@@ -4343,13 +4632,13 @@
           <a:bodyPr wrap="square" lIns="0" tIns="0" rIns="0" bIns="0" rtlCol="0" anchor="t"/>
           <a:lstStyle/>
           <a:p>
-            <a:pPr marL="0" indent="0">
+            <a:pPr indent="0" marL="0">
               <a:buNone/>
             </a:pPr>
             <a:r>
               <a:rPr lang="en-US" sz="1400" b="1" dirty="0">
                 <a:solidFill>
-                  <a:srgbClr val="10263B"/>
+                  <a:srgbClr val="1E1E1E"/>
                 </a:solidFill>
                 <a:latin typeface="Calibri" pitchFamily="34" charset="0"/>
                 <a:ea typeface="Calibri" pitchFamily="34" charset="-122"/>
@@ -4360,7 +4649,7 @@
             <a:endParaRPr lang="en-US" sz="1400" dirty="0"/>
           </a:p>
           <a:p>
-            <a:pPr marL="0" indent="0">
+            <a:pPr indent="0" marL="0">
               <a:buNone/>
             </a:pPr>
             <a:r>
@@ -4393,11 +4682,11 @@
             <a:avLst/>
           </a:prstGeom>
           <a:solidFill>
-            <a:srgbClr val="0F8B8D"/>
+            <a:srgbClr val="4A4A4A"/>
           </a:solidFill>
           <a:ln w="12700">
             <a:solidFill>
-              <a:srgbClr val="0F8B8D"/>
+              <a:srgbClr val="4A4A4A"/>
             </a:solidFill>
             <a:prstDash val="solid"/>
           </a:ln>
@@ -4424,7 +4713,7 @@
           <a:bodyPr wrap="square" lIns="0" tIns="0" rIns="0" bIns="0" rtlCol="0" anchor="ctr"/>
           <a:lstStyle/>
           <a:p>
-            <a:pPr marL="0" indent="0" algn="ctr">
+            <a:pPr algn="ctr" indent="0" marL="0">
               <a:buNone/>
             </a:pPr>
             <a:r>
@@ -4463,13 +4752,13 @@
           <a:bodyPr wrap="square" lIns="0" tIns="0" rIns="0" bIns="0" rtlCol="0" anchor="t"/>
           <a:lstStyle/>
           <a:p>
-            <a:pPr marL="0" indent="0">
+            <a:pPr indent="0" marL="0">
               <a:buNone/>
             </a:pPr>
             <a:r>
               <a:rPr lang="en-US" sz="1400" b="1" dirty="0">
                 <a:solidFill>
-                  <a:srgbClr val="10263B"/>
+                  <a:srgbClr val="1E1E1E"/>
                 </a:solidFill>
                 <a:latin typeface="Calibri" pitchFamily="34" charset="0"/>
                 <a:ea typeface="Calibri" pitchFamily="34" charset="-122"/>
@@ -4480,7 +4769,7 @@
             <a:endParaRPr lang="en-US" sz="1400" dirty="0"/>
           </a:p>
           <a:p>
-            <a:pPr marL="0" indent="0">
+            <a:pPr indent="0" marL="0">
               <a:buNone/>
             </a:pPr>
             <a:r>
@@ -4512,9 +4801,8 @@
     <p:bg>
       <p:bgPr>
         <a:solidFill>
-          <a:srgbClr val="F6F8FA"/>
+          <a:srgbClr val="F5F5F5"/>
         </a:solidFill>
-        <a:effectLst/>
       </p:bgPr>
     </p:bg>
     <p:spTree>
@@ -4552,13 +4840,13 @@
           <a:bodyPr wrap="square" lIns="0" tIns="0" rIns="0" bIns="0" rtlCol="0" anchor="ctr"/>
           <a:lstStyle/>
           <a:p>
-            <a:pPr marL="0" indent="0">
-              <a:buNone/>
-            </a:pPr>
-            <a:r>
-              <a:rPr lang="en-US" sz="1200" b="1" kern="0" spc="200" dirty="0">
-                <a:solidFill>
-                  <a:srgbClr val="0F8B8D"/>
+            <a:pPr indent="0" marL="0">
+              <a:buNone/>
+            </a:pPr>
+            <a:r>
+              <a:rPr lang="en-US" sz="1200" b="1" spc="200" kern="0" dirty="0">
+                <a:solidFill>
+                  <a:srgbClr val="4A4A4A"/>
                 </a:solidFill>
                 <a:latin typeface="Calibri" pitchFamily="34" charset="0"/>
                 <a:ea typeface="Calibri" pitchFamily="34" charset="-122"/>
@@ -4591,13 +4879,13 @@
           <a:bodyPr wrap="square" lIns="0" tIns="0" rIns="0" bIns="0" rtlCol="0" anchor="ctr"/>
           <a:lstStyle/>
           <a:p>
-            <a:pPr marL="0" indent="0">
+            <a:pPr indent="0" marL="0">
               <a:buNone/>
             </a:pPr>
             <a:r>
               <a:rPr lang="en-US" sz="3000" b="1" dirty="0">
                 <a:solidFill>
-                  <a:srgbClr val="10263B"/>
+                  <a:srgbClr val="1E1E1E"/>
                 </a:solidFill>
                 <a:latin typeface="Cambria" pitchFamily="34" charset="0"/>
                 <a:ea typeface="Cambria" pitchFamily="34" charset="-122"/>
@@ -4630,7 +4918,7 @@
           <a:bodyPr wrap="square" lIns="0" tIns="0" rIns="0" bIns="0" rtlCol="0" anchor="ctr"/>
           <a:lstStyle/>
           <a:p>
-            <a:pPr marL="0" indent="0">
+            <a:pPr indent="0" marL="0">
               <a:buNone/>
             </a:pPr>
             <a:r>
@@ -4674,7 +4962,7 @@
             <a:prstDash val="solid"/>
           </a:ln>
           <a:effectLst>
-            <a:outerShdw blurRad="101600" dist="25400" dir="5400000" algn="bl" rotWithShape="0">
+            <a:outerShdw sx="100000" sy="100000" kx="0" ky="0" algn="bl" rotWithShape="0" blurRad="101600" dist="25400" dir="5400000">
               <a:srgbClr val="000000">
                 <a:alpha val="12000"/>
               </a:srgbClr>
@@ -4703,13 +4991,13 @@
           <a:bodyPr wrap="square" lIns="0" tIns="0" rIns="0" bIns="0" rtlCol="0" anchor="ctr"/>
           <a:lstStyle/>
           <a:p>
-            <a:pPr marL="0" indent="0">
+            <a:pPr indent="0" marL="0">
               <a:buNone/>
             </a:pPr>
             <a:r>
               <a:rPr lang="en-US" sz="1500" b="1" dirty="0">
                 <a:solidFill>
-                  <a:srgbClr val="0F8B8D"/>
+                  <a:srgbClr val="4A4A4A"/>
                 </a:solidFill>
                 <a:latin typeface="Calibri" pitchFamily="34" charset="0"/>
                 <a:ea typeface="Calibri" pitchFamily="34" charset="-122"/>
@@ -4720,7 +5008,7 @@
             <a:endParaRPr lang="en-US" sz="1500" dirty="0"/>
           </a:p>
           <a:p>
-            <a:pPr marL="0" indent="0">
+            <a:pPr indent="0" marL="0">
               <a:buNone/>
             </a:pPr>
             <a:r>
@@ -4764,7 +5052,7 @@
             <a:prstDash val="solid"/>
           </a:ln>
           <a:effectLst>
-            <a:outerShdw blurRad="101600" dist="25400" dir="5400000" algn="bl" rotWithShape="0">
+            <a:outerShdw sx="100000" sy="100000" kx="0" ky="0" algn="bl" rotWithShape="0" blurRad="101600" dist="25400" dir="5400000">
               <a:srgbClr val="000000">
                 <a:alpha val="12000"/>
               </a:srgbClr>
@@ -4793,13 +5081,13 @@
           <a:bodyPr wrap="square" lIns="0" tIns="0" rIns="0" bIns="0" rtlCol="0" anchor="ctr"/>
           <a:lstStyle/>
           <a:p>
-            <a:pPr marL="0" indent="0">
+            <a:pPr indent="0" marL="0">
               <a:buNone/>
             </a:pPr>
             <a:r>
               <a:rPr lang="en-US" sz="1500" b="1" dirty="0">
                 <a:solidFill>
-                  <a:srgbClr val="0F8B8D"/>
+                  <a:srgbClr val="4A4A4A"/>
                 </a:solidFill>
                 <a:latin typeface="Calibri" pitchFamily="34" charset="0"/>
                 <a:ea typeface="Calibri" pitchFamily="34" charset="-122"/>
@@ -4810,7 +5098,7 @@
             <a:endParaRPr lang="en-US" sz="1500" dirty="0"/>
           </a:p>
           <a:p>
-            <a:pPr marL="0" indent="0">
+            <a:pPr indent="0" marL="0">
               <a:buNone/>
             </a:pPr>
             <a:r>
@@ -4854,7 +5142,7 @@
             <a:prstDash val="solid"/>
           </a:ln>
           <a:effectLst>
-            <a:outerShdw blurRad="101600" dist="25400" dir="5400000" algn="bl" rotWithShape="0">
+            <a:outerShdw sx="100000" sy="100000" kx="0" ky="0" algn="bl" rotWithShape="0" blurRad="101600" dist="25400" dir="5400000">
               <a:srgbClr val="000000">
                 <a:alpha val="12000"/>
               </a:srgbClr>
@@ -4883,13 +5171,13 @@
           <a:bodyPr wrap="square" lIns="0" tIns="0" rIns="0" bIns="0" rtlCol="0" anchor="ctr"/>
           <a:lstStyle/>
           <a:p>
-            <a:pPr marL="0" indent="0">
+            <a:pPr indent="0" marL="0">
               <a:buNone/>
             </a:pPr>
             <a:r>
               <a:rPr lang="en-US" sz="1500" b="1" dirty="0">
                 <a:solidFill>
-                  <a:srgbClr val="0F8B8D"/>
+                  <a:srgbClr val="4A4A4A"/>
                 </a:solidFill>
                 <a:latin typeface="Calibri" pitchFamily="34" charset="0"/>
                 <a:ea typeface="Calibri" pitchFamily="34" charset="-122"/>
@@ -4900,7 +5188,7 @@
             <a:endParaRPr lang="en-US" sz="1500" dirty="0"/>
           </a:p>
           <a:p>
-            <a:pPr marL="0" indent="0">
+            <a:pPr indent="0" marL="0">
               <a:buNone/>
             </a:pPr>
             <a:r>
@@ -4944,7 +5232,7 @@
             <a:prstDash val="solid"/>
           </a:ln>
           <a:effectLst>
-            <a:outerShdw blurRad="101600" dist="25400" dir="5400000" algn="bl" rotWithShape="0">
+            <a:outerShdw sx="100000" sy="100000" kx="0" ky="0" algn="bl" rotWithShape="0" blurRad="101600" dist="25400" dir="5400000">
               <a:srgbClr val="000000">
                 <a:alpha val="12000"/>
               </a:srgbClr>
@@ -4973,13 +5261,13 @@
           <a:bodyPr wrap="square" lIns="0" tIns="0" rIns="0" bIns="0" rtlCol="0" anchor="ctr"/>
           <a:lstStyle/>
           <a:p>
-            <a:pPr marL="0" indent="0">
+            <a:pPr indent="0" marL="0">
               <a:buNone/>
             </a:pPr>
             <a:r>
               <a:rPr lang="en-US" sz="1500" b="1" dirty="0">
                 <a:solidFill>
-                  <a:srgbClr val="0F8B8D"/>
+                  <a:srgbClr val="4A4A4A"/>
                 </a:solidFill>
                 <a:latin typeface="Calibri" pitchFamily="34" charset="0"/>
                 <a:ea typeface="Calibri" pitchFamily="34" charset="-122"/>
@@ -4990,7 +5278,7 @@
             <a:endParaRPr lang="en-US" sz="1500" dirty="0"/>
           </a:p>
           <a:p>
-            <a:pPr marL="0" indent="0">
+            <a:pPr indent="0" marL="0">
               <a:buNone/>
             </a:pPr>
             <a:r>
@@ -5034,7 +5322,7 @@
             <a:prstDash val="solid"/>
           </a:ln>
           <a:effectLst>
-            <a:outerShdw blurRad="101600" dist="25400" dir="5400000" algn="bl" rotWithShape="0">
+            <a:outerShdw sx="100000" sy="100000" kx="0" ky="0" algn="bl" rotWithShape="0" blurRad="101600" dist="25400" dir="5400000">
               <a:srgbClr val="000000">
                 <a:alpha val="12000"/>
               </a:srgbClr>
@@ -5063,13 +5351,13 @@
           <a:bodyPr wrap="square" lIns="0" tIns="0" rIns="0" bIns="0" rtlCol="0" anchor="ctr"/>
           <a:lstStyle/>
           <a:p>
-            <a:pPr marL="0" indent="0">
+            <a:pPr indent="0" marL="0">
               <a:buNone/>
             </a:pPr>
             <a:r>
               <a:rPr lang="en-US" sz="1500" b="1" dirty="0">
                 <a:solidFill>
-                  <a:srgbClr val="0F8B8D"/>
+                  <a:srgbClr val="4A4A4A"/>
                 </a:solidFill>
                 <a:latin typeface="Calibri" pitchFamily="34" charset="0"/>
                 <a:ea typeface="Calibri" pitchFamily="34" charset="-122"/>
@@ -5080,7 +5368,7 @@
             <a:endParaRPr lang="en-US" sz="1500" dirty="0"/>
           </a:p>
           <a:p>
-            <a:pPr marL="0" indent="0">
+            <a:pPr indent="0" marL="0">
               <a:buNone/>
             </a:pPr>
             <a:r>
@@ -5115,16 +5403,16 @@
             </a:avLst>
           </a:prstGeom>
           <a:solidFill>
-            <a:srgbClr val="FBE9ED"/>
+            <a:srgbClr val="E4E4E4"/>
           </a:solidFill>
           <a:ln w="12700">
             <a:solidFill>
-              <a:srgbClr val="FBE9ED"/>
+              <a:srgbClr val="E4E4E4"/>
             </a:solidFill>
             <a:prstDash val="solid"/>
           </a:ln>
           <a:effectLst>
-            <a:outerShdw blurRad="101600" dist="25400" dir="5400000" algn="bl" rotWithShape="0">
+            <a:outerShdw sx="100000" sy="100000" kx="0" ky="0" algn="bl" rotWithShape="0" blurRad="101600" dist="25400" dir="5400000">
               <a:srgbClr val="000000">
                 <a:alpha val="12000"/>
               </a:srgbClr>
@@ -5153,13 +5441,13 @@
           <a:bodyPr wrap="square" lIns="0" tIns="0" rIns="0" bIns="0" rtlCol="0" anchor="ctr"/>
           <a:lstStyle/>
           <a:p>
-            <a:pPr marL="0" indent="0">
+            <a:pPr indent="0" marL="0">
               <a:buNone/>
             </a:pPr>
             <a:r>
               <a:rPr lang="en-US" sz="1500" b="1" dirty="0">
                 <a:solidFill>
-                  <a:srgbClr val="B83255"/>
+                  <a:srgbClr val="2B2B2B"/>
                 </a:solidFill>
                 <a:latin typeface="Calibri" pitchFamily="34" charset="0"/>
                 <a:ea typeface="Calibri" pitchFamily="34" charset="-122"/>
@@ -5170,7 +5458,7 @@
             <a:endParaRPr lang="en-US" sz="1500" dirty="0"/>
           </a:p>
           <a:p>
-            <a:pPr marL="0" indent="0">
+            <a:pPr indent="0" marL="0">
               <a:buNone/>
             </a:pPr>
             <a:r>
@@ -5205,16 +5493,16 @@
             </a:avLst>
           </a:prstGeom>
           <a:solidFill>
-            <a:srgbClr val="FBE9ED"/>
+            <a:srgbClr val="E4E4E4"/>
           </a:solidFill>
           <a:ln w="12700">
             <a:solidFill>
-              <a:srgbClr val="FBE9ED"/>
+              <a:srgbClr val="E4E4E4"/>
             </a:solidFill>
             <a:prstDash val="solid"/>
           </a:ln>
           <a:effectLst>
-            <a:outerShdw blurRad="101600" dist="25400" dir="5400000" algn="bl" rotWithShape="0">
+            <a:outerShdw sx="100000" sy="100000" kx="0" ky="0" algn="bl" rotWithShape="0" blurRad="101600" dist="25400" dir="5400000">
               <a:srgbClr val="000000">
                 <a:alpha val="12000"/>
               </a:srgbClr>
@@ -5243,13 +5531,13 @@
           <a:bodyPr wrap="square" lIns="0" tIns="0" rIns="0" bIns="0" rtlCol="0" anchor="ctr"/>
           <a:lstStyle/>
           <a:p>
-            <a:pPr marL="0" indent="0">
+            <a:pPr indent="0" marL="0">
               <a:buNone/>
             </a:pPr>
             <a:r>
               <a:rPr lang="en-US" sz="1500" b="1" dirty="0">
                 <a:solidFill>
-                  <a:srgbClr val="B83255"/>
+                  <a:srgbClr val="2B2B2B"/>
                 </a:solidFill>
                 <a:latin typeface="Calibri" pitchFamily="34" charset="0"/>
                 <a:ea typeface="Calibri" pitchFamily="34" charset="-122"/>
@@ -5260,7 +5548,7 @@
             <a:endParaRPr lang="en-US" sz="1500" dirty="0"/>
           </a:p>
           <a:p>
-            <a:pPr marL="0" indent="0">
+            <a:pPr indent="0" marL="0">
               <a:buNone/>
             </a:pPr>
             <a:r>
@@ -5295,16 +5583,16 @@
             </a:avLst>
           </a:prstGeom>
           <a:solidFill>
-            <a:srgbClr val="FBE9ED"/>
+            <a:srgbClr val="E4E4E4"/>
           </a:solidFill>
           <a:ln w="12700">
             <a:solidFill>
-              <a:srgbClr val="FBE9ED"/>
+              <a:srgbClr val="E4E4E4"/>
             </a:solidFill>
             <a:prstDash val="solid"/>
           </a:ln>
           <a:effectLst>
-            <a:outerShdw blurRad="101600" dist="25400" dir="5400000" algn="bl" rotWithShape="0">
+            <a:outerShdw sx="100000" sy="100000" kx="0" ky="0" algn="bl" rotWithShape="0" blurRad="101600" dist="25400" dir="5400000">
               <a:srgbClr val="000000">
                 <a:alpha val="12000"/>
               </a:srgbClr>
@@ -5333,13 +5621,13 @@
           <a:bodyPr wrap="square" lIns="0" tIns="0" rIns="0" bIns="0" rtlCol="0" anchor="ctr"/>
           <a:lstStyle/>
           <a:p>
-            <a:pPr marL="0" indent="0">
+            <a:pPr indent="0" marL="0">
               <a:buNone/>
             </a:pPr>
             <a:r>
               <a:rPr lang="en-US" sz="1500" b="1" dirty="0">
                 <a:solidFill>
-                  <a:srgbClr val="B83255"/>
+                  <a:srgbClr val="2B2B2B"/>
                 </a:solidFill>
                 <a:latin typeface="Calibri" pitchFamily="34" charset="0"/>
                 <a:ea typeface="Calibri" pitchFamily="34" charset="-122"/>
@@ -5350,7 +5638,7 @@
             <a:endParaRPr lang="en-US" sz="1500" dirty="0"/>
           </a:p>
           <a:p>
-            <a:pPr marL="0" indent="0">
+            <a:pPr indent="0" marL="0">
               <a:buNone/>
             </a:pPr>
             <a:r>
@@ -5385,16 +5673,16 @@
             </a:avLst>
           </a:prstGeom>
           <a:solidFill>
-            <a:srgbClr val="10263B"/>
+            <a:srgbClr val="1E1E1E"/>
           </a:solidFill>
           <a:ln w="12700">
             <a:solidFill>
-              <a:srgbClr val="10263B"/>
+              <a:srgbClr val="1E1E1E"/>
             </a:solidFill>
             <a:prstDash val="solid"/>
           </a:ln>
           <a:effectLst>
-            <a:outerShdw blurRad="101600" dist="25400" dir="5400000" algn="bl" rotWithShape="0">
+            <a:outerShdw sx="100000" sy="100000" kx="0" ky="0" algn="bl" rotWithShape="0" blurRad="101600" dist="25400" dir="5400000">
               <a:srgbClr val="000000">
                 <a:alpha val="12000"/>
               </a:srgbClr>
@@ -5423,7 +5711,7 @@
           <a:bodyPr wrap="square" lIns="0" tIns="0" rIns="0" bIns="0" rtlCol="0" anchor="t"/>
           <a:lstStyle/>
           <a:p>
-            <a:pPr marL="0" indent="0">
+            <a:pPr indent="0" marL="0">
               <a:spcAft>
                 <a:spcPts val="500"/>
               </a:spcAft>
@@ -5432,7 +5720,7 @@
             <a:r>
               <a:rPr lang="en-US" sz="1700" b="1" dirty="0">
                 <a:solidFill>
-                  <a:srgbClr val="F2A541"/>
+                  <a:srgbClr val="BDBDBD"/>
                 </a:solidFill>
                 <a:latin typeface="Calibri" pitchFamily="34" charset="0"/>
                 <a:ea typeface="Calibri" pitchFamily="34" charset="-122"/>
@@ -5533,7 +5821,7 @@
             <a:prstDash val="solid"/>
           </a:ln>
           <a:effectLst>
-            <a:outerShdw blurRad="101600" dist="25400" dir="5400000" algn="bl" rotWithShape="0">
+            <a:outerShdw sx="100000" sy="100000" kx="0" ky="0" algn="bl" rotWithShape="0" blurRad="101600" dist="25400" dir="5400000">
               <a:srgbClr val="000000">
                 <a:alpha val="12000"/>
               </a:srgbClr>
@@ -5562,7 +5850,7 @@
           <a:bodyPr wrap="square" lIns="0" tIns="0" rIns="0" bIns="0" rtlCol="0" anchor="t"/>
           <a:lstStyle/>
           <a:p>
-            <a:pPr marL="0" indent="0">
+            <a:pPr indent="0" marL="0">
               <a:spcAft>
                 <a:spcPts val="500"/>
               </a:spcAft>
@@ -5571,7 +5859,7 @@
             <a:r>
               <a:rPr lang="en-US" sz="1700" b="1" dirty="0">
                 <a:solidFill>
-                  <a:srgbClr val="0F8B8D"/>
+                  <a:srgbClr val="4A4A4A"/>
                 </a:solidFill>
                 <a:latin typeface="Calibri" pitchFamily="34" charset="0"/>
                 <a:ea typeface="Calibri" pitchFamily="34" charset="-122"/>
@@ -5660,9 +5948,8 @@
     <p:bg>
       <p:bgPr>
         <a:solidFill>
-          <a:srgbClr val="F6F8FA"/>
+          <a:srgbClr val="F5F5F5"/>
         </a:solidFill>
-        <a:effectLst/>
       </p:bgPr>
     </p:bg>
     <p:spTree>
@@ -5700,13 +5987,13 @@
           <a:bodyPr wrap="square" lIns="0" tIns="0" rIns="0" bIns="0" rtlCol="0" anchor="ctr"/>
           <a:lstStyle/>
           <a:p>
-            <a:pPr marL="0" indent="0">
-              <a:buNone/>
-            </a:pPr>
-            <a:r>
-              <a:rPr lang="en-US" sz="1200" b="1" kern="0" spc="200" dirty="0">
-                <a:solidFill>
-                  <a:srgbClr val="0F8B8D"/>
+            <a:pPr indent="0" marL="0">
+              <a:buNone/>
+            </a:pPr>
+            <a:r>
+              <a:rPr lang="en-US" sz="1200" b="1" spc="200" kern="0" dirty="0">
+                <a:solidFill>
+                  <a:srgbClr val="4A4A4A"/>
                 </a:solidFill>
                 <a:latin typeface="Calibri" pitchFamily="34" charset="0"/>
                 <a:ea typeface="Calibri" pitchFamily="34" charset="-122"/>
@@ -5739,13 +6026,13 @@
           <a:bodyPr wrap="square" lIns="0" tIns="0" rIns="0" bIns="0" rtlCol="0" anchor="ctr"/>
           <a:lstStyle/>
           <a:p>
-            <a:pPr marL="0" indent="0">
+            <a:pPr indent="0" marL="0">
               <a:buNone/>
             </a:pPr>
             <a:r>
               <a:rPr lang="en-US" sz="3000" b="1" dirty="0">
                 <a:solidFill>
-                  <a:srgbClr val="10263B"/>
+                  <a:srgbClr val="1E1E1E"/>
                 </a:solidFill>
                 <a:latin typeface="Cambria" pitchFamily="34" charset="0"/>
                 <a:ea typeface="Cambria" pitchFamily="34" charset="-122"/>
@@ -5778,7 +6065,7 @@
           <a:bodyPr wrap="square" lIns="0" tIns="0" rIns="0" bIns="0" rtlCol="0" anchor="ctr"/>
           <a:lstStyle/>
           <a:p>
-            <a:pPr marL="0" indent="0">
+            <a:pPr indent="0" marL="0">
               <a:buNone/>
             </a:pPr>
             <a:r>
@@ -5822,7 +6109,7 @@
             <a:prstDash val="solid"/>
           </a:ln>
           <a:effectLst>
-            <a:outerShdw blurRad="101600" dist="25400" dir="5400000" algn="bl" rotWithShape="0">
+            <a:outerShdw sx="100000" sy="100000" kx="0" ky="0" algn="bl" rotWithShape="0" blurRad="101600" dist="25400" dir="5400000">
               <a:srgbClr val="000000">
                 <a:alpha val="12000"/>
               </a:srgbClr>
@@ -5832,14 +6119,14 @@
       </p:sp>
       <p:pic>
         <p:nvPicPr>
-          <p:cNvPr id="6" name="Image 0" descr="er.png"/>
+          <p:cNvPr id="6" name="Image 0" descr="er_gray.png">    </p:cNvPr>
           <p:cNvPicPr>
             <a:picLocks noChangeAspect="1"/>
           </p:cNvPicPr>
           <p:nvPr/>
         </p:nvPicPr>
         <p:blipFill>
-          <a:blip r:embed="rId3"/>
+          <a:blip r:embed="rId1"/>
           <a:stretch>
             <a:fillRect/>
           </a:stretch>
@@ -5880,7 +6167,7 @@
             <a:prstDash val="solid"/>
           </a:ln>
           <a:effectLst>
-            <a:outerShdw blurRad="101600" dist="25400" dir="5400000" algn="bl" rotWithShape="0">
+            <a:outerShdw sx="100000" sy="100000" kx="0" ky="0" algn="bl" rotWithShape="0" blurRad="101600" dist="25400" dir="5400000">
               <a:srgbClr val="000000">
                 <a:alpha val="12000"/>
               </a:srgbClr>
@@ -5909,7 +6196,7 @@
           <a:bodyPr wrap="square" lIns="0" tIns="0" rIns="0" bIns="0" rtlCol="0" anchor="t"/>
           <a:lstStyle/>
           <a:p>
-            <a:pPr marL="0" indent="0">
+            <a:pPr indent="0" marL="0">
               <a:spcAft>
                 <a:spcPts val="400"/>
               </a:spcAft>
@@ -5918,7 +6205,7 @@
             <a:r>
               <a:rPr lang="en-US" sz="1600" b="1" dirty="0">
                 <a:solidFill>
-                  <a:srgbClr val="10263B"/>
+                  <a:srgbClr val="1E1E1E"/>
                 </a:solidFill>
                 <a:latin typeface="Calibri" pitchFamily="34" charset="0"/>
                 <a:ea typeface="Calibri" pitchFamily="34" charset="-122"/>
@@ -6013,7 +6300,7 @@
             <a:endParaRPr lang="en-US" sz="1300" dirty="0"/>
           </a:p>
           <a:p>
-            <a:pPr marL="0" indent="0">
+            <a:pPr indent="0" marL="0">
               <a:spcAft>
                 <a:spcPts val="400"/>
               </a:spcAft>
@@ -6033,7 +6320,7 @@
             <a:endParaRPr lang="en-US" sz="1300" dirty="0"/>
           </a:p>
           <a:p>
-            <a:pPr marL="0" indent="0">
+            <a:pPr indent="0" marL="0">
               <a:spcAft>
                 <a:spcPts val="400"/>
               </a:spcAft>
@@ -6042,7 +6329,7 @@
             <a:r>
               <a:rPr lang="en-US" sz="1400" b="1" dirty="0">
                 <a:solidFill>
-                  <a:srgbClr val="0F8B8D"/>
+                  <a:srgbClr val="4A4A4A"/>
                 </a:solidFill>
                 <a:latin typeface="Calibri" pitchFamily="34" charset="0"/>
                 <a:ea typeface="Calibri" pitchFamily="34" charset="-122"/>
@@ -6053,7 +6340,7 @@
             <a:endParaRPr lang="en-US" sz="1300" dirty="0"/>
           </a:p>
           <a:p>
-            <a:pPr marL="0" indent="0">
+            <a:pPr indent="0" marL="0">
               <a:spcAft>
                 <a:spcPts val="400"/>
               </a:spcAft>
@@ -6073,7 +6360,7 @@
             <a:endParaRPr lang="en-US" sz="1300" dirty="0"/>
           </a:p>
           <a:p>
-            <a:pPr marL="0" indent="0">
+            <a:pPr indent="0" marL="0">
               <a:spcAft>
                 <a:spcPts val="400"/>
               </a:spcAft>
@@ -6093,7 +6380,7 @@
             <a:endParaRPr lang="en-US" sz="1300" dirty="0"/>
           </a:p>
           <a:p>
-            <a:pPr marL="0" indent="0">
+            <a:pPr indent="0" marL="0">
               <a:spcAft>
                 <a:spcPts val="400"/>
               </a:spcAft>
@@ -6102,7 +6389,7 @@
             <a:r>
               <a:rPr lang="en-US" sz="1400" b="1" dirty="0">
                 <a:solidFill>
-                  <a:srgbClr val="0F8B8D"/>
+                  <a:srgbClr val="4A4A4A"/>
                 </a:solidFill>
                 <a:latin typeface="Calibri" pitchFamily="34" charset="0"/>
                 <a:ea typeface="Calibri" pitchFamily="34" charset="-122"/>
@@ -6113,7 +6400,7 @@
             <a:endParaRPr lang="en-US" sz="1300" dirty="0"/>
           </a:p>
           <a:p>
-            <a:pPr marL="0" indent="0">
+            <a:pPr indent="0" marL="0">
               <a:spcAft>
                 <a:spcPts val="400"/>
               </a:spcAft>
@@ -6148,9 +6435,8 @@
     <p:bg>
       <p:bgPr>
         <a:solidFill>
-          <a:srgbClr val="10263B"/>
+          <a:srgbClr val="1E1E1E"/>
         </a:solidFill>
-        <a:effectLst/>
       </p:bgPr>
     </p:bg>
     <p:spTree>
@@ -6188,13 +6474,13 @@
           <a:bodyPr wrap="square" lIns="0" tIns="0" rIns="0" bIns="0" rtlCol="0" anchor="ctr"/>
           <a:lstStyle/>
           <a:p>
-            <a:pPr marL="0" indent="0">
-              <a:buNone/>
-            </a:pPr>
-            <a:r>
-              <a:rPr lang="en-US" sz="1200" b="1" kern="0" spc="200" dirty="0">
-                <a:solidFill>
-                  <a:srgbClr val="F2A541"/>
+            <a:pPr indent="0" marL="0">
+              <a:buNone/>
+            </a:pPr>
+            <a:r>
+              <a:rPr lang="en-US" sz="1200" b="1" spc="200" kern="0" dirty="0">
+                <a:solidFill>
+                  <a:srgbClr val="BDBDBD"/>
                 </a:solidFill>
                 <a:latin typeface="Calibri" pitchFamily="34" charset="0"/>
                 <a:ea typeface="Calibri" pitchFamily="34" charset="-122"/>
@@ -6227,7 +6513,7 @@
           <a:bodyPr wrap="square" lIns="0" tIns="0" rIns="0" bIns="0" rtlCol="0" anchor="ctr"/>
           <a:lstStyle/>
           <a:p>
-            <a:pPr marL="0" indent="0">
+            <a:pPr indent="0" marL="0">
               <a:buNone/>
             </a:pPr>
             <a:r>
@@ -6254,7 +6540,7 @@
         <p:spPr>
           <a:xfrm>
             <a:off x="640080" y="1600200"/>
-            <a:ext cx="3566160" cy="3063240"/>
+            <a:ext cx="3566160" cy="2743200"/>
           </a:xfrm>
           <a:prstGeom prst="roundRect">
             <a:avLst>
@@ -6262,11 +6548,11 @@
             </a:avLst>
           </a:prstGeom>
           <a:solidFill>
-            <a:srgbClr val="1C4463"/>
+            <a:srgbClr val="3A3A3A"/>
           </a:solidFill>
           <a:ln w="12700">
             <a:solidFill>
-              <a:srgbClr val="1C4463"/>
+              <a:srgbClr val="3A3A3A"/>
             </a:solidFill>
             <a:prstDash val="solid"/>
           </a:ln>
@@ -6293,13 +6579,13 @@
           <a:bodyPr wrap="square" lIns="0" tIns="0" rIns="0" bIns="0" rtlCol="0" anchor="ctr"/>
           <a:lstStyle/>
           <a:p>
-            <a:pPr marL="0" indent="0">
+            <a:pPr indent="0" marL="0">
               <a:buNone/>
             </a:pPr>
             <a:r>
               <a:rPr lang="en-US" sz="2100" b="1" dirty="0">
                 <a:solidFill>
-                  <a:srgbClr val="F2A541"/>
+                  <a:srgbClr val="BDBDBD"/>
                 </a:solidFill>
                 <a:latin typeface="Cambria" pitchFamily="34" charset="0"/>
                 <a:ea typeface="Cambria" pitchFamily="34" charset="-122"/>
@@ -6319,8 +6605,8 @@
         </p:nvSpPr>
         <p:spPr>
           <a:xfrm>
-            <a:off x="914400" y="2331720"/>
-            <a:ext cx="3063240" cy="2194560"/>
+            <a:off x="914400" y="2286000"/>
+            <a:ext cx="3063240" cy="2011680"/>
           </a:xfrm>
           <a:prstGeom prst="rect">
             <a:avLst/>
@@ -6426,7 +6712,7 @@
         <p:spPr>
           <a:xfrm>
             <a:off x="4389120" y="1600200"/>
-            <a:ext cx="3566160" cy="3063240"/>
+            <a:ext cx="3566160" cy="2743200"/>
           </a:xfrm>
           <a:prstGeom prst="roundRect">
             <a:avLst>
@@ -6434,11 +6720,11 @@
             </a:avLst>
           </a:prstGeom>
           <a:solidFill>
-            <a:srgbClr val="1C4463"/>
+            <a:srgbClr val="3A3A3A"/>
           </a:solidFill>
           <a:ln w="12700">
             <a:solidFill>
-              <a:srgbClr val="1C4463"/>
+              <a:srgbClr val="3A3A3A"/>
             </a:solidFill>
             <a:prstDash val="solid"/>
           </a:ln>
@@ -6465,13 +6751,13 @@
           <a:bodyPr wrap="square" lIns="0" tIns="0" rIns="0" bIns="0" rtlCol="0" anchor="ctr"/>
           <a:lstStyle/>
           <a:p>
-            <a:pPr marL="0" indent="0">
+            <a:pPr indent="0" marL="0">
               <a:buNone/>
             </a:pPr>
             <a:r>
               <a:rPr lang="en-US" sz="2100" b="1" dirty="0">
                 <a:solidFill>
-                  <a:srgbClr val="F2A541"/>
+                  <a:srgbClr val="BDBDBD"/>
                 </a:solidFill>
                 <a:latin typeface="Cambria" pitchFamily="34" charset="0"/>
                 <a:ea typeface="Cambria" pitchFamily="34" charset="-122"/>
@@ -6491,8 +6777,8 @@
         </p:nvSpPr>
         <p:spPr>
           <a:xfrm>
-            <a:off x="4663440" y="2331720"/>
-            <a:ext cx="3063240" cy="2194560"/>
+            <a:off x="4663440" y="2286000"/>
+            <a:ext cx="3063240" cy="2011680"/>
           </a:xfrm>
           <a:prstGeom prst="rect">
             <a:avLst/>
@@ -6598,7 +6884,7 @@
         <p:spPr>
           <a:xfrm>
             <a:off x="8138160" y="1600200"/>
-            <a:ext cx="3566160" cy="3063240"/>
+            <a:ext cx="3566160" cy="2743200"/>
           </a:xfrm>
           <a:prstGeom prst="roundRect">
             <a:avLst>
@@ -6606,11 +6892,11 @@
             </a:avLst>
           </a:prstGeom>
           <a:solidFill>
-            <a:srgbClr val="1C4463"/>
+            <a:srgbClr val="3A3A3A"/>
           </a:solidFill>
           <a:ln w="12700">
             <a:solidFill>
-              <a:srgbClr val="1C4463"/>
+              <a:srgbClr val="3A3A3A"/>
             </a:solidFill>
             <a:prstDash val="solid"/>
           </a:ln>
@@ -6637,13 +6923,13 @@
           <a:bodyPr wrap="square" lIns="0" tIns="0" rIns="0" bIns="0" rtlCol="0" anchor="ctr"/>
           <a:lstStyle/>
           <a:p>
-            <a:pPr marL="0" indent="0">
+            <a:pPr indent="0" marL="0">
               <a:buNone/>
             </a:pPr>
             <a:r>
               <a:rPr lang="en-US" sz="2100" b="1" dirty="0">
                 <a:solidFill>
-                  <a:srgbClr val="F2A541"/>
+                  <a:srgbClr val="BDBDBD"/>
                 </a:solidFill>
                 <a:latin typeface="Cambria" pitchFamily="34" charset="0"/>
                 <a:ea typeface="Cambria" pitchFamily="34" charset="-122"/>
@@ -6663,8 +6949,8 @@
         </p:nvSpPr>
         <p:spPr>
           <a:xfrm>
-            <a:off x="8412480" y="2331720"/>
-            <a:ext cx="3063240" cy="2194560"/>
+            <a:off x="8412480" y="2286000"/>
+            <a:ext cx="3063240" cy="2011680"/>
           </a:xfrm>
           <a:prstGeom prst="rect">
             <a:avLst/>
@@ -6769,8 +7055,8 @@
         </p:nvSpPr>
         <p:spPr>
           <a:xfrm>
-            <a:off x="640080" y="4937760"/>
-            <a:ext cx="10927080" cy="1325880"/>
+            <a:off x="640080" y="4526280"/>
+            <a:ext cx="10927080" cy="914400"/>
           </a:xfrm>
           <a:prstGeom prst="roundRect">
             <a:avLst>
@@ -6778,11 +7064,11 @@
             </a:avLst>
           </a:prstGeom>
           <a:solidFill>
-            <a:srgbClr val="0F8B8D"/>
+            <a:srgbClr val="4A4A4A"/>
           </a:solidFill>
           <a:ln w="12700">
             <a:solidFill>
-              <a:srgbClr val="0F8B8D"/>
+              <a:srgbClr val="4A4A4A"/>
             </a:solidFill>
             <a:prstDash val="solid"/>
           </a:ln>
@@ -6790,14 +7076,41 @@
       </p:sp>
       <p:sp>
         <p:nvSpPr>
+          <p:cNvPr id="13" name="Shape 11"/>
+          <p:cNvSpPr/>
+          <p:nvPr/>
+        </p:nvSpPr>
+        <p:spPr>
+          <a:xfrm>
+            <a:off x="640080" y="5623560"/>
+            <a:ext cx="10927080" cy="777240"/>
+          </a:xfrm>
+          <a:prstGeom prst="roundRect">
+            <a:avLst>
+              <a:gd name="adj" fmla="val 8276"/>
+            </a:avLst>
+          </a:prstGeom>
+          <a:solidFill>
+            <a:srgbClr val="EEEEEE"/>
+          </a:solidFill>
+          <a:ln w="12700">
+            <a:solidFill>
+              <a:srgbClr val="EEEEEE"/>
+            </a:solidFill>
+            <a:prstDash val="solid"/>
+          </a:ln>
+        </p:spPr>
+      </p:sp>
+      <p:sp>
+        <p:nvSpPr>
           <p:cNvPr id="14" name="Text 12"/>
           <p:cNvSpPr txBox="1"/>
           <p:nvPr/>
         </p:nvSpPr>
         <p:spPr>
           <a:xfrm>
-            <a:off x="914400" y="5029200"/>
-            <a:ext cx="10332720" cy="1143000"/>
+            <a:off x="914400" y="4572000"/>
+            <a:ext cx="10332720" cy="822960"/>
           </a:xfrm>
           <a:prstGeom prst="rect">
             <a:avLst/>
@@ -6809,14 +7122,14 @@
           <a:bodyPr wrap="square" lIns="0" tIns="0" rIns="0" bIns="0" rtlCol="0" anchor="ctr"/>
           <a:lstStyle/>
           <a:p>
-            <a:pPr marL="0" indent="0">
+            <a:pPr indent="0" marL="0">
               <a:spcAft>
                 <a:spcPts val="400"/>
               </a:spcAft>
               <a:buNone/>
             </a:pPr>
             <a:r>
-              <a:rPr lang="en-US" sz="1200" b="1" kern="0" spc="200" dirty="0">
+              <a:rPr lang="en-US" sz="1200" b="1" spc="200" kern="0" dirty="0">
                 <a:solidFill>
                   <a:srgbClr val="FFFFFF"/>
                 </a:solidFill>
@@ -6829,14 +7142,14 @@
             <a:endParaRPr lang="en-US" sz="1200" dirty="0"/>
           </a:p>
           <a:p>
-            <a:pPr marL="0" indent="0">
+            <a:pPr indent="0" marL="0">
               <a:spcAft>
                 <a:spcPts val="400"/>
               </a:spcAft>
               <a:buNone/>
             </a:pPr>
             <a:r>
-              <a:rPr lang="en-US" sz="1600" dirty="0">
+              <a:rPr lang="en-US" sz="1500" dirty="0">
                 <a:solidFill>
                   <a:srgbClr val="FFFFFF"/>
                 </a:solidFill>
@@ -6847,6 +7160,73 @@
               <a:t>RIMS is a secure, modular inventory and procurement platform that replaces manual spreadsheet records with one role-controlled web application.</a:t>
             </a:r>
             <a:endParaRPr lang="en-US" sz="1200" dirty="0"/>
+          </a:p>
+        </p:txBody>
+      </p:sp>
+      <p:sp>
+        <p:nvSpPr>
+          <p:cNvPr id="15" name="TextBox 14"/>
+          <p:cNvSpPr txBox="1"/>
+          <p:nvPr/>
+        </p:nvSpPr>
+        <p:spPr>
+          <a:xfrm>
+            <a:off x="1005840" y="5669280"/>
+            <a:ext cx="10332720" cy="685800"/>
+          </a:xfrm>
+          <a:prstGeom prst="rect">
+            <a:avLst/>
+          </a:prstGeom>
+          <a:noFill/>
+        </p:spPr>
+        <p:txBody>
+          <a:bodyPr wrap="none" anchor="ctr" lIns="0" rIns="0" tIns="0" bIns="0">
+            <a:spAutoFit/>
+          </a:bodyPr>
+          <a:lstStyle/>
+          <a:p>
+            <a:pPr algn="l"/>
+            <a:r>
+              <a:rPr b="1" sz="1400">
+                <a:solidFill>
+                  <a:srgbClr val="1E1E1E"/>
+                </a:solidFill>
+                <a:latin typeface="Calibri"/>
+              </a:rPr>
+              <a:t>GitHub:  </a:t>
+            </a:r>
+            <a:r>
+              <a:rPr sz="1400" u="sng">
+                <a:solidFill>
+                  <a:srgbClr val="FFFFFF"/>
+                </a:solidFill>
+                <a:latin typeface="Calibri"/>
+                <a:hlinkClick r:id="rId3"/>
+              </a:rPr>
+              <a:t>github.com/ajitkumarsaini02/retail-inventory-management-system</a:t>
+            </a:r>
+          </a:p>
+          <a:p>
+            <a:pPr algn="l"/>
+            <a:r>
+              <a:rPr b="1" sz="1400">
+                <a:solidFill>
+                  <a:srgbClr val="1E1E1E"/>
+                </a:solidFill>
+                <a:latin typeface="Calibri"/>
+              </a:rPr>
+              <a:t>Live demo:  </a:t>
+            </a:r>
+            <a:r>
+              <a:rPr sz="1400" u="sng">
+                <a:solidFill>
+                  <a:srgbClr val="FFFFFF"/>
+                </a:solidFill>
+                <a:latin typeface="Calibri"/>
+                <a:hlinkClick r:id="rId4"/>
+              </a:rPr>
+              <a:t>rims-erp.vercel.app</a:t>
+            </a:r>
           </a:p>
         </p:txBody>
       </p:sp>
@@ -7151,299 +7531,4 @@
     </a:ext>
   </a:extLst>
 </a:theme>
-</file>
-
-<file path=ppt/theme/theme2.xml><?xml version="1.0" encoding="utf-8"?>
-<a:theme xmlns:a="http://schemas.openxmlformats.org/drawingml/2006/main" name="Office Theme">
-  <a:themeElements>
-    <a:clrScheme name="Office">
-      <a:dk1>
-        <a:sysClr val="windowText" lastClr="000000"/>
-      </a:dk1>
-      <a:lt1>
-        <a:sysClr val="window" lastClr="FFFFFF"/>
-      </a:lt1>
-      <a:dk2>
-        <a:srgbClr val="44546A"/>
-      </a:dk2>
-      <a:lt2>
-        <a:srgbClr val="E7E6E6"/>
-      </a:lt2>
-      <a:accent1>
-        <a:srgbClr val="4472C4"/>
-      </a:accent1>
-      <a:accent2>
-        <a:srgbClr val="ED7D31"/>
-      </a:accent2>
-      <a:accent3>
-        <a:srgbClr val="A5A5A5"/>
-      </a:accent3>
-      <a:accent4>
-        <a:srgbClr val="FFC000"/>
-      </a:accent4>
-      <a:accent5>
-        <a:srgbClr val="5B9BD5"/>
-      </a:accent5>
-      <a:accent6>
-        <a:srgbClr val="70AD47"/>
-      </a:accent6>
-      <a:hlink>
-        <a:srgbClr val="0563C1"/>
-      </a:hlink>
-      <a:folHlink>
-        <a:srgbClr val="954F72"/>
-      </a:folHlink>
-    </a:clrScheme>
-    <a:fontScheme name="Office">
-      <a:majorFont>
-        <a:latin typeface="Calibri Light" panose="020F0302020204030204"/>
-        <a:ea typeface=""/>
-        <a:cs typeface=""/>
-        <a:font script="Jpan" typeface="游ゴシック Light"/>
-        <a:font script="Hang" typeface="맑은 고딕"/>
-        <a:font script="Hans" typeface="等线 Light"/>
-        <a:font script="Hant" typeface="新細明體"/>
-        <a:font script="Arab" typeface="Times New Roman"/>
-        <a:font script="Hebr" typeface="Times New Roman"/>
-        <a:font script="Thai" typeface="Angsana New"/>
-        <a:font script="Ethi" typeface="Nyala"/>
-        <a:font script="Beng" typeface="Vrinda"/>
-        <a:font script="Gujr" typeface="Shruti"/>
-        <a:font script="Khmr" typeface="MoolBoran"/>
-        <a:font script="Knda" typeface="Tunga"/>
-        <a:font script="Guru" typeface="Raavi"/>
-        <a:font script="Cans" typeface="Euphemia"/>
-        <a:font script="Cher" typeface="Plantagenet Cherokee"/>
-        <a:font script="Yiii" typeface="Microsoft Yi Baiti"/>
-        <a:font script="Tibt" typeface="Microsoft Himalaya"/>
-        <a:font script="Thaa" typeface="MV Boli"/>
-        <a:font script="Deva" typeface="Mangal"/>
-        <a:font script="Telu" typeface="Gautami"/>
-        <a:font script="Taml" typeface="Latha"/>
-        <a:font script="Syrc" typeface="Estrangelo Edessa"/>
-        <a:font script="Orya" typeface="Kalinga"/>
-        <a:font script="Mlym" typeface="Kartika"/>
-        <a:font script="Laoo" typeface="DokChampa"/>
-        <a:font script="Sinh" typeface="Iskoola Pota"/>
-        <a:font script="Mong" typeface="Mongolian Baiti"/>
-        <a:font script="Viet" typeface="Times New Roman"/>
-        <a:font script="Uigh" typeface="Microsoft Uighur"/>
-        <a:font script="Geor" typeface="Sylfaen"/>
-        <a:font script="Armn" typeface="Arial"/>
-        <a:font script="Bugi" typeface="Leelawadee UI"/>
-        <a:font script="Bopo" typeface="Microsoft JhengHei"/>
-        <a:font script="Java" typeface="Javanese Text"/>
-        <a:font script="Lisu" typeface="Segoe UI"/>
-        <a:font script="Mymr" typeface="Myanmar Text"/>
-        <a:font script="Nkoo" typeface="Ebrima"/>
-        <a:font script="Olck" typeface="Nirmala UI"/>
-        <a:font script="Osma" typeface="Ebrima"/>
-        <a:font script="Phag" typeface="Phagspa"/>
-        <a:font script="Syrn" typeface="Estrangelo Edessa"/>
-        <a:font script="Syrj" typeface="Estrangelo Edessa"/>
-        <a:font script="Syre" typeface="Estrangelo Edessa"/>
-        <a:font script="Sora" typeface="Nirmala UI"/>
-        <a:font script="Tale" typeface="Microsoft Tai Le"/>
-        <a:font script="Talu" typeface="Microsoft New Tai Lue"/>
-        <a:font script="Tfng" typeface="Ebrima"/>
-      </a:majorFont>
-      <a:minorFont>
-        <a:latin typeface="Calibri" panose="020F0502020204030204"/>
-        <a:ea typeface=""/>
-        <a:cs typeface=""/>
-        <a:font script="Jpan" typeface="游ゴシック"/>
-        <a:font script="Hang" typeface="맑은 고딕"/>
-        <a:font script="Hans" typeface="等线"/>
-        <a:font script="Hant" typeface="新細明體"/>
-        <a:font script="Arab" typeface="Arial"/>
-        <a:font script="Hebr" typeface="Arial"/>
-        <a:font script="Thai" typeface="Cordia New"/>
-        <a:font script="Ethi" typeface="Nyala"/>
-        <a:font script="Beng" typeface="Vrinda"/>
-        <a:font script="Gujr" typeface="Shruti"/>
-        <a:font script="Khmr" typeface="DaunPenh"/>
-        <a:font script="Knda" typeface="Tunga"/>
-        <a:font script="Guru" typeface="Raavi"/>
-        <a:font script="Cans" typeface="Euphemia"/>
-        <a:font script="Cher" typeface="Plantagenet Cherokee"/>
-        <a:font script="Yiii" typeface="Microsoft Yi Baiti"/>
-        <a:font script="Tibt" typeface="Microsoft Himalaya"/>
-        <a:font script="Thaa" typeface="MV Boli"/>
-        <a:font script="Deva" typeface="Mangal"/>
-        <a:font script="Telu" typeface="Gautami"/>
-        <a:font script="Taml" typeface="Latha"/>
-        <a:font script="Syrc" typeface="Estrangelo Edessa"/>
-        <a:font script="Orya" typeface="Kalinga"/>
-        <a:font script="Mlym" typeface="Kartika"/>
-        <a:font script="Laoo" typeface="DokChampa"/>
-        <a:font script="Sinh" typeface="Iskoola Pota"/>
-        <a:font script="Mong" typeface="Mongolian Baiti"/>
-        <a:font script="Viet" typeface="Arial"/>
-        <a:font script="Uigh" typeface="Microsoft Uighur"/>
-        <a:font script="Geor" typeface="Sylfaen"/>
-        <a:font script="Armn" typeface="Arial"/>
-        <a:font script="Bugi" typeface="Leelawadee UI"/>
-        <a:font script="Bopo" typeface="Microsoft JhengHei"/>
-        <a:font script="Java" typeface="Javanese Text"/>
-        <a:font script="Lisu" typeface="Segoe UI"/>
-        <a:font script="Mymr" typeface="Myanmar Text"/>
-        <a:font script="Nkoo" typeface="Ebrima"/>
-        <a:font script="Olck" typeface="Nirmala UI"/>
-        <a:font script="Osma" typeface="Ebrima"/>
-        <a:font script="Phag" typeface="Phagspa"/>
-        <a:font script="Syrn" typeface="Estrangelo Edessa"/>
-        <a:font script="Syrj" typeface="Estrangelo Edessa"/>
-        <a:font script="Syre" typeface="Estrangelo Edessa"/>
-        <a:font script="Sora" typeface="Nirmala UI"/>
-        <a:font script="Tale" typeface="Microsoft Tai Le"/>
-        <a:font script="Talu" typeface="Microsoft New Tai Lue"/>
-        <a:font script="Tfng" typeface="Ebrima"/>
-      </a:minorFont>
-    </a:fontScheme>
-    <a:fmtScheme name="Office">
-      <a:fillStyleLst>
-        <a:solidFill>
-          <a:schemeClr val="phClr"/>
-        </a:solidFill>
-        <a:gradFill rotWithShape="1">
-          <a:gsLst>
-            <a:gs pos="0">
-              <a:schemeClr val="phClr">
-                <a:lumMod val="110000"/>
-                <a:satMod val="105000"/>
-                <a:tint val="67000"/>
-              </a:schemeClr>
-            </a:gs>
-            <a:gs pos="50000">
-              <a:schemeClr val="phClr">
-                <a:lumMod val="105000"/>
-                <a:satMod val="103000"/>
-                <a:tint val="73000"/>
-              </a:schemeClr>
-            </a:gs>
-            <a:gs pos="100000">
-              <a:schemeClr val="phClr">
-                <a:lumMod val="105000"/>
-                <a:satMod val="109000"/>
-                <a:tint val="81000"/>
-              </a:schemeClr>
-            </a:gs>
-          </a:gsLst>
-          <a:lin ang="5400000" scaled="0"/>
-        </a:gradFill>
-        <a:gradFill rotWithShape="1">
-          <a:gsLst>
-            <a:gs pos="0">
-              <a:schemeClr val="phClr">
-                <a:satMod val="103000"/>
-                <a:lumMod val="102000"/>
-                <a:tint val="94000"/>
-              </a:schemeClr>
-            </a:gs>
-            <a:gs pos="50000">
-              <a:schemeClr val="phClr">
-                <a:satMod val="110000"/>
-                <a:lumMod val="100000"/>
-                <a:shade val="100000"/>
-              </a:schemeClr>
-            </a:gs>
-            <a:gs pos="100000">
-              <a:schemeClr val="phClr">
-                <a:lumMod val="99000"/>
-                <a:satMod val="120000"/>
-                <a:shade val="78000"/>
-              </a:schemeClr>
-            </a:gs>
-          </a:gsLst>
-          <a:lin ang="5400000" scaled="0"/>
-        </a:gradFill>
-      </a:fillStyleLst>
-      <a:lnStyleLst>
-        <a:ln w="6350" cap="flat" cmpd="sng" algn="ctr">
-          <a:solidFill>
-            <a:schemeClr val="phClr"/>
-          </a:solidFill>
-          <a:prstDash val="solid"/>
-          <a:miter lim="800000"/>
-        </a:ln>
-        <a:ln w="12700" cap="flat" cmpd="sng" algn="ctr">
-          <a:solidFill>
-            <a:schemeClr val="phClr"/>
-          </a:solidFill>
-          <a:prstDash val="solid"/>
-          <a:miter lim="800000"/>
-        </a:ln>
-        <a:ln w="19050" cap="flat" cmpd="sng" algn="ctr">
-          <a:solidFill>
-            <a:schemeClr val="phClr"/>
-          </a:solidFill>
-          <a:prstDash val="solid"/>
-          <a:miter lim="800000"/>
-        </a:ln>
-      </a:lnStyleLst>
-      <a:effectStyleLst>
-        <a:effectStyle>
-          <a:effectLst/>
-        </a:effectStyle>
-        <a:effectStyle>
-          <a:effectLst/>
-        </a:effectStyle>
-        <a:effectStyle>
-          <a:effectLst>
-            <a:outerShdw blurRad="57150" dist="19050" dir="5400000" algn="ctr" rotWithShape="0">
-              <a:srgbClr val="000000">
-                <a:alpha val="63000"/>
-              </a:srgbClr>
-            </a:outerShdw>
-          </a:effectLst>
-        </a:effectStyle>
-      </a:effectStyleLst>
-      <a:bgFillStyleLst>
-        <a:solidFill>
-          <a:schemeClr val="phClr"/>
-        </a:solidFill>
-        <a:solidFill>
-          <a:schemeClr val="phClr">
-            <a:tint val="95000"/>
-            <a:satMod val="170000"/>
-          </a:schemeClr>
-        </a:solidFill>
-        <a:gradFill rotWithShape="1">
-          <a:gsLst>
-            <a:gs pos="0">
-              <a:schemeClr val="phClr">
-                <a:tint val="93000"/>
-                <a:satMod val="150000"/>
-                <a:shade val="98000"/>
-                <a:lumMod val="102000"/>
-              </a:schemeClr>
-            </a:gs>
-            <a:gs pos="50000">
-              <a:schemeClr val="phClr">
-                <a:tint val="98000"/>
-                <a:satMod val="130000"/>
-                <a:shade val="90000"/>
-                <a:lumMod val="103000"/>
-              </a:schemeClr>
-            </a:gs>
-            <a:gs pos="100000">
-              <a:schemeClr val="phClr">
-                <a:shade val="63000"/>
-                <a:satMod val="120000"/>
-              </a:schemeClr>
-            </a:gs>
-          </a:gsLst>
-          <a:lin ang="5400000" scaled="0"/>
-        </a:gradFill>
-      </a:bgFillStyleLst>
-    </a:fmtScheme>
-  </a:themeElements>
-  <a:objectDefaults/>
-  <a:extraClrSchemeLst/>
-  <a:extLst>
-    <a:ext uri="{05A4C25C-085E-4340-85A3-A5531E510DB2}">
-      <thm15:themeFamily xmlns:thm15="http://schemas.microsoft.com/office/thememl/2012/main" name="Office Theme" id="{62F939B6-93AF-4DB8-9C6B-D6C7DFDC589F}" vid="{4A3C46E8-61CC-4603-A589-7422A47A8E4A}"/>
-    </a:ext>
-  </a:extLst>
-</a:theme>
 </file>